--- a/docs/pitch/hackathon/Locus-hackathon.pptx
+++ b/docs/pitch/hackathon/Locus-hackathon.pptx
@@ -18,9 +18,11 @@
     <p:sldId id="266" r:id="rId12"/>
     <p:sldId id="267" r:id="rId13"/>
     <p:sldId id="268" r:id="rId14"/>
+    <p:sldId id="269" r:id="rId15"/>
+    <p:sldId id="270" r:id="rId16"/>
   </p:sldIdLst>
   <p:notesMasterIdLst>
-    <p:notesMasterId r:id="rId15"/>
+    <p:notesMasterId r:id="rId17"/>
   </p:notesMasterIdLst>
   <p:sldSz cx="12192000" cy="6858000"/>
   <p:notesSz cx="6858000" cy="12192000"/>
@@ -618,31 +620,31 @@
                 <c:ptCount val="9"/>
                 <c:lvl>
                   <c:pt idx="0">
+                    <c:v>Authoring &amp; modes</c:v>
+                  </c:pt>
+                  <c:pt idx="1">
+                    <c:v>Task board &amp; worklist</c:v>
+                  </c:pt>
+                  <c:pt idx="2">
                     <c:v>Context &amp; records</c:v>
                   </c:pt>
-                  <c:pt idx="1">
+                  <c:pt idx="3">
+                    <c:v>Scheduler &amp; availability</c:v>
+                  </c:pt>
+                  <c:pt idx="4">
                     <c:v>Review &amp; merge loop</c:v>
                   </c:pt>
-                  <c:pt idx="2">
-                    <c:v>Task board &amp; worklist</c:v>
+                  <c:pt idx="5">
+                    <c:v>Integrations &amp; auth</c:v>
                   </c:pt>
-                  <c:pt idx="3">
+                  <c:pt idx="6">
                     <c:v>Security &amp; code review</c:v>
                   </c:pt>
-                  <c:pt idx="4">
-                    <c:v>Integrations &amp; auth</c:v>
-                  </c:pt>
-                  <c:pt idx="5">
-                    <c:v>Authoring &amp; modes</c:v>
-                  </c:pt>
-                  <c:pt idx="6">
-                    <c:v>Scheduler &amp; availability</c:v>
-                  </c:pt>
                   <c:pt idx="7">
-                    <c:v>Worker &amp; platform</c:v>
+                    <c:v>QA sign-off loop</c:v>
                   </c:pt>
                   <c:pt idx="8">
-                    <c:v>QA sign-off loop</c:v>
+                    <c:v>Worker &amp; platform</c:v>
                   </c:pt>
                 </c:lvl>
               </c:multiLvlStrCache>
@@ -655,31 +657,31 @@
                 <c:formatCode>General</c:formatCode>
                 <c:ptCount val="9"/>
                 <c:pt idx="0">
-                  <c:v>114</c:v>
+                  <c:v>156</c:v>
                 </c:pt>
                 <c:pt idx="1">
-                  <c:v>102</c:v>
+                  <c:v>120</c:v>
                 </c:pt>
                 <c:pt idx="2">
-                  <c:v>100</c:v>
+                  <c:v>116</c:v>
                 </c:pt>
                 <c:pt idx="3">
-                  <c:v>93</c:v>
+                  <c:v>108</c:v>
                 </c:pt>
                 <c:pt idx="4">
+                  <c:v>94</c:v>
+                </c:pt>
+                <c:pt idx="5">
+                  <c:v>94</c:v>
+                </c:pt>
+                <c:pt idx="6">
                   <c:v>90</c:v>
                 </c:pt>
-                <c:pt idx="5">
-                  <c:v>70</c:v>
-                </c:pt>
-                <c:pt idx="6">
-                  <c:v>56</c:v>
-                </c:pt>
                 <c:pt idx="7">
-                  <c:v>48</c:v>
+                  <c:v>33</c:v>
                 </c:pt>
                 <c:pt idx="8">
-                  <c:v>33</c:v>
+                  <c:v>21</c:v>
                 </c:pt>
               </c:numCache>
             </c:numRef>
@@ -760,7 +762,7 @@
         <c:axId val="2094734552"/>
         <c:scaling>
           <c:orientation val="minMax"/>
-          <c:max val="130"/>
+          <c:max val="175"/>
           <c:min val="0"/>
         </c:scaling>
         <c:delete val="0"/>
@@ -1102,19 +1104,19 @@
               <c:numCache>
                 <c:ptCount val="5"/>
                 <c:pt idx="0">
-                  <c:v>18497</c:v>
+                  <c:v>22082</c:v>
                 </c:pt>
                 <c:pt idx="1">
-                  <c:v>11058</c:v>
+                  <c:v>14249</c:v>
                 </c:pt>
                 <c:pt idx="2">
-                  <c:v>9216</c:v>
+                  <c:v>9983</c:v>
                 </c:pt>
                 <c:pt idx="3">
-                  <c:v>3955</c:v>
+                  <c:v>4872</c:v>
                 </c:pt>
                 <c:pt idx="4">
-                  <c:v>1959</c:v>
+                  <c:v>2505</c:v>
                 </c:pt>
               </c:numCache>
             </c:numRef>
@@ -1742,7 +1744,7 @@
           <a:p>
             <a:r>
               <a:rPr lang="en-US" dirty="0"/>
-              <a:t>The time agent answers on your behalf when you are booked. Importance is decided deterministically first — a reviewer mid-round, or a ticket already blocked on you — and only unstructured messages reach a classifier, which has no tools bound.</a:t>
+              <a:t>This is the slide that changed most recently. Until this run, every integration call was written against the documented API and unproven. A ticket was assigned, the agent wrote the code, a human approved it, it merged, the testing team was briefed, a tester replied, and the ticket closed on that reply. The step worth watching is the middle one: GitHub closes a ticket the moment a linked pull request merges, and this repository is configured to close on QA sign-off instead, so Locus reopened it and left it open until a person confirmed.</a:t>
             </a:r>
             <a:endParaRPr lang="en-US" dirty="0"/>
           </a:p>
@@ -1830,7 +1832,7 @@
           <a:p>
             <a:r>
               <a:rPr lang="en-US" dirty="0"/>
-              <a:t>Every AI coding tool solves the same twenty percent: writing the diff. Locus builds the eighty percent around it — which is exactly what makes the author swappable, and why adding autonomous mode changed one setting instead of forking the product.</a:t>
+              <a:t>Six defects, found by running the thing rather than by testing it. The first is the one worth naming: the command this project documents for running the backend puts the application on an event loop that cannot start a subprocess, and the entire authoring feature is a subprocess. It failed in exactly one environment and passed every test. The attribution one matters for a different reason: a commit written by a model carried a human name, which is both dishonest in the record and broke the guard that stops an agent overwriting someone's work.</a:t>
             </a:r>
             <a:endParaRPr lang="en-US" dirty="0"/>
           </a:p>
@@ -1918,7 +1920,7 @@
           <a:p>
             <a:r>
               <a:rPr lang="en-US" dirty="0"/>
-              <a:t>A ticket goes in and a signed-off change comes out. You pick per ticket whether you write the code or Locus does. Thank you.</a:t>
+              <a:t>The time agent answers on your behalf when you are booked. Importance is decided deterministically first — a reviewer mid-round, or a ticket already blocked on you — and only unstructured messages reach a classifier, which has no tools bound.</a:t>
             </a:r>
             <a:endParaRPr lang="en-US" dirty="0"/>
           </a:p>
@@ -1942,6 +1944,182 @@
             <a:fld id="{F7021451-1387-4CA6-816F-3879F97B5CBC}" type="slidenum">
               <a:rPr lang="en-US"/>
               <a:t>13</a:t>
+            </a:fld>
+            <a:endParaRPr lang="en-US"/>
+          </a:p>
+        </p:txBody>
+      </p:sp>
+    </p:spTree>
+    <p:extLst>
+      <p:ext uri="{BB962C8B-B14F-4D97-AF65-F5344CB8AC3E}">
+        <p14:creationId xmlns:p14="http://schemas.microsoft.com/office/powerpoint/2010/main" val="1024086991"/>
+      </p:ext>
+    </p:extLst>
+  </p:cSld>
+  <p:clrMapOvr>
+    <a:masterClrMapping/>
+  </p:clrMapOvr>
+</p:notes>
+</file>
+
+<file path=ppt/notesSlides/notesSlide14.xml><?xml version="1.0" encoding="utf-8"?>
+<p:notes xmlns:a="http://schemas.openxmlformats.org/drawingml/2006/main" xmlns:r="http://schemas.openxmlformats.org/officeDocument/2006/relationships" xmlns:p="http://schemas.openxmlformats.org/presentationml/2006/main">
+  <p:cSld>
+    <p:spTree>
+      <p:nvGrpSpPr>
+        <p:cNvPr id="1" name=""/>
+        <p:cNvGrpSpPr/>
+        <p:nvPr/>
+      </p:nvGrpSpPr>
+      <p:grpSpPr>
+        <a:xfrm>
+          <a:off x="0" y="0"/>
+          <a:ext cx="0" cy="0"/>
+          <a:chOff x="0" y="0"/>
+          <a:chExt cx="0" cy="0"/>
+        </a:xfrm>
+      </p:grpSpPr>
+      <p:sp>
+        <p:nvSpPr>
+          <p:cNvPr id="2" name="Slide Image Placeholder 1"/>
+          <p:cNvSpPr>
+            <a:spLocks noGrp="1" noRot="1" noChangeAspect="1"/>
+          </p:cNvSpPr>
+          <p:nvPr>
+            <p:ph type="sldImg"/>
+          </p:nvPr>
+        </p:nvSpPr>
+        <p:spPr/>
+      </p:sp>
+      <p:sp>
+        <p:nvSpPr>
+          <p:cNvPr id="3" name="Notes Placeholder 2"/>
+          <p:cNvSpPr>
+            <a:spLocks noGrp="1"/>
+          </p:cNvSpPr>
+          <p:nvPr>
+            <p:ph type="body" idx="1"/>
+          </p:nvPr>
+        </p:nvSpPr>
+        <p:spPr/>
+        <p:txBody>
+          <a:bodyPr/>
+          <a:lstStyle/>
+          <a:p>
+            <a:r>
+              <a:rPr lang="en-US" dirty="0"/>
+              <a:t>Every AI coding tool solves the same twenty percent: writing the diff. Locus builds the eighty percent around it — which is exactly what makes the author swappable, and why adding autonomous mode changed one setting instead of forking the product.</a:t>
+            </a:r>
+            <a:endParaRPr lang="en-US" dirty="0"/>
+          </a:p>
+        </p:txBody>
+      </p:sp>
+      <p:sp>
+        <p:nvSpPr>
+          <p:cNvPr id="4" name="Slide Number Placeholder 3"/>
+          <p:cNvSpPr>
+            <a:spLocks noGrp="1"/>
+          </p:cNvSpPr>
+          <p:nvPr>
+            <p:ph type="sldNum" sz="quarter" idx="10"/>
+          </p:nvPr>
+        </p:nvSpPr>
+        <p:spPr/>
+        <p:txBody>
+          <a:bodyPr/>
+          <a:lstStyle/>
+          <a:p>
+            <a:fld id="{F7021451-1387-4CA6-816F-3879F97B5CBC}" type="slidenum">
+              <a:rPr lang="en-US"/>
+              <a:t>14</a:t>
+            </a:fld>
+            <a:endParaRPr lang="en-US"/>
+          </a:p>
+        </p:txBody>
+      </p:sp>
+    </p:spTree>
+    <p:extLst>
+      <p:ext uri="{BB962C8B-B14F-4D97-AF65-F5344CB8AC3E}">
+        <p14:creationId xmlns:p14="http://schemas.microsoft.com/office/powerpoint/2010/main" val="1024086991"/>
+      </p:ext>
+    </p:extLst>
+  </p:cSld>
+  <p:clrMapOvr>
+    <a:masterClrMapping/>
+  </p:clrMapOvr>
+</p:notes>
+</file>
+
+<file path=ppt/notesSlides/notesSlide15.xml><?xml version="1.0" encoding="utf-8"?>
+<p:notes xmlns:a="http://schemas.openxmlformats.org/drawingml/2006/main" xmlns:r="http://schemas.openxmlformats.org/officeDocument/2006/relationships" xmlns:p="http://schemas.openxmlformats.org/presentationml/2006/main">
+  <p:cSld>
+    <p:spTree>
+      <p:nvGrpSpPr>
+        <p:cNvPr id="1" name=""/>
+        <p:cNvGrpSpPr/>
+        <p:nvPr/>
+      </p:nvGrpSpPr>
+      <p:grpSpPr>
+        <a:xfrm>
+          <a:off x="0" y="0"/>
+          <a:ext cx="0" cy="0"/>
+          <a:chOff x="0" y="0"/>
+          <a:chExt cx="0" cy="0"/>
+        </a:xfrm>
+      </p:grpSpPr>
+      <p:sp>
+        <p:nvSpPr>
+          <p:cNvPr id="2" name="Slide Image Placeholder 1"/>
+          <p:cNvSpPr>
+            <a:spLocks noGrp="1" noRot="1" noChangeAspect="1"/>
+          </p:cNvSpPr>
+          <p:nvPr>
+            <p:ph type="sldImg"/>
+          </p:nvPr>
+        </p:nvSpPr>
+        <p:spPr/>
+      </p:sp>
+      <p:sp>
+        <p:nvSpPr>
+          <p:cNvPr id="3" name="Notes Placeholder 2"/>
+          <p:cNvSpPr>
+            <a:spLocks noGrp="1"/>
+          </p:cNvSpPr>
+          <p:nvPr>
+            <p:ph type="body" idx="1"/>
+          </p:nvPr>
+        </p:nvSpPr>
+        <p:spPr/>
+        <p:txBody>
+          <a:bodyPr/>
+          <a:lstStyle/>
+          <a:p>
+            <a:r>
+              <a:rPr lang="en-US" dirty="0"/>
+              <a:t>A ticket goes in and a signed-off change comes out. You pick per ticket whether you write the code or Locus does. Thank you.</a:t>
+            </a:r>
+            <a:endParaRPr lang="en-US" dirty="0"/>
+          </a:p>
+        </p:txBody>
+      </p:sp>
+      <p:sp>
+        <p:nvSpPr>
+          <p:cNvPr id="4" name="Slide Number Placeholder 3"/>
+          <p:cNvSpPr>
+            <a:spLocks noGrp="1"/>
+          </p:cNvSpPr>
+          <p:nvPr>
+            <p:ph type="sldNum" sz="quarter" idx="10"/>
+          </p:nvPr>
+        </p:nvSpPr>
+        <p:spPr/>
+        <p:txBody>
+          <a:bodyPr/>
+          <a:lstStyle/>
+          <a:p>
+            <a:fld id="{F7021451-1387-4CA6-816F-3879F97B5CBC}" type="slidenum">
+              <a:rPr lang="en-US"/>
+              <a:t>15</a:t>
             </a:fld>
             <a:endParaRPr lang="en-US"/>
           </a:p>
@@ -2622,7 +2800,7 @@
           <a:p>
             <a:r>
               <a:rPr lang="en-US" dirty="0"/>
-              <a:t>706 tests across nine subsystems. The heaviest coverage sits on the loops that send messages to real people, because those are the ones where a bug is visible to somebody else's team.</a:t>
+              <a:t>859 tests across nine subsystems. The heaviest coverage sits on the loops that send messages to real people, because those are the ones where a bug is visible to somebody else's team.</a:t>
             </a:r>
             <a:endParaRPr lang="en-US" dirty="0"/>
           </a:p>
@@ -3288,7 +3466,7 @@
                 <a:ea typeface="Cambria" pitchFamily="34" charset="-122"/>
                 <a:cs typeface="Cambria" pitchFamily="34" charset="-120"/>
               </a:rPr>
-              <a:t>706</a:t>
+              <a:t>859</a:t>
             </a:r>
             <a:endParaRPr lang="en-US" sz="3000" dirty="0"/>
           </a:p>
@@ -4357,7 +4535,7 @@
     <p:bg>
       <p:bgPr>
         <a:solidFill>
-          <a:srgbClr val="F0EEE6"/>
+          <a:srgbClr val="1F1E1D"/>
         </a:solidFill>
       </p:bgPr>
     </p:bg>
@@ -4402,13 +4580,13 @@
             <a:r>
               <a:rPr lang="en-US" sz="3100" b="1" dirty="0">
                 <a:solidFill>
-                  <a:srgbClr val="191919"/>
+                  <a:srgbClr val="F5F3EE"/>
                 </a:solidFill>
                 <a:latin typeface="Cambria" pitchFamily="34" charset="0"/>
                 <a:ea typeface="Cambria" pitchFamily="34" charset="-122"/>
                 <a:cs typeface="Cambria" pitchFamily="34" charset="-120"/>
               </a:rPr>
-              <a:t>In autonomous mode, your reviewers become the bottleneck.</a:t>
+              <a:t>The pipeline has now carried a ticket to sign-off on live services.</a:t>
             </a:r>
             <a:endParaRPr lang="en-US" sz="3100" dirty="0"/>
           </a:p>
@@ -4441,13 +4619,13 @@
             <a:r>
               <a:rPr lang="en-US" sz="1450" dirty="0">
                 <a:solidFill>
-                  <a:srgbClr val="73716C"/>
-                </a:solidFill>
-                <a:latin typeface="Calibri" pitchFamily="34" charset="0"/>
-                <a:ea typeface="Calibri" pitchFamily="34" charset="-122"/>
-                <a:cs typeface="Calibri" pitchFamily="34" charset="-120"/>
-              </a:rPr>
-              <a:t>They are the only humans left in the loop — so Locus protects their time.</a:t>
+                  <a:srgbClr val="A8A49C"/>
+                </a:solidFill>
+                <a:latin typeface="Calibri" pitchFamily="34" charset="0"/>
+                <a:ea typeface="Calibri" pitchFamily="34" charset="-122"/>
+                <a:cs typeface="Calibri" pitchFamily="34" charset="-120"/>
+              </a:rPr>
+              <a:t>One work item, start to finish, against real GitHub, Slack, Gmail and Google Docs — not a fixture.</a:t>
             </a:r>
             <a:endParaRPr lang="en-US" sz="1450" dirty="0"/>
           </a:p>
@@ -4455,187 +4633,833 @@
       </p:sp>
       <p:sp>
         <p:nvSpPr>
-          <p:cNvPr id="4" name="Shape 2"/>
-          <p:cNvSpPr/>
-          <p:nvPr/>
-        </p:nvSpPr>
-        <p:spPr>
-          <a:xfrm>
-            <a:off x="685800" y="2121408"/>
-            <a:ext cx="5321808" cy="2468880"/>
+          <p:cNvPr id="4" name="Text 2"/>
+          <p:cNvSpPr/>
+          <p:nvPr/>
+        </p:nvSpPr>
+        <p:spPr>
+          <a:xfrm>
+            <a:off x="713232" y="2194560"/>
+            <a:ext cx="384048" cy="384048"/>
+          </a:xfrm>
+          <a:prstGeom prst="ellipse">
+            <a:avLst/>
+          </a:prstGeom>
+          <a:solidFill>
+            <a:srgbClr val="D97757"/>
+          </a:solidFill>
+          <a:ln/>
+        </p:spPr>
+        <p:txBody>
+          <a:bodyPr wrap="square" lIns="0" tIns="0" rIns="0" bIns="0" rtlCol="0" anchor="ctr"/>
+          <a:lstStyle/>
+          <a:p>
+            <a:pPr algn="ctr" indent="0" marL="0">
+              <a:buNone/>
+            </a:pPr>
+            <a:r>
+              <a:rPr lang="en-US" sz="1200" b="1" dirty="0">
+                <a:solidFill>
+                  <a:srgbClr val="1F1E1D"/>
+                </a:solidFill>
+                <a:latin typeface="Calibri" pitchFamily="34" charset="0"/>
+                <a:ea typeface="Calibri" pitchFamily="34" charset="-122"/>
+                <a:cs typeface="Calibri" pitchFamily="34" charset="-120"/>
+              </a:rPr>
+              <a:t>1</a:t>
+            </a:r>
+            <a:endParaRPr lang="en-US" sz="1200" dirty="0"/>
+          </a:p>
+        </p:txBody>
+      </p:sp>
+      <p:sp>
+        <p:nvSpPr>
+          <p:cNvPr id="5" name="Text 3"/>
+          <p:cNvSpPr/>
+          <p:nvPr/>
+        </p:nvSpPr>
+        <p:spPr>
+          <a:xfrm>
+            <a:off x="1261872" y="2139696"/>
+            <a:ext cx="3246120" cy="292608"/>
+          </a:xfrm>
+          <a:prstGeom prst="rect">
+            <a:avLst/>
+          </a:prstGeom>
+          <a:noFill/>
+          <a:ln/>
+        </p:spPr>
+        <p:txBody>
+          <a:bodyPr wrap="square" lIns="0" tIns="0" rIns="0" bIns="0" rtlCol="0" anchor="ctr"/>
+          <a:lstStyle/>
+          <a:p>
+            <a:pPr indent="0" marL="0">
+              <a:buNone/>
+            </a:pPr>
+            <a:r>
+              <a:rPr lang="en-US" sz="1300" b="1" dirty="0">
+                <a:solidFill>
+                  <a:srgbClr val="F5F3EE"/>
+                </a:solidFill>
+                <a:latin typeface="Calibri" pitchFamily="34" charset="0"/>
+                <a:ea typeface="Calibri" pitchFamily="34" charset="-122"/>
+                <a:cs typeface="Calibri" pitchFamily="34" charset="-120"/>
+              </a:rPr>
+              <a:t>Ticket assigned</a:t>
+            </a:r>
+            <a:endParaRPr lang="en-US" sz="1300" dirty="0"/>
+          </a:p>
+        </p:txBody>
+      </p:sp>
+      <p:sp>
+        <p:nvSpPr>
+          <p:cNvPr id="6" name="Text 4"/>
+          <p:cNvSpPr/>
+          <p:nvPr/>
+        </p:nvSpPr>
+        <p:spPr>
+          <a:xfrm>
+            <a:off x="1261872" y="2404872"/>
+            <a:ext cx="5120640" cy="274320"/>
+          </a:xfrm>
+          <a:prstGeom prst="rect">
+            <a:avLst/>
+          </a:prstGeom>
+          <a:noFill/>
+          <a:ln/>
+        </p:spPr>
+        <p:txBody>
+          <a:bodyPr wrap="square" lIns="0" tIns="0" rIns="0" bIns="0" rtlCol="0" anchor="ctr"/>
+          <a:lstStyle/>
+          <a:p>
+            <a:pPr indent="0" marL="0">
+              <a:buNone/>
+            </a:pPr>
+            <a:r>
+              <a:rPr lang="en-US" sz="1050" dirty="0">
+                <a:solidFill>
+                  <a:srgbClr val="A8A49C"/>
+                </a:solidFill>
+                <a:latin typeface="Calibri" pitchFamily="34" charset="0"/>
+                <a:ea typeface="Calibri" pitchFamily="34" charset="-122"/>
+                <a:cs typeface="Calibri" pitchFamily="34" charset="-120"/>
+              </a:rPr>
+              <a:t>GitHub issue #1, one repository</a:t>
+            </a:r>
+            <a:endParaRPr lang="en-US" sz="1050" dirty="0"/>
+          </a:p>
+        </p:txBody>
+      </p:sp>
+      <p:sp>
+        <p:nvSpPr>
+          <p:cNvPr id="7" name="Text 5"/>
+          <p:cNvSpPr/>
+          <p:nvPr/>
+        </p:nvSpPr>
+        <p:spPr>
+          <a:xfrm>
+            <a:off x="713232" y="2862072"/>
+            <a:ext cx="384048" cy="384048"/>
+          </a:xfrm>
+          <a:prstGeom prst="ellipse">
+            <a:avLst/>
+          </a:prstGeom>
+          <a:solidFill>
+            <a:srgbClr val="D97757"/>
+          </a:solidFill>
+          <a:ln/>
+        </p:spPr>
+        <p:txBody>
+          <a:bodyPr wrap="square" lIns="0" tIns="0" rIns="0" bIns="0" rtlCol="0" anchor="ctr"/>
+          <a:lstStyle/>
+          <a:p>
+            <a:pPr algn="ctr" indent="0" marL="0">
+              <a:buNone/>
+            </a:pPr>
+            <a:r>
+              <a:rPr lang="en-US" sz="1200" b="1" dirty="0">
+                <a:solidFill>
+                  <a:srgbClr val="1F1E1D"/>
+                </a:solidFill>
+                <a:latin typeface="Calibri" pitchFamily="34" charset="0"/>
+                <a:ea typeface="Calibri" pitchFamily="34" charset="-122"/>
+                <a:cs typeface="Calibri" pitchFamily="34" charset="-120"/>
+              </a:rPr>
+              <a:t>2</a:t>
+            </a:r>
+            <a:endParaRPr lang="en-US" sz="1200" dirty="0"/>
+          </a:p>
+        </p:txBody>
+      </p:sp>
+      <p:sp>
+        <p:nvSpPr>
+          <p:cNvPr id="8" name="Text 6"/>
+          <p:cNvSpPr/>
+          <p:nvPr/>
+        </p:nvSpPr>
+        <p:spPr>
+          <a:xfrm>
+            <a:off x="1261872" y="2807208"/>
+            <a:ext cx="3246120" cy="292608"/>
+          </a:xfrm>
+          <a:prstGeom prst="rect">
+            <a:avLst/>
+          </a:prstGeom>
+          <a:noFill/>
+          <a:ln/>
+        </p:spPr>
+        <p:txBody>
+          <a:bodyPr wrap="square" lIns="0" tIns="0" rIns="0" bIns="0" rtlCol="0" anchor="ctr"/>
+          <a:lstStyle/>
+          <a:p>
+            <a:pPr indent="0" marL="0">
+              <a:buNone/>
+            </a:pPr>
+            <a:r>
+              <a:rPr lang="en-US" sz="1300" b="1" dirty="0">
+                <a:solidFill>
+                  <a:srgbClr val="F5F3EE"/>
+                </a:solidFill>
+                <a:latin typeface="Calibri" pitchFamily="34" charset="0"/>
+                <a:ea typeface="Calibri" pitchFamily="34" charset="-122"/>
+                <a:cs typeface="Calibri" pitchFamily="34" charset="-120"/>
+              </a:rPr>
+              <a:t>Agent wrote the code</a:t>
+            </a:r>
+            <a:endParaRPr lang="en-US" sz="1300" dirty="0"/>
+          </a:p>
+        </p:txBody>
+      </p:sp>
+      <p:sp>
+        <p:nvSpPr>
+          <p:cNvPr id="9" name="Text 7"/>
+          <p:cNvSpPr/>
+          <p:nvPr/>
+        </p:nvSpPr>
+        <p:spPr>
+          <a:xfrm>
+            <a:off x="1261872" y="3072384"/>
+            <a:ext cx="5120640" cy="274320"/>
+          </a:xfrm>
+          <a:prstGeom prst="rect">
+            <a:avLst/>
+          </a:prstGeom>
+          <a:noFill/>
+          <a:ln/>
+        </p:spPr>
+        <p:txBody>
+          <a:bodyPr wrap="square" lIns="0" tIns="0" rIns="0" bIns="0" rtlCol="0" anchor="ctr"/>
+          <a:lstStyle/>
+          <a:p>
+            <a:pPr indent="0" marL="0">
+              <a:buNone/>
+            </a:pPr>
+            <a:r>
+              <a:rPr lang="en-US" sz="1050" dirty="0">
+                <a:solidFill>
+                  <a:srgbClr val="A8A49C"/>
+                </a:solidFill>
+                <a:latin typeface="Calibri" pitchFamily="34" charset="0"/>
+                <a:ea typeface="Calibri" pitchFamily="34" charset="-122"/>
+                <a:cs typeface="Calibri" pitchFamily="34" charset="-120"/>
+              </a:rPr>
+              <a:t>worktree cut from the local clone</a:t>
+            </a:r>
+            <a:endParaRPr lang="en-US" sz="1050" dirty="0"/>
+          </a:p>
+        </p:txBody>
+      </p:sp>
+      <p:sp>
+        <p:nvSpPr>
+          <p:cNvPr id="10" name="Text 8"/>
+          <p:cNvSpPr/>
+          <p:nvPr/>
+        </p:nvSpPr>
+        <p:spPr>
+          <a:xfrm>
+            <a:off x="4617720" y="2807208"/>
+            <a:ext cx="822960" cy="292608"/>
+          </a:xfrm>
+          <a:prstGeom prst="rect">
+            <a:avLst/>
+          </a:prstGeom>
+          <a:noFill/>
+          <a:ln/>
+        </p:spPr>
+        <p:txBody>
+          <a:bodyPr wrap="square" lIns="0" tIns="0" rIns="0" bIns="0" rtlCol="0" anchor="ctr"/>
+          <a:lstStyle/>
+          <a:p>
+            <a:pPr indent="0" marL="0">
+              <a:buNone/>
+            </a:pPr>
+            <a:r>
+              <a:rPr lang="en-US" sz="1300" b="1" dirty="0">
+                <a:solidFill>
+                  <a:srgbClr val="D4A27F"/>
+                </a:solidFill>
+                <a:latin typeface="Cambria" pitchFamily="34" charset="0"/>
+                <a:ea typeface="Cambria" pitchFamily="34" charset="-122"/>
+                <a:cs typeface="Cambria" pitchFamily="34" charset="-120"/>
+              </a:rPr>
+              <a:t>106s</a:t>
+            </a:r>
+            <a:endParaRPr lang="en-US" sz="1300" dirty="0"/>
+          </a:p>
+        </p:txBody>
+      </p:sp>
+      <p:sp>
+        <p:nvSpPr>
+          <p:cNvPr id="11" name="Text 9"/>
+          <p:cNvSpPr/>
+          <p:nvPr/>
+        </p:nvSpPr>
+        <p:spPr>
+          <a:xfrm>
+            <a:off x="713232" y="3529584"/>
+            <a:ext cx="384048" cy="384048"/>
+          </a:xfrm>
+          <a:prstGeom prst="ellipse">
+            <a:avLst/>
+          </a:prstGeom>
+          <a:solidFill>
+            <a:srgbClr val="D97757"/>
+          </a:solidFill>
+          <a:ln/>
+        </p:spPr>
+        <p:txBody>
+          <a:bodyPr wrap="square" lIns="0" tIns="0" rIns="0" bIns="0" rtlCol="0" anchor="ctr"/>
+          <a:lstStyle/>
+          <a:p>
+            <a:pPr algn="ctr" indent="0" marL="0">
+              <a:buNone/>
+            </a:pPr>
+            <a:r>
+              <a:rPr lang="en-US" sz="1200" b="1" dirty="0">
+                <a:solidFill>
+                  <a:srgbClr val="1F1E1D"/>
+                </a:solidFill>
+                <a:latin typeface="Calibri" pitchFamily="34" charset="0"/>
+                <a:ea typeface="Calibri" pitchFamily="34" charset="-122"/>
+                <a:cs typeface="Calibri" pitchFamily="34" charset="-120"/>
+              </a:rPr>
+              <a:t>3</a:t>
+            </a:r>
+            <a:endParaRPr lang="en-US" sz="1200" dirty="0"/>
+          </a:p>
+        </p:txBody>
+      </p:sp>
+      <p:sp>
+        <p:nvSpPr>
+          <p:cNvPr id="12" name="Text 10"/>
+          <p:cNvSpPr/>
+          <p:nvPr/>
+        </p:nvSpPr>
+        <p:spPr>
+          <a:xfrm>
+            <a:off x="1261872" y="3474720"/>
+            <a:ext cx="3246120" cy="292608"/>
+          </a:xfrm>
+          <a:prstGeom prst="rect">
+            <a:avLst/>
+          </a:prstGeom>
+          <a:noFill/>
+          <a:ln/>
+        </p:spPr>
+        <p:txBody>
+          <a:bodyPr wrap="square" lIns="0" tIns="0" rIns="0" bIns="0" rtlCol="0" anchor="ctr"/>
+          <a:lstStyle/>
+          <a:p>
+            <a:pPr indent="0" marL="0">
+              <a:buNone/>
+            </a:pPr>
+            <a:r>
+              <a:rPr lang="en-US" sz="1300" b="1" dirty="0">
+                <a:solidFill>
+                  <a:srgbClr val="F5F3EE"/>
+                </a:solidFill>
+                <a:latin typeface="Calibri" pitchFamily="34" charset="0"/>
+                <a:ea typeface="Calibri" pitchFamily="34" charset="-122"/>
+                <a:cs typeface="Calibri" pitchFamily="34" charset="-120"/>
+              </a:rPr>
+              <a:t>Pull request opened</a:t>
+            </a:r>
+            <a:endParaRPr lang="en-US" sz="1300" dirty="0"/>
+          </a:p>
+        </p:txBody>
+      </p:sp>
+      <p:sp>
+        <p:nvSpPr>
+          <p:cNvPr id="13" name="Text 11"/>
+          <p:cNvSpPr/>
+          <p:nvPr/>
+        </p:nvSpPr>
+        <p:spPr>
+          <a:xfrm>
+            <a:off x="1261872" y="3739896"/>
+            <a:ext cx="5120640" cy="274320"/>
+          </a:xfrm>
+          <a:prstGeom prst="rect">
+            <a:avLst/>
+          </a:prstGeom>
+          <a:noFill/>
+          <a:ln/>
+        </p:spPr>
+        <p:txBody>
+          <a:bodyPr wrap="square" lIns="0" tIns="0" rIns="0" bIns="0" rtlCol="0" anchor="ctr"/>
+          <a:lstStyle/>
+          <a:p>
+            <a:pPr indent="0" marL="0">
+              <a:buNone/>
+            </a:pPr>
+            <a:r>
+              <a:rPr lang="en-US" sz="1050" dirty="0">
+                <a:solidFill>
+                  <a:srgbClr val="A8A49C"/>
+                </a:solidFill>
+                <a:latin typeface="Calibri" pitchFamily="34" charset="0"/>
+                <a:ea typeface="Calibri" pitchFamily="34" charset="-122"/>
+                <a:cs typeface="Calibri" pitchFamily="34" charset="-120"/>
+              </a:rPr>
+              <a:t>3 files, +161 lines, machine-authored banner</a:t>
+            </a:r>
+            <a:endParaRPr lang="en-US" sz="1050" dirty="0"/>
+          </a:p>
+        </p:txBody>
+      </p:sp>
+      <p:sp>
+        <p:nvSpPr>
+          <p:cNvPr id="14" name="Text 12"/>
+          <p:cNvSpPr/>
+          <p:nvPr/>
+        </p:nvSpPr>
+        <p:spPr>
+          <a:xfrm>
+            <a:off x="713232" y="4197096"/>
+            <a:ext cx="384048" cy="384048"/>
+          </a:xfrm>
+          <a:prstGeom prst="ellipse">
+            <a:avLst/>
+          </a:prstGeom>
+          <a:solidFill>
+            <a:srgbClr val="D97757"/>
+          </a:solidFill>
+          <a:ln/>
+        </p:spPr>
+        <p:txBody>
+          <a:bodyPr wrap="square" lIns="0" tIns="0" rIns="0" bIns="0" rtlCol="0" anchor="ctr"/>
+          <a:lstStyle/>
+          <a:p>
+            <a:pPr algn="ctr" indent="0" marL="0">
+              <a:buNone/>
+            </a:pPr>
+            <a:r>
+              <a:rPr lang="en-US" sz="1200" b="1" dirty="0">
+                <a:solidFill>
+                  <a:srgbClr val="1F1E1D"/>
+                </a:solidFill>
+                <a:latin typeface="Calibri" pitchFamily="34" charset="0"/>
+                <a:ea typeface="Calibri" pitchFamily="34" charset="-122"/>
+                <a:cs typeface="Calibri" pitchFamily="34" charset="-120"/>
+              </a:rPr>
+              <a:t>4</a:t>
+            </a:r>
+            <a:endParaRPr lang="en-US" sz="1200" dirty="0"/>
+          </a:p>
+        </p:txBody>
+      </p:sp>
+      <p:sp>
+        <p:nvSpPr>
+          <p:cNvPr id="15" name="Text 13"/>
+          <p:cNvSpPr/>
+          <p:nvPr/>
+        </p:nvSpPr>
+        <p:spPr>
+          <a:xfrm>
+            <a:off x="1261872" y="4142232"/>
+            <a:ext cx="3246120" cy="292608"/>
+          </a:xfrm>
+          <a:prstGeom prst="rect">
+            <a:avLst/>
+          </a:prstGeom>
+          <a:noFill/>
+          <a:ln/>
+        </p:spPr>
+        <p:txBody>
+          <a:bodyPr wrap="square" lIns="0" tIns="0" rIns="0" bIns="0" rtlCol="0" anchor="ctr"/>
+          <a:lstStyle/>
+          <a:p>
+            <a:pPr indent="0" marL="0">
+              <a:buNone/>
+            </a:pPr>
+            <a:r>
+              <a:rPr lang="en-US" sz="1300" b="1" dirty="0">
+                <a:solidFill>
+                  <a:srgbClr val="F5F3EE"/>
+                </a:solidFill>
+                <a:latin typeface="Calibri" pitchFamily="34" charset="0"/>
+                <a:ea typeface="Calibri" pitchFamily="34" charset="-122"/>
+                <a:cs typeface="Calibri" pitchFamily="34" charset="-120"/>
+              </a:rPr>
+              <a:t>Analysed on local models</a:t>
+            </a:r>
+            <a:endParaRPr lang="en-US" sz="1300" dirty="0"/>
+          </a:p>
+        </p:txBody>
+      </p:sp>
+      <p:sp>
+        <p:nvSpPr>
+          <p:cNvPr id="16" name="Text 14"/>
+          <p:cNvSpPr/>
+          <p:nvPr/>
+        </p:nvSpPr>
+        <p:spPr>
+          <a:xfrm>
+            <a:off x="1261872" y="4407408"/>
+            <a:ext cx="5120640" cy="274320"/>
+          </a:xfrm>
+          <a:prstGeom prst="rect">
+            <a:avLst/>
+          </a:prstGeom>
+          <a:noFill/>
+          <a:ln/>
+        </p:spPr>
+        <p:txBody>
+          <a:bodyPr wrap="square" lIns="0" tIns="0" rIns="0" bIns="0" rtlCol="0" anchor="ctr"/>
+          <a:lstStyle/>
+          <a:p>
+            <a:pPr indent="0" marL="0">
+              <a:buNone/>
+            </a:pPr>
+            <a:r>
+              <a:rPr lang="en-US" sz="1050" dirty="0">
+                <a:solidFill>
+                  <a:srgbClr val="A8A49C"/>
+                </a:solidFill>
+                <a:latin typeface="Calibri" pitchFamily="34" charset="0"/>
+                <a:ea typeface="Calibri" pitchFamily="34" charset="-122"/>
+                <a:cs typeface="Calibri" pitchFamily="34" charset="-120"/>
+              </a:rPr>
+              <a:t>security scan and code review, no cloud call</a:t>
+            </a:r>
+            <a:endParaRPr lang="en-US" sz="1050" dirty="0"/>
+          </a:p>
+        </p:txBody>
+      </p:sp>
+      <p:sp>
+        <p:nvSpPr>
+          <p:cNvPr id="17" name="Text 15"/>
+          <p:cNvSpPr/>
+          <p:nvPr/>
+        </p:nvSpPr>
+        <p:spPr>
+          <a:xfrm>
+            <a:off x="713232" y="4864608"/>
+            <a:ext cx="384048" cy="384048"/>
+          </a:xfrm>
+          <a:prstGeom prst="ellipse">
+            <a:avLst/>
+          </a:prstGeom>
+          <a:solidFill>
+            <a:srgbClr val="D97757"/>
+          </a:solidFill>
+          <a:ln/>
+        </p:spPr>
+        <p:txBody>
+          <a:bodyPr wrap="square" lIns="0" tIns="0" rIns="0" bIns="0" rtlCol="0" anchor="ctr"/>
+          <a:lstStyle/>
+          <a:p>
+            <a:pPr algn="ctr" indent="0" marL="0">
+              <a:buNone/>
+            </a:pPr>
+            <a:r>
+              <a:rPr lang="en-US" sz="1200" b="1" dirty="0">
+                <a:solidFill>
+                  <a:srgbClr val="1F1E1D"/>
+                </a:solidFill>
+                <a:latin typeface="Calibri" pitchFamily="34" charset="0"/>
+                <a:ea typeface="Calibri" pitchFamily="34" charset="-122"/>
+                <a:cs typeface="Calibri" pitchFamily="34" charset="-120"/>
+              </a:rPr>
+              <a:t>5</a:t>
+            </a:r>
+            <a:endParaRPr lang="en-US" sz="1200" dirty="0"/>
+          </a:p>
+        </p:txBody>
+      </p:sp>
+      <p:sp>
+        <p:nvSpPr>
+          <p:cNvPr id="18" name="Text 16"/>
+          <p:cNvSpPr/>
+          <p:nvPr/>
+        </p:nvSpPr>
+        <p:spPr>
+          <a:xfrm>
+            <a:off x="1261872" y="4809744"/>
+            <a:ext cx="3246120" cy="292608"/>
+          </a:xfrm>
+          <a:prstGeom prst="rect">
+            <a:avLst/>
+          </a:prstGeom>
+          <a:noFill/>
+          <a:ln/>
+        </p:spPr>
+        <p:txBody>
+          <a:bodyPr wrap="square" lIns="0" tIns="0" rIns="0" bIns="0" rtlCol="0" anchor="ctr"/>
+          <a:lstStyle/>
+          <a:p>
+            <a:pPr indent="0" marL="0">
+              <a:buNone/>
+            </a:pPr>
+            <a:r>
+              <a:rPr lang="en-US" sz="1300" b="1" dirty="0">
+                <a:solidFill>
+                  <a:srgbClr val="F5F3EE"/>
+                </a:solidFill>
+                <a:latin typeface="Calibri" pitchFamily="34" charset="0"/>
+                <a:ea typeface="Calibri" pitchFamily="34" charset="-122"/>
+                <a:cs typeface="Calibri" pitchFamily="34" charset="-120"/>
+              </a:rPr>
+              <a:t>Reviewed and merged</a:t>
+            </a:r>
+            <a:endParaRPr lang="en-US" sz="1300" dirty="0"/>
+          </a:p>
+        </p:txBody>
+      </p:sp>
+      <p:sp>
+        <p:nvSpPr>
+          <p:cNvPr id="19" name="Text 17"/>
+          <p:cNvSpPr/>
+          <p:nvPr/>
+        </p:nvSpPr>
+        <p:spPr>
+          <a:xfrm>
+            <a:off x="1261872" y="5074920"/>
+            <a:ext cx="5120640" cy="274320"/>
+          </a:xfrm>
+          <a:prstGeom prst="rect">
+            <a:avLst/>
+          </a:prstGeom>
+          <a:noFill/>
+          <a:ln/>
+        </p:spPr>
+        <p:txBody>
+          <a:bodyPr wrap="square" lIns="0" tIns="0" rIns="0" bIns="0" rtlCol="0" anchor="ctr"/>
+          <a:lstStyle/>
+          <a:p>
+            <a:pPr indent="0" marL="0">
+              <a:buNone/>
+            </a:pPr>
+            <a:r>
+              <a:rPr lang="en-US" sz="1050" dirty="0">
+                <a:solidFill>
+                  <a:srgbClr val="A8A49C"/>
+                </a:solidFill>
+                <a:latin typeface="Calibri" pitchFamily="34" charset="0"/>
+                <a:ea typeface="Calibri" pitchFamily="34" charset="-122"/>
+                <a:cs typeface="Calibri" pitchFamily="34" charset="-120"/>
+              </a:rPr>
+              <a:t>human approval — the agent cannot approve itself</a:t>
+            </a:r>
+            <a:endParaRPr lang="en-US" sz="1050" dirty="0"/>
+          </a:p>
+        </p:txBody>
+      </p:sp>
+      <p:sp>
+        <p:nvSpPr>
+          <p:cNvPr id="20" name="Text 18"/>
+          <p:cNvSpPr/>
+          <p:nvPr/>
+        </p:nvSpPr>
+        <p:spPr>
+          <a:xfrm>
+            <a:off x="713232" y="5532120"/>
+            <a:ext cx="384048" cy="384048"/>
+          </a:xfrm>
+          <a:prstGeom prst="ellipse">
+            <a:avLst/>
+          </a:prstGeom>
+          <a:solidFill>
+            <a:srgbClr val="D97757"/>
+          </a:solidFill>
+          <a:ln/>
+        </p:spPr>
+        <p:txBody>
+          <a:bodyPr wrap="square" lIns="0" tIns="0" rIns="0" bIns="0" rtlCol="0" anchor="ctr"/>
+          <a:lstStyle/>
+          <a:p>
+            <a:pPr algn="ctr" indent="0" marL="0">
+              <a:buNone/>
+            </a:pPr>
+            <a:r>
+              <a:rPr lang="en-US" sz="1200" b="1" dirty="0">
+                <a:solidFill>
+                  <a:srgbClr val="1F1E1D"/>
+                </a:solidFill>
+                <a:latin typeface="Calibri" pitchFamily="34" charset="0"/>
+                <a:ea typeface="Calibri" pitchFamily="34" charset="-122"/>
+                <a:cs typeface="Calibri" pitchFamily="34" charset="-120"/>
+              </a:rPr>
+              <a:t>6</a:t>
+            </a:r>
+            <a:endParaRPr lang="en-US" sz="1200" dirty="0"/>
+          </a:p>
+        </p:txBody>
+      </p:sp>
+      <p:sp>
+        <p:nvSpPr>
+          <p:cNvPr id="21" name="Text 19"/>
+          <p:cNvSpPr/>
+          <p:nvPr/>
+        </p:nvSpPr>
+        <p:spPr>
+          <a:xfrm>
+            <a:off x="1261872" y="5477256"/>
+            <a:ext cx="3246120" cy="292608"/>
+          </a:xfrm>
+          <a:prstGeom prst="rect">
+            <a:avLst/>
+          </a:prstGeom>
+          <a:noFill/>
+          <a:ln/>
+        </p:spPr>
+        <p:txBody>
+          <a:bodyPr wrap="square" lIns="0" tIns="0" rIns="0" bIns="0" rtlCol="0" anchor="ctr"/>
+          <a:lstStyle/>
+          <a:p>
+            <a:pPr indent="0" marL="0">
+              <a:buNone/>
+            </a:pPr>
+            <a:r>
+              <a:rPr lang="en-US" sz="1300" b="1" dirty="0">
+                <a:solidFill>
+                  <a:srgbClr val="F5F3EE"/>
+                </a:solidFill>
+                <a:latin typeface="Calibri" pitchFamily="34" charset="0"/>
+                <a:ea typeface="Calibri" pitchFamily="34" charset="-122"/>
+                <a:cs typeface="Calibri" pitchFamily="34" charset="-120"/>
+              </a:rPr>
+              <a:t>Testing team signed off</a:t>
+            </a:r>
+            <a:endParaRPr lang="en-US" sz="1300" dirty="0"/>
+          </a:p>
+        </p:txBody>
+      </p:sp>
+      <p:sp>
+        <p:nvSpPr>
+          <p:cNvPr id="22" name="Text 20"/>
+          <p:cNvSpPr/>
+          <p:nvPr/>
+        </p:nvSpPr>
+        <p:spPr>
+          <a:xfrm>
+            <a:off x="1261872" y="5742432"/>
+            <a:ext cx="5120640" cy="274320"/>
+          </a:xfrm>
+          <a:prstGeom prst="rect">
+            <a:avLst/>
+          </a:prstGeom>
+          <a:noFill/>
+          <a:ln/>
+        </p:spPr>
+        <p:txBody>
+          <a:bodyPr wrap="square" lIns="0" tIns="0" rIns="0" bIns="0" rtlCol="0" anchor="ctr"/>
+          <a:lstStyle/>
+          <a:p>
+            <a:pPr indent="0" marL="0">
+              <a:buNone/>
+            </a:pPr>
+            <a:r>
+              <a:rPr lang="en-US" sz="1050" dirty="0">
+                <a:solidFill>
+                  <a:srgbClr val="A8A49C"/>
+                </a:solidFill>
+                <a:latin typeface="Calibri" pitchFamily="34" charset="0"/>
+                <a:ea typeface="Calibri" pitchFamily="34" charset="-122"/>
+                <a:cs typeface="Calibri" pitchFamily="34" charset="-120"/>
+              </a:rPr>
+              <a:t>brief sent, tester replied, ticket closed</a:t>
+            </a:r>
+            <a:endParaRPr lang="en-US" sz="1050" dirty="0"/>
+          </a:p>
+        </p:txBody>
+      </p:sp>
+      <p:sp>
+        <p:nvSpPr>
+          <p:cNvPr id="23" name="Shape 21"/>
+          <p:cNvSpPr/>
+          <p:nvPr/>
+        </p:nvSpPr>
+        <p:spPr>
+          <a:xfrm>
+            <a:off x="6903720" y="2084832"/>
+            <a:ext cx="4599432" cy="3310128"/>
           </a:xfrm>
           <a:prstGeom prst="roundRect">
             <a:avLst>
-              <a:gd name="adj" fmla="val 3333"/>
+              <a:gd name="adj" fmla="val 2486"/>
             </a:avLst>
           </a:prstGeom>
           <a:solidFill>
-            <a:srgbClr val="FAF9F5"/>
+            <a:srgbClr val="2A2826"/>
           </a:solidFill>
-          <a:ln w="9525">
+          <a:ln w="12700">
             <a:solidFill>
-              <a:srgbClr val="DFDBD1"/>
+              <a:srgbClr val="D97757"/>
             </a:solidFill>
             <a:prstDash val="solid"/>
           </a:ln>
-          <a:effectLst>
-            <a:outerShdw sx="100000" sy="100000" kx="0" ky="0" algn="bl" rotWithShape="0" blurRad="152400" dist="25400" dir="5400000">
-              <a:srgbClr val="8C857A">
-                <a:alpha val="16000"/>
-              </a:srgbClr>
-            </a:outerShdw>
-          </a:effectLst>
-        </p:spPr>
-      </p:sp>
-      <p:sp>
-        <p:nvSpPr>
-          <p:cNvPr id="5" name="Text 3"/>
-          <p:cNvSpPr/>
-          <p:nvPr/>
-        </p:nvSpPr>
-        <p:spPr>
-          <a:xfrm>
-            <a:off x="987552" y="2359152"/>
-            <a:ext cx="4754880" cy="256032"/>
-          </a:xfrm>
-          <a:prstGeom prst="rect">
-            <a:avLst/>
-          </a:prstGeom>
-          <a:noFill/>
-          <a:ln/>
-        </p:spPr>
-        <p:txBody>
-          <a:bodyPr wrap="square" lIns="0" tIns="0" rIns="0" bIns="0" rtlCol="0" anchor="ctr"/>
-          <a:lstStyle/>
-          <a:p>
-            <a:pPr indent="0" marL="0">
-              <a:buNone/>
-            </a:pPr>
-            <a:r>
-              <a:rPr lang="en-US" sz="1100" dirty="0">
-                <a:solidFill>
-                  <a:srgbClr val="73716C"/>
-                </a:solidFill>
-                <a:latin typeface="Calibri" pitchFamily="34" charset="0"/>
-                <a:ea typeface="Calibri" pitchFamily="34" charset="-122"/>
-                <a:cs typeface="Calibri" pitchFamily="34" charset="-120"/>
-              </a:rPr>
-              <a:t>14:10 — someone messages you</a:t>
-            </a:r>
-            <a:endParaRPr lang="en-US" sz="1100" dirty="0"/>
-          </a:p>
-        </p:txBody>
-      </p:sp>
-      <p:sp>
-        <p:nvSpPr>
-          <p:cNvPr id="6" name="Text 4"/>
-          <p:cNvSpPr/>
-          <p:nvPr/>
-        </p:nvSpPr>
-        <p:spPr>
-          <a:xfrm>
-            <a:off x="987552" y="2651760"/>
-            <a:ext cx="4754880" cy="292608"/>
-          </a:xfrm>
-          <a:prstGeom prst="rect">
-            <a:avLst/>
-          </a:prstGeom>
-          <a:noFill/>
-          <a:ln/>
-        </p:spPr>
-        <p:txBody>
-          <a:bodyPr wrap="square" lIns="0" tIns="0" rIns="0" bIns="0" rtlCol="0" anchor="ctr"/>
-          <a:lstStyle/>
-          <a:p>
-            <a:pPr indent="0" marL="0">
-              <a:buNone/>
-            </a:pPr>
-            <a:r>
-              <a:rPr lang="en-US" sz="1450" b="1" dirty="0">
-                <a:solidFill>
-                  <a:srgbClr val="191919"/>
-                </a:solidFill>
-                <a:latin typeface="Calibri" pitchFamily="34" charset="0"/>
-                <a:ea typeface="Calibri" pitchFamily="34" charset="-122"/>
-                <a:cs typeface="Calibri" pitchFamily="34" charset="-120"/>
-              </a:rPr>
-              <a:t>You are in a meeting until 15:30.</a:t>
-            </a:r>
-            <a:endParaRPr lang="en-US" sz="1450" dirty="0"/>
-          </a:p>
-        </p:txBody>
-      </p:sp>
-      <p:sp>
-        <p:nvSpPr>
-          <p:cNvPr id="7" name="Shape 5"/>
-          <p:cNvSpPr/>
-          <p:nvPr/>
-        </p:nvSpPr>
-        <p:spPr>
-          <a:xfrm>
-            <a:off x="987552" y="3127248"/>
-            <a:ext cx="4709160" cy="914400"/>
-          </a:xfrm>
-          <a:prstGeom prst="roundRect">
-            <a:avLst>
-              <a:gd name="adj" fmla="val 8000"/>
-            </a:avLst>
-          </a:prstGeom>
-          <a:solidFill>
-            <a:srgbClr val="EBDBBC"/>
-          </a:solidFill>
-          <a:ln/>
-        </p:spPr>
-      </p:sp>
-      <p:sp>
-        <p:nvSpPr>
-          <p:cNvPr id="8" name="Text 6"/>
-          <p:cNvSpPr/>
-          <p:nvPr/>
-        </p:nvSpPr>
-        <p:spPr>
-          <a:xfrm>
-            <a:off x="1234440" y="3127248"/>
-            <a:ext cx="4206240" cy="914400"/>
-          </a:xfrm>
-          <a:prstGeom prst="rect">
-            <a:avLst/>
-          </a:prstGeom>
-          <a:noFill/>
-          <a:ln/>
-        </p:spPr>
-        <p:txBody>
-          <a:bodyPr wrap="square" lIns="0" tIns="0" rIns="0" bIns="0" rtlCol="0" anchor="ctr"/>
-          <a:lstStyle/>
-          <a:p>
-            <a:pPr indent="0" marL="0">
-              <a:buNone/>
-            </a:pPr>
-            <a:r>
-              <a:rPr lang="en-US" sz="1450" i="1" dirty="0">
-                <a:solidFill>
-                  <a:srgbClr val="191919"/>
-                </a:solidFill>
-                <a:latin typeface="Calibri" pitchFamily="34" charset="0"/>
-                <a:ea typeface="Calibri" pitchFamily="34" charset="-122"/>
-                <a:cs typeface="Calibri" pitchFamily="34" charset="-120"/>
-              </a:rPr>
-              <a:t>“Nakul is booked until 15:30 IST.”</a:t>
-            </a:r>
-            <a:endParaRPr lang="en-US" sz="1450" dirty="0"/>
-          </a:p>
-        </p:txBody>
-      </p:sp>
-      <p:sp>
-        <p:nvSpPr>
-          <p:cNvPr id="9" name="Text 7"/>
-          <p:cNvSpPr/>
-          <p:nvPr/>
-        </p:nvSpPr>
-        <p:spPr>
-          <a:xfrm>
-            <a:off x="987552" y="4114800"/>
-            <a:ext cx="4709160" cy="411480"/>
+        </p:spPr>
+      </p:sp>
+      <p:sp>
+        <p:nvSpPr>
+          <p:cNvPr id="24" name="Text 22"/>
+          <p:cNvSpPr/>
+          <p:nvPr/>
+        </p:nvSpPr>
+        <p:spPr>
+          <a:xfrm>
+            <a:off x="7223760" y="2340864"/>
+            <a:ext cx="4023360" cy="237744"/>
+          </a:xfrm>
+          <a:prstGeom prst="rect">
+            <a:avLst/>
+          </a:prstGeom>
+          <a:noFill/>
+          <a:ln/>
+        </p:spPr>
+        <p:txBody>
+          <a:bodyPr wrap="square" lIns="0" tIns="0" rIns="0" bIns="0" rtlCol="0" anchor="ctr"/>
+          <a:lstStyle/>
+          <a:p>
+            <a:pPr indent="0" marL="0">
+              <a:buNone/>
+            </a:pPr>
+            <a:r>
+              <a:rPr lang="en-US" sz="1050" b="1" spc="240" kern="0" dirty="0">
+                <a:solidFill>
+                  <a:srgbClr val="D97757"/>
+                </a:solidFill>
+                <a:latin typeface="Calibri" pitchFamily="34" charset="0"/>
+                <a:ea typeface="Calibri" pitchFamily="34" charset="-122"/>
+                <a:cs typeface="Calibri" pitchFamily="34" charset="-120"/>
+              </a:rPr>
+              <a:t>THE STEP THAT PROVES THE DESIGN</a:t>
+            </a:r>
+            <a:endParaRPr lang="en-US" sz="1050" dirty="0"/>
+          </a:p>
+        </p:txBody>
+      </p:sp>
+      <p:sp>
+        <p:nvSpPr>
+          <p:cNvPr id="25" name="Text 23"/>
+          <p:cNvSpPr/>
+          <p:nvPr/>
+        </p:nvSpPr>
+        <p:spPr>
+          <a:xfrm>
+            <a:off x="7242048" y="2761488"/>
+            <a:ext cx="3977640" cy="2468880"/>
           </a:xfrm>
           <a:prstGeom prst="rect">
             <a:avLst/>
@@ -4649,85 +5473,53 @@
           <a:p>
             <a:pPr indent="0" marL="0">
               <a:lnSpc>
-                <a:spcPct val="120000"/>
+                <a:spcPct val="118000"/>
               </a:lnSpc>
               <a:buNone/>
             </a:pPr>
             <a:r>
-              <a:rPr lang="en-US" sz="1050" dirty="0">
-                <a:solidFill>
-                  <a:srgbClr val="73716C"/>
-                </a:solidFill>
-                <a:latin typeface="Calibri" pitchFamily="34" charset="0"/>
-                <a:ea typeface="Calibri" pitchFamily="34" charset="-122"/>
-                <a:cs typeface="Calibri" pitchFamily="34" charset="-120"/>
-              </a:rPr>
-              <a:t>Status and end time only. There is no field on the type that could carry the meeting's subject.</a:t>
-            </a:r>
-            <a:endParaRPr lang="en-US" sz="1050" dirty="0"/>
-          </a:p>
-        </p:txBody>
-      </p:sp>
-      <p:sp>
-        <p:nvSpPr>
-          <p:cNvPr id="10" name="Shape 8"/>
-          <p:cNvSpPr/>
-          <p:nvPr/>
-        </p:nvSpPr>
-        <p:spPr>
-          <a:xfrm>
-            <a:off x="6199632" y="2121408"/>
-            <a:ext cx="5321808" cy="2468880"/>
-          </a:xfrm>
-          <a:prstGeom prst="roundRect">
-            <a:avLst>
-              <a:gd name="adj" fmla="val 3333"/>
-            </a:avLst>
-          </a:prstGeom>
-          <a:solidFill>
-            <a:srgbClr val="FAF9F5"/>
-          </a:solidFill>
-          <a:ln w="9525">
-            <a:solidFill>
-              <a:srgbClr val="DFDBD1"/>
-            </a:solidFill>
-            <a:prstDash val="solid"/>
-          </a:ln>
-          <a:effectLst>
-            <a:outerShdw sx="100000" sy="100000" kx="0" ky="0" algn="bl" rotWithShape="0" blurRad="152400" dist="25400" dir="5400000">
-              <a:srgbClr val="8C857A">
-                <a:alpha val="16000"/>
-              </a:srgbClr>
-            </a:outerShdw>
-          </a:effectLst>
-        </p:spPr>
-      </p:sp>
-      <p:sp>
-        <p:nvSpPr>
-          <p:cNvPr id="11" name="Text 9"/>
-          <p:cNvSpPr/>
-          <p:nvPr/>
-        </p:nvSpPr>
-        <p:spPr>
-          <a:xfrm>
-            <a:off x="6501384" y="2359152"/>
-            <a:ext cx="4754880" cy="237744"/>
-          </a:xfrm>
-          <a:prstGeom prst="rect">
-            <a:avLst/>
-          </a:prstGeom>
-          <a:noFill/>
-          <a:ln/>
-        </p:spPr>
-        <p:txBody>
-          <a:bodyPr wrap="square" lIns="0" tIns="0" rIns="0" bIns="0" rtlCol="0" anchor="ctr"/>
-          <a:lstStyle/>
-          <a:p>
-            <a:pPr indent="0" marL="0">
-              <a:buNone/>
-            </a:pPr>
-            <a:r>
-              <a:rPr lang="en-US" sz="1050" b="1" spc="240" kern="0" dirty="0">
+              <a:rPr lang="en-US" sz="1150" b="1" dirty="0">
+                <a:solidFill>
+                  <a:srgbClr val="F5F3EE"/>
+                </a:solidFill>
+                <a:latin typeface="Calibri" pitchFamily="34" charset="0"/>
+                <a:ea typeface="Calibri" pitchFamily="34" charset="-122"/>
+                <a:cs typeface="Calibri" pitchFamily="34" charset="-120"/>
+              </a:rPr>
+              <a:t>Merged</a:t>
+            </a:r>
+            <a:endParaRPr lang="en-US" sz="1150" dirty="0"/>
+          </a:p>
+          <a:p>
+            <a:pPr indent="0" marL="0">
+              <a:lnSpc>
+                <a:spcPct val="118000"/>
+              </a:lnSpc>
+              <a:buNone/>
+            </a:pPr>
+            <a:r>
+              <a:rPr lang="en-US" sz="1150" dirty="0">
+                <a:solidFill>
+                  <a:srgbClr val="A8A49C"/>
+                </a:solidFill>
+                <a:latin typeface="Calibri" pitchFamily="34" charset="0"/>
+                <a:ea typeface="Calibri" pitchFamily="34" charset="-122"/>
+                <a:cs typeface="Calibri" pitchFamily="34" charset="-120"/>
+              </a:rPr>
+              <a:t>GitHub closed the ticket automatically.
+</a:t>
+            </a:r>
+            <a:endParaRPr lang="en-US" sz="1150" dirty="0"/>
+          </a:p>
+          <a:p>
+            <a:pPr indent="0" marL="0">
+              <a:lnSpc>
+                <a:spcPct val="118000"/>
+              </a:lnSpc>
+              <a:buNone/>
+            </a:pPr>
+            <a:r>
+              <a:rPr lang="en-US" sz="1150" b="1" dirty="0">
                 <a:solidFill>
                   <a:srgbClr val="D97757"/>
                 </a:solidFill>
@@ -4735,499 +5527,109 @@
                 <a:ea typeface="Calibri" pitchFamily="34" charset="-122"/>
                 <a:cs typeface="Calibri" pitchFamily="34" charset="-120"/>
               </a:rPr>
-              <a:t>IF IT ACTUALLY MATTERS</a:t>
-            </a:r>
-            <a:endParaRPr lang="en-US" sz="1050" dirty="0"/>
-          </a:p>
-        </p:txBody>
-      </p:sp>
-      <p:sp>
-        <p:nvSpPr>
-          <p:cNvPr id="12" name="Text 10"/>
-          <p:cNvSpPr/>
-          <p:nvPr/>
-        </p:nvSpPr>
-        <p:spPr>
-          <a:xfrm>
-            <a:off x="6501384" y="2688336"/>
-            <a:ext cx="4754880" cy="256032"/>
-          </a:xfrm>
-          <a:prstGeom prst="rect">
-            <a:avLst/>
-          </a:prstGeom>
-          <a:noFill/>
-          <a:ln/>
-        </p:spPr>
-        <p:txBody>
-          <a:bodyPr wrap="square" lIns="0" tIns="0" rIns="0" bIns="0" rtlCol="0" anchor="ctr"/>
-          <a:lstStyle/>
-          <a:p>
-            <a:pPr indent="0" marL="0">
+              <a:t>Reopened, 2 minutes later</a:t>
+            </a:r>
+            <a:endParaRPr lang="en-US" sz="1150" dirty="0"/>
+          </a:p>
+          <a:p>
+            <a:pPr indent="0" marL="0">
+              <a:lnSpc>
+                <a:spcPct val="118000"/>
+              </a:lnSpc>
               <a:buNone/>
             </a:pPr>
             <a:r>
               <a:rPr lang="en-US" sz="1150" dirty="0">
                 <a:solidFill>
-                  <a:srgbClr val="191919"/>
-                </a:solidFill>
-                <a:latin typeface="Calibri" pitchFamily="34" charset="0"/>
-                <a:ea typeface="Calibri" pitchFamily="34" charset="-122"/>
-                <a:cs typeface="Calibri" pitchFamily="34" charset="-120"/>
-              </a:rPr>
-              <a:t>Importance is decided before any model is asked:</a:t>
+                  <a:srgbClr val="A8A49C"/>
+                </a:solidFill>
+                <a:latin typeface="Calibri" pitchFamily="34" charset="0"/>
+                <a:ea typeface="Calibri" pitchFamily="34" charset="-122"/>
+                <a:cs typeface="Calibri" pitchFamily="34" charset="-120"/>
+              </a:rPr>
+              <a:t>This repository closes on QA sign-off, not at merge — so Locus put it back.
+</a:t>
             </a:r>
             <a:endParaRPr lang="en-US" sz="1150" dirty="0"/>
           </a:p>
-        </p:txBody>
-      </p:sp>
-      <p:sp>
-        <p:nvSpPr>
-          <p:cNvPr id="13" name="Text 11"/>
-          <p:cNvSpPr/>
-          <p:nvPr/>
-        </p:nvSpPr>
-        <p:spPr>
-          <a:xfrm>
-            <a:off x="6537960" y="3017520"/>
-            <a:ext cx="4663440" cy="1051560"/>
-          </a:xfrm>
-          <a:prstGeom prst="rect">
-            <a:avLst/>
-          </a:prstGeom>
-          <a:noFill/>
-          <a:ln/>
-        </p:spPr>
-        <p:txBody>
-          <a:bodyPr wrap="square" lIns="0" tIns="0" rIns="0" bIns="0" rtlCol="0" anchor="ctr"/>
-          <a:lstStyle/>
-          <a:p>
-            <a:pPr marL="342900" indent="-342900">
-              <a:spcAft>
-                <a:spcPts val="500"/>
-              </a:spcAft>
-              <a:buSzPct val="100000"/>
-              <a:buChar char="●"/>
+          <a:p>
+            <a:pPr indent="0" marL="0">
+              <a:lnSpc>
+                <a:spcPct val="118000"/>
+              </a:lnSpc>
+              <a:buNone/>
+            </a:pPr>
+            <a:r>
+              <a:rPr lang="en-US" sz="1150" b="1" dirty="0">
+                <a:solidFill>
+                  <a:srgbClr val="F5F3EE"/>
+                </a:solidFill>
+                <a:latin typeface="Calibri" pitchFamily="34" charset="0"/>
+                <a:ea typeface="Calibri" pitchFamily="34" charset="-122"/>
+                <a:cs typeface="Calibri" pitchFamily="34" charset="-120"/>
+              </a:rPr>
+              <a:t>Signed off</a:t>
+            </a:r>
+            <a:endParaRPr lang="en-US" sz="1150" dirty="0"/>
+          </a:p>
+          <a:p>
+            <a:pPr indent="0" marL="0">
+              <a:lnSpc>
+                <a:spcPct val="118000"/>
+              </a:lnSpc>
+              <a:buNone/>
             </a:pPr>
             <a:r>
               <a:rPr lang="en-US" sz="1150" dirty="0">
                 <a:solidFill>
-                  <a:srgbClr val="73716C"/>
-                </a:solidFill>
-                <a:latin typeface="Calibri" pitchFamily="34" charset="0"/>
-                <a:ea typeface="Calibri" pitchFamily="34" charset="-122"/>
-                <a:cs typeface="Calibri" pitchFamily="34" charset="-120"/>
-              </a:rPr>
-              <a:t>the sender is a reviewer mid-round</a:t>
+                  <a:srgbClr val="A8A49C"/>
+                </a:solidFill>
+                <a:latin typeface="Calibri" pitchFamily="34" charset="0"/>
+                <a:ea typeface="Calibri" pitchFamily="34" charset="-122"/>
+                <a:cs typeface="Calibri" pitchFamily="34" charset="-120"/>
+              </a:rPr>
+              <a:t>The tester replied. Only then did it close.</a:t>
             </a:r>
             <a:endParaRPr lang="en-US" sz="1150" dirty="0"/>
           </a:p>
-          <a:p>
-            <a:pPr marL="342900" indent="-342900">
-              <a:spcAft>
-                <a:spcPts val="500"/>
-              </a:spcAft>
-              <a:buSzPct val="100000"/>
-              <a:buChar char="●"/>
-            </a:pPr>
-            <a:r>
-              <a:rPr lang="en-US" sz="1150" dirty="0">
-                <a:solidFill>
-                  <a:srgbClr val="73716C"/>
-                </a:solidFill>
-                <a:latin typeface="Calibri" pitchFamily="34" charset="0"/>
-                <a:ea typeface="Calibri" pitchFamily="34" charset="-122"/>
-                <a:cs typeface="Calibri" pitchFamily="34" charset="-120"/>
-              </a:rPr>
-              <a:t>the message names a ticket already blocked on you</a:t>
-            </a:r>
-            <a:endParaRPr lang="en-US" sz="1150" dirty="0"/>
-          </a:p>
-          <a:p>
-            <a:pPr marL="342900" indent="-342900">
-              <a:spcAft>
-                <a:spcPts val="500"/>
-              </a:spcAft>
-              <a:buSzPct val="100000"/>
-              <a:buChar char="●"/>
-            </a:pPr>
-            <a:r>
-              <a:rPr lang="en-US" sz="1150" dirty="0">
-                <a:solidFill>
-                  <a:srgbClr val="73716C"/>
-                </a:solidFill>
-                <a:latin typeface="Calibri" pitchFamily="34" charset="0"/>
-                <a:ea typeface="Calibri" pitchFamily="34" charset="-122"/>
-                <a:cs typeface="Calibri" pitchFamily="34" charset="-120"/>
-              </a:rPr>
-              <a:t>otherwise — a classifier with no tools bound</a:t>
-            </a:r>
-            <a:endParaRPr lang="en-US" sz="1150" dirty="0"/>
-          </a:p>
-        </p:txBody>
-      </p:sp>
-      <p:sp>
-        <p:nvSpPr>
-          <p:cNvPr id="14" name="Text 12"/>
-          <p:cNvSpPr/>
-          <p:nvPr/>
-        </p:nvSpPr>
-        <p:spPr>
-          <a:xfrm>
-            <a:off x="6501384" y="4114800"/>
-            <a:ext cx="4754880" cy="438912"/>
-          </a:xfrm>
-          <a:prstGeom prst="rect">
-            <a:avLst/>
-          </a:prstGeom>
-          <a:noFill/>
-          <a:ln/>
-        </p:spPr>
-        <p:txBody>
-          <a:bodyPr wrap="square" lIns="0" tIns="0" rIns="0" bIns="0" rtlCol="0" anchor="ctr"/>
-          <a:lstStyle/>
-          <a:p>
-            <a:pPr indent="0" marL="0">
-              <a:lnSpc>
-                <a:spcPct val="120000"/>
-              </a:lnSpc>
-              <a:buNone/>
-            </a:pPr>
-            <a:r>
-              <a:rPr lang="en-US" sz="1150" b="1" dirty="0">
-                <a:solidFill>
-                  <a:srgbClr val="191919"/>
-                </a:solidFill>
-                <a:latin typeface="Calibri" pitchFamily="34" charset="0"/>
-                <a:ea typeface="Calibri" pitchFamily="34" charset="-122"/>
-                <a:cs typeface="Calibri" pitchFamily="34" charset="-120"/>
-              </a:rPr>
-              <a:t>Then it proposes times instead of deflecting, and the reschedule waits in the UI.</a:t>
-            </a:r>
-            <a:endParaRPr lang="en-US" sz="1150" dirty="0"/>
-          </a:p>
-        </p:txBody>
-      </p:sp>
-      <p:sp>
-        <p:nvSpPr>
-          <p:cNvPr id="15" name="Shape 13"/>
-          <p:cNvSpPr/>
-          <p:nvPr/>
-        </p:nvSpPr>
-        <p:spPr>
-          <a:xfrm>
-            <a:off x="685800" y="4892040"/>
-            <a:ext cx="3493008" cy="1005840"/>
-          </a:xfrm>
-          <a:prstGeom prst="roundRect">
-            <a:avLst>
-              <a:gd name="adj" fmla="val 8182"/>
-            </a:avLst>
-          </a:prstGeom>
-          <a:solidFill>
-            <a:srgbClr val="FAF9F5"/>
-          </a:solidFill>
-          <a:ln w="9525">
-            <a:solidFill>
-              <a:srgbClr val="DFDBD1"/>
-            </a:solidFill>
-            <a:prstDash val="solid"/>
-          </a:ln>
-        </p:spPr>
-      </p:sp>
-      <p:sp>
-        <p:nvSpPr>
-          <p:cNvPr id="16" name="Text 14"/>
-          <p:cNvSpPr/>
-          <p:nvPr/>
-        </p:nvSpPr>
-        <p:spPr>
-          <a:xfrm>
-            <a:off x="914400" y="5029200"/>
-            <a:ext cx="3063240" cy="274320"/>
-          </a:xfrm>
-          <a:prstGeom prst="rect">
-            <a:avLst/>
-          </a:prstGeom>
-          <a:noFill/>
-          <a:ln/>
-        </p:spPr>
-        <p:txBody>
-          <a:bodyPr wrap="square" lIns="0" tIns="0" rIns="0" bIns="0" rtlCol="0" anchor="ctr"/>
-          <a:lstStyle/>
-          <a:p>
-            <a:pPr indent="0" marL="0">
-              <a:buNone/>
-            </a:pPr>
-            <a:r>
-              <a:rPr lang="en-US" sz="1150" b="1" dirty="0">
-                <a:solidFill>
-                  <a:srgbClr val="D97757"/>
-                </a:solidFill>
-                <a:latin typeface="Calibri" pitchFamily="34" charset="0"/>
-                <a:ea typeface="Calibri" pitchFamily="34" charset="-122"/>
-                <a:cs typeface="Calibri" pitchFamily="34" charset="-120"/>
-              </a:rPr>
-              <a:t>Off by default</a:t>
-            </a:r>
-            <a:endParaRPr lang="en-US" sz="1150" dirty="0"/>
-          </a:p>
-        </p:txBody>
-      </p:sp>
-      <p:sp>
-        <p:nvSpPr>
-          <p:cNvPr id="17" name="Text 15"/>
-          <p:cNvSpPr/>
-          <p:nvPr/>
-        </p:nvSpPr>
-        <p:spPr>
-          <a:xfrm>
-            <a:off x="914400" y="5303520"/>
-            <a:ext cx="3063240" cy="384048"/>
-          </a:xfrm>
-          <a:prstGeom prst="rect">
-            <a:avLst/>
-          </a:prstGeom>
-          <a:noFill/>
-          <a:ln/>
-        </p:spPr>
-        <p:txBody>
-          <a:bodyPr wrap="square" lIns="0" tIns="0" rIns="0" bIns="0" rtlCol="0" anchor="ctr"/>
-          <a:lstStyle/>
-          <a:p>
-            <a:pPr indent="0" marL="0">
-              <a:lnSpc>
-                <a:spcPct val="115000"/>
-              </a:lnSpc>
-              <a:buNone/>
-            </a:pPr>
-            <a:r>
-              <a:rPr lang="en-US" sz="1050" dirty="0">
-                <a:solidFill>
-                  <a:srgbClr val="73716C"/>
-                </a:solidFill>
-                <a:latin typeface="Calibri" pitchFamily="34" charset="0"/>
-                <a:ea typeface="Calibri" pitchFamily="34" charset="-122"/>
-                <a:cs typeface="Calibri" pitchFamily="34" charset="-120"/>
-              </a:rPr>
-              <a:t>it posts to real people</a:t>
-            </a:r>
-            <a:endParaRPr lang="en-US" sz="1050" dirty="0"/>
-          </a:p>
-        </p:txBody>
-      </p:sp>
-      <p:sp>
-        <p:nvSpPr>
-          <p:cNvPr id="18" name="Shape 16"/>
-          <p:cNvSpPr/>
-          <p:nvPr/>
-        </p:nvSpPr>
-        <p:spPr>
-          <a:xfrm>
-            <a:off x="4407408" y="4892040"/>
-            <a:ext cx="3493008" cy="1005840"/>
-          </a:xfrm>
-          <a:prstGeom prst="roundRect">
-            <a:avLst>
-              <a:gd name="adj" fmla="val 8182"/>
-            </a:avLst>
-          </a:prstGeom>
-          <a:solidFill>
-            <a:srgbClr val="FAF9F5"/>
-          </a:solidFill>
-          <a:ln w="9525">
-            <a:solidFill>
-              <a:srgbClr val="DFDBD1"/>
-            </a:solidFill>
-            <a:prstDash val="solid"/>
-          </a:ln>
-        </p:spPr>
-      </p:sp>
-      <p:sp>
-        <p:nvSpPr>
-          <p:cNvPr id="19" name="Text 17"/>
-          <p:cNvSpPr/>
-          <p:nvPr/>
-        </p:nvSpPr>
-        <p:spPr>
-          <a:xfrm>
-            <a:off x="4636008" y="5029200"/>
-            <a:ext cx="3063240" cy="274320"/>
-          </a:xfrm>
-          <a:prstGeom prst="rect">
-            <a:avLst/>
-          </a:prstGeom>
-          <a:noFill/>
-          <a:ln/>
-        </p:spPr>
-        <p:txBody>
-          <a:bodyPr wrap="square" lIns="0" tIns="0" rIns="0" bIns="0" rtlCol="0" anchor="ctr"/>
-          <a:lstStyle/>
-          <a:p>
-            <a:pPr indent="0" marL="0">
-              <a:buNone/>
-            </a:pPr>
-            <a:r>
-              <a:rPr lang="en-US" sz="1150" b="1" dirty="0">
-                <a:solidFill>
-                  <a:srgbClr val="D97757"/>
-                </a:solidFill>
-                <a:latin typeface="Calibri" pitchFamily="34" charset="0"/>
-                <a:ea typeface="Calibri" pitchFamily="34" charset="-122"/>
-                <a:cs typeface="Calibri" pitchFamily="34" charset="-120"/>
-              </a:rPr>
-              <a:t>1 reply per thread, per day</a:t>
-            </a:r>
-            <a:endParaRPr lang="en-US" sz="1150" dirty="0"/>
-          </a:p>
-        </p:txBody>
-      </p:sp>
-      <p:sp>
-        <p:nvSpPr>
-          <p:cNvPr id="20" name="Text 18"/>
-          <p:cNvSpPr/>
-          <p:nvPr/>
-        </p:nvSpPr>
-        <p:spPr>
-          <a:xfrm>
-            <a:off x="4636008" y="5303520"/>
-            <a:ext cx="3063240" cy="384048"/>
-          </a:xfrm>
-          <a:prstGeom prst="rect">
-            <a:avLst/>
-          </a:prstGeom>
-          <a:noFill/>
-          <a:ln/>
-        </p:spPr>
-        <p:txBody>
-          <a:bodyPr wrap="square" lIns="0" tIns="0" rIns="0" bIns="0" rtlCol="0" anchor="ctr"/>
-          <a:lstStyle/>
-          <a:p>
-            <a:pPr indent="0" marL="0">
-              <a:lnSpc>
-                <a:spcPct val="115000"/>
-              </a:lnSpc>
-              <a:buNone/>
-            </a:pPr>
-            <a:r>
-              <a:rPr lang="en-US" sz="1050" dirty="0">
-                <a:solidFill>
-                  <a:srgbClr val="73716C"/>
-                </a:solidFill>
-                <a:latin typeface="Calibri" pitchFamily="34" charset="0"/>
-                <a:ea typeface="Calibri" pitchFamily="34" charset="-122"/>
-                <a:cs typeface="Calibri" pitchFamily="34" charset="-120"/>
-              </a:rPr>
-              <a:t>a repeating bot gets muted</a:t>
-            </a:r>
-            <a:endParaRPr lang="en-US" sz="1050" dirty="0"/>
-          </a:p>
-        </p:txBody>
-      </p:sp>
-      <p:sp>
-        <p:nvSpPr>
-          <p:cNvPr id="21" name="Shape 19"/>
-          <p:cNvSpPr/>
-          <p:nvPr/>
-        </p:nvSpPr>
-        <p:spPr>
-          <a:xfrm>
-            <a:off x="8129016" y="4892040"/>
-            <a:ext cx="3493008" cy="1005840"/>
-          </a:xfrm>
-          <a:prstGeom prst="roundRect">
-            <a:avLst>
-              <a:gd name="adj" fmla="val 8182"/>
-            </a:avLst>
-          </a:prstGeom>
-          <a:solidFill>
-            <a:srgbClr val="FAF9F5"/>
-          </a:solidFill>
-          <a:ln w="9525">
-            <a:solidFill>
-              <a:srgbClr val="DFDBD1"/>
-            </a:solidFill>
-            <a:prstDash val="solid"/>
-          </a:ln>
-        </p:spPr>
-      </p:sp>
-      <p:sp>
-        <p:nvSpPr>
-          <p:cNvPr id="22" name="Text 20"/>
-          <p:cNvSpPr/>
-          <p:nvPr/>
-        </p:nvSpPr>
-        <p:spPr>
-          <a:xfrm>
-            <a:off x="8357616" y="5029200"/>
-            <a:ext cx="3063240" cy="274320"/>
-          </a:xfrm>
-          <a:prstGeom prst="rect">
-            <a:avLst/>
-          </a:prstGeom>
-          <a:noFill/>
-          <a:ln/>
-        </p:spPr>
-        <p:txBody>
-          <a:bodyPr wrap="square" lIns="0" tIns="0" rIns="0" bIns="0" rtlCol="0" anchor="ctr"/>
-          <a:lstStyle/>
-          <a:p>
-            <a:pPr indent="0" marL="0">
-              <a:buNone/>
-            </a:pPr>
-            <a:r>
-              <a:rPr lang="en-US" sz="1150" b="1" dirty="0">
-                <a:solidFill>
-                  <a:srgbClr val="D97757"/>
-                </a:solidFill>
-                <a:latin typeface="Calibri" pitchFamily="34" charset="0"/>
-                <a:ea typeface="Calibri" pitchFamily="34" charset="-122"/>
-                <a:cs typeface="Calibri" pitchFamily="34" charset="-120"/>
-              </a:rPr>
-              <a:t>An unreadable calendar reads “free”</a:t>
-            </a:r>
-            <a:endParaRPr lang="en-US" sz="1150" dirty="0"/>
-          </a:p>
-        </p:txBody>
-      </p:sp>
-      <p:sp>
-        <p:nvSpPr>
-          <p:cNvPr id="23" name="Text 21"/>
-          <p:cNvSpPr/>
-          <p:nvPr/>
-        </p:nvSpPr>
-        <p:spPr>
-          <a:xfrm>
-            <a:off x="8357616" y="5303520"/>
-            <a:ext cx="3063240" cy="384048"/>
-          </a:xfrm>
-          <a:prstGeom prst="rect">
-            <a:avLst/>
-          </a:prstGeom>
-          <a:noFill/>
-          <a:ln/>
-        </p:spPr>
-        <p:txBody>
-          <a:bodyPr wrap="square" lIns="0" tIns="0" rIns="0" bIns="0" rtlCol="0" anchor="ctr"/>
-          <a:lstStyle/>
-          <a:p>
-            <a:pPr indent="0" marL="0">
-              <a:lnSpc>
-                <a:spcPct val="115000"/>
-              </a:lnSpc>
-              <a:buNone/>
-            </a:pPr>
-            <a:r>
-              <a:rPr lang="en-US" sz="1050" dirty="0">
-                <a:solidFill>
-                  <a:srgbClr val="73716C"/>
-                </a:solidFill>
-                <a:latin typeface="Calibri" pitchFamily="34" charset="0"/>
-                <a:ea typeface="Calibri" pitchFamily="34" charset="-122"/>
-                <a:cs typeface="Calibri" pitchFamily="34" charset="-120"/>
-              </a:rPr>
-              <a:t>never “busy” — that makes you unreachable</a:t>
-            </a:r>
-            <a:endParaRPr lang="en-US" sz="1050" dirty="0"/>
+        </p:txBody>
+      </p:sp>
+      <p:sp>
+        <p:nvSpPr>
+          <p:cNvPr id="26" name="Text 24"/>
+          <p:cNvSpPr/>
+          <p:nvPr/>
+        </p:nvSpPr>
+        <p:spPr>
+          <a:xfrm>
+            <a:off x="685800" y="5870448"/>
+            <a:ext cx="10881360" cy="365760"/>
+          </a:xfrm>
+          <a:prstGeom prst="rect">
+            <a:avLst/>
+          </a:prstGeom>
+          <a:noFill/>
+          <a:ln/>
+        </p:spPr>
+        <p:txBody>
+          <a:bodyPr wrap="square" lIns="0" tIns="0" rIns="0" bIns="0" rtlCol="0" anchor="ctr"/>
+          <a:lstStyle/>
+          <a:p>
+            <a:pPr indent="0" marL="0">
+              <a:buNone/>
+            </a:pPr>
+            <a:r>
+              <a:rPr lang="en-US" sz="1700" b="1" dirty="0">
+                <a:solidFill>
+                  <a:srgbClr val="D4A27F"/>
+                </a:solidFill>
+                <a:latin typeface="Cambria" pitchFamily="34" charset="0"/>
+                <a:ea typeface="Cambria" pitchFamily="34" charset="-122"/>
+                <a:cs typeface="Cambria" pitchFamily="34" charset="-120"/>
+              </a:rPr>
+              <a:t>Merged is not done, and the pipeline now demonstrates the difference rather than claiming it.</a:t>
+            </a:r>
+            <a:endParaRPr lang="en-US" sz="1700" dirty="0"/>
           </a:p>
         </p:txBody>
       </p:sp>
@@ -5296,7 +5698,7 @@
                 <a:ea typeface="Cambria" pitchFamily="34" charset="-122"/>
                 <a:cs typeface="Cambria" pitchFamily="34" charset="-120"/>
               </a:rPr>
-              <a:t>Everyone automates writing the diff. Nobody automates the work around it.</a:t>
+              <a:t>Running it live surfaced six defects that 859 tests could not.</a:t>
             </a:r>
             <a:endParaRPr lang="en-US" sz="3100" dirty="0"/>
           </a:p>
@@ -5335,7 +5737,7 @@
                 <a:ea typeface="Calibri" pitchFamily="34" charset="-122"/>
                 <a:cs typeface="Calibri" pitchFamily="34" charset="-120"/>
               </a:rPr>
-              <a:t>Which is what makes the author swappable in the first place.</a:t>
+              <a:t>Every one sat in the gap between the code and the world it runs in — none could fail a unit test.</a:t>
             </a:r>
             <a:endParaRPr lang="en-US" sz="1450" dirty="0"/>
           </a:p>
@@ -5343,283 +5745,106 @@
       </p:sp>
       <p:sp>
         <p:nvSpPr>
-          <p:cNvPr id="4" name="Text 2"/>
-          <p:cNvSpPr/>
-          <p:nvPr/>
-        </p:nvSpPr>
-        <p:spPr>
-          <a:xfrm>
-            <a:off x="5532120" y="1810512"/>
-            <a:ext cx="1481328" cy="566928"/>
-          </a:xfrm>
-          <a:prstGeom prst="rect">
-            <a:avLst/>
-          </a:prstGeom>
-          <a:noFill/>
-          <a:ln/>
-        </p:spPr>
-        <p:txBody>
-          <a:bodyPr wrap="square" lIns="0" tIns="0" rIns="0" bIns="0" rtlCol="0" anchor="b"/>
-          <a:lstStyle/>
-          <a:p>
-            <a:pPr algn="ctr" indent="0" marL="0">
-              <a:lnSpc>
-                <a:spcPct val="105000"/>
-              </a:lnSpc>
-              <a:buNone/>
-            </a:pPr>
-            <a:r>
-              <a:rPr lang="en-US" sz="1050" b="1" dirty="0">
-                <a:solidFill>
-                  <a:srgbClr val="D97757"/>
-                </a:solidFill>
-                <a:latin typeface="Calibri" pitchFamily="34" charset="0"/>
-                <a:ea typeface="Calibri" pitchFamily="34" charset="-122"/>
-                <a:cs typeface="Calibri" pitchFamily="34" charset="-120"/>
-              </a:rPr>
-              <a:t>Locus</a:t>
-            </a:r>
-            <a:endParaRPr lang="en-US" sz="1050" dirty="0"/>
-          </a:p>
-        </p:txBody>
-      </p:sp>
-      <p:sp>
-        <p:nvSpPr>
-          <p:cNvPr id="5" name="Text 3"/>
-          <p:cNvSpPr/>
-          <p:nvPr/>
-        </p:nvSpPr>
-        <p:spPr>
-          <a:xfrm>
-            <a:off x="7013448" y="1810512"/>
-            <a:ext cx="1481328" cy="566928"/>
-          </a:xfrm>
-          <a:prstGeom prst="rect">
-            <a:avLst/>
-          </a:prstGeom>
-          <a:noFill/>
-          <a:ln/>
-        </p:spPr>
-        <p:txBody>
-          <a:bodyPr wrap="square" lIns="0" tIns="0" rIns="0" bIns="0" rtlCol="0" anchor="b"/>
-          <a:lstStyle/>
-          <a:p>
-            <a:pPr algn="ctr" indent="0" marL="0">
-              <a:lnSpc>
-                <a:spcPct val="105000"/>
-              </a:lnSpc>
-              <a:buNone/>
-            </a:pPr>
-            <a:r>
-              <a:rPr lang="en-US" sz="1050" dirty="0">
-                <a:solidFill>
-                  <a:srgbClr val="73716C"/>
-                </a:solidFill>
-                <a:latin typeface="Calibri" pitchFamily="34" charset="0"/>
-                <a:ea typeface="Calibri" pitchFamily="34" charset="-122"/>
-                <a:cs typeface="Calibri" pitchFamily="34" charset="-120"/>
-              </a:rPr>
-              <a:t>AI coding</a:t>
-            </a:r>
-            <a:endParaRPr lang="en-US" sz="1050" dirty="0"/>
-          </a:p>
-          <a:p>
-            <a:pPr algn="ctr" indent="0" marL="0">
-              <a:lnSpc>
-                <a:spcPct val="105000"/>
-              </a:lnSpc>
-              <a:buNone/>
-            </a:pPr>
-            <a:r>
-              <a:rPr lang="en-US" sz="1050" dirty="0">
-                <a:solidFill>
-                  <a:srgbClr val="73716C"/>
-                </a:solidFill>
-                <a:latin typeface="Calibri" pitchFamily="34" charset="0"/>
-                <a:ea typeface="Calibri" pitchFamily="34" charset="-122"/>
-                <a:cs typeface="Calibri" pitchFamily="34" charset="-120"/>
-              </a:rPr>
-              <a:t>assistants</a:t>
-            </a:r>
-            <a:endParaRPr lang="en-US" sz="1050" dirty="0"/>
-          </a:p>
-        </p:txBody>
-      </p:sp>
-      <p:sp>
-        <p:nvSpPr>
-          <p:cNvPr id="6" name="Text 4"/>
-          <p:cNvSpPr/>
-          <p:nvPr/>
-        </p:nvSpPr>
-        <p:spPr>
-          <a:xfrm>
-            <a:off x="8494776" y="1810512"/>
-            <a:ext cx="1481328" cy="566928"/>
-          </a:xfrm>
-          <a:prstGeom prst="rect">
-            <a:avLst/>
-          </a:prstGeom>
-          <a:noFill/>
-          <a:ln/>
-        </p:spPr>
-        <p:txBody>
-          <a:bodyPr wrap="square" lIns="0" tIns="0" rIns="0" bIns="0" rtlCol="0" anchor="b"/>
-          <a:lstStyle/>
-          <a:p>
-            <a:pPr algn="ctr" indent="0" marL="0">
-              <a:lnSpc>
-                <a:spcPct val="105000"/>
-              </a:lnSpc>
-              <a:buNone/>
-            </a:pPr>
-            <a:r>
-              <a:rPr lang="en-US" sz="1050" dirty="0">
-                <a:solidFill>
-                  <a:srgbClr val="73716C"/>
-                </a:solidFill>
-                <a:latin typeface="Calibri" pitchFamily="34" charset="0"/>
-                <a:ea typeface="Calibri" pitchFamily="34" charset="-122"/>
-                <a:cs typeface="Calibri" pitchFamily="34" charset="-120"/>
-              </a:rPr>
-              <a:t>CI review</a:t>
-            </a:r>
-            <a:endParaRPr lang="en-US" sz="1050" dirty="0"/>
-          </a:p>
-          <a:p>
-            <a:pPr algn="ctr" indent="0" marL="0">
-              <a:lnSpc>
-                <a:spcPct val="105000"/>
-              </a:lnSpc>
-              <a:buNone/>
-            </a:pPr>
-            <a:r>
-              <a:rPr lang="en-US" sz="1050" dirty="0">
-                <a:solidFill>
-                  <a:srgbClr val="73716C"/>
-                </a:solidFill>
-                <a:latin typeface="Calibri" pitchFamily="34" charset="0"/>
-                <a:ea typeface="Calibri" pitchFamily="34" charset="-122"/>
-                <a:cs typeface="Calibri" pitchFamily="34" charset="-120"/>
-              </a:rPr>
-              <a:t>bots</a:t>
-            </a:r>
-            <a:endParaRPr lang="en-US" sz="1050" dirty="0"/>
-          </a:p>
-        </p:txBody>
-      </p:sp>
-      <p:sp>
-        <p:nvSpPr>
-          <p:cNvPr id="7" name="Text 5"/>
-          <p:cNvSpPr/>
-          <p:nvPr/>
-        </p:nvSpPr>
-        <p:spPr>
-          <a:xfrm>
-            <a:off x="9976104" y="1810512"/>
-            <a:ext cx="1481328" cy="566928"/>
-          </a:xfrm>
-          <a:prstGeom prst="rect">
-            <a:avLst/>
-          </a:prstGeom>
-          <a:noFill/>
-          <a:ln/>
-        </p:spPr>
-        <p:txBody>
-          <a:bodyPr wrap="square" lIns="0" tIns="0" rIns="0" bIns="0" rtlCol="0" anchor="b"/>
-          <a:lstStyle/>
-          <a:p>
-            <a:pPr algn="ctr" indent="0" marL="0">
-              <a:lnSpc>
-                <a:spcPct val="105000"/>
-              </a:lnSpc>
-              <a:buNone/>
-            </a:pPr>
-            <a:r>
-              <a:rPr lang="en-US" sz="1050" dirty="0">
-                <a:solidFill>
-                  <a:srgbClr val="73716C"/>
-                </a:solidFill>
-                <a:latin typeface="Calibri" pitchFamily="34" charset="0"/>
-                <a:ea typeface="Calibri" pitchFamily="34" charset="-122"/>
-                <a:cs typeface="Calibri" pitchFamily="34" charset="-120"/>
-              </a:rPr>
-              <a:t>PM board</a:t>
-            </a:r>
-            <a:endParaRPr lang="en-US" sz="1050" dirty="0"/>
-          </a:p>
-          <a:p>
-            <a:pPr algn="ctr" indent="0" marL="0">
-              <a:lnSpc>
-                <a:spcPct val="105000"/>
-              </a:lnSpc>
-              <a:buNone/>
-            </a:pPr>
-            <a:r>
-              <a:rPr lang="en-US" sz="1050" dirty="0">
-                <a:solidFill>
-                  <a:srgbClr val="73716C"/>
-                </a:solidFill>
-                <a:latin typeface="Calibri" pitchFamily="34" charset="0"/>
-                <a:ea typeface="Calibri" pitchFamily="34" charset="-122"/>
-                <a:cs typeface="Calibri" pitchFamily="34" charset="-120"/>
-              </a:rPr>
-              <a:t>automation</a:t>
-            </a:r>
-            <a:endParaRPr lang="en-US" sz="1050" dirty="0"/>
-          </a:p>
-        </p:txBody>
-      </p:sp>
-      <p:sp>
-        <p:nvSpPr>
-          <p:cNvPr id="8" name="Shape 6"/>
-          <p:cNvSpPr/>
-          <p:nvPr/>
-        </p:nvSpPr>
-        <p:spPr>
-          <a:xfrm>
-            <a:off x="685800" y="2496312"/>
-            <a:ext cx="10835640" cy="438912"/>
-          </a:xfrm>
-          <a:prstGeom prst="rect">
-            <a:avLst/>
+          <p:cNvPr id="4" name="Shape 2"/>
+          <p:cNvSpPr/>
+          <p:nvPr/>
+        </p:nvSpPr>
+        <p:spPr>
+          <a:xfrm>
+            <a:off x="685800" y="2139696"/>
+            <a:ext cx="3520440" cy="1627632"/>
+          </a:xfrm>
+          <a:prstGeom prst="roundRect">
+            <a:avLst>
+              <a:gd name="adj" fmla="val 5056"/>
+            </a:avLst>
           </a:prstGeom>
           <a:solidFill>
             <a:srgbClr val="FAF9F5"/>
           </a:solidFill>
-          <a:ln w="12700">
+          <a:ln w="9525">
             <a:solidFill>
-              <a:srgbClr val="FAF9F5"/>
+              <a:srgbClr val="DFDBD1"/>
             </a:solidFill>
             <a:prstDash val="solid"/>
           </a:ln>
-        </p:spPr>
-      </p:sp>
-      <p:sp>
-        <p:nvSpPr>
-          <p:cNvPr id="9" name="Text 7"/>
-          <p:cNvSpPr/>
-          <p:nvPr/>
-        </p:nvSpPr>
-        <p:spPr>
-          <a:xfrm>
-            <a:off x="868680" y="2542032"/>
-            <a:ext cx="4572000" cy="347472"/>
-          </a:xfrm>
-          <a:prstGeom prst="rect">
-            <a:avLst/>
-          </a:prstGeom>
-          <a:noFill/>
-          <a:ln/>
-        </p:spPr>
-        <p:txBody>
-          <a:bodyPr wrap="square" lIns="0" tIns="0" rIns="0" bIns="0" rtlCol="0" anchor="ctr"/>
-          <a:lstStyle/>
-          <a:p>
-            <a:pPr indent="0" marL="0">
-              <a:buNone/>
-            </a:pPr>
-            <a:r>
-              <a:rPr lang="en-US" sz="1200" dirty="0">
+          <a:effectLst>
+            <a:outerShdw sx="100000" sy="100000" kx="0" ky="0" algn="bl" rotWithShape="0" blurRad="152400" dist="25400" dir="5400000">
+              <a:srgbClr val="8C857A">
+                <a:alpha val="16000"/>
+              </a:srgbClr>
+            </a:outerShdw>
+          </a:effectLst>
+        </p:spPr>
+      </p:sp>
+      <p:sp>
+        <p:nvSpPr>
+          <p:cNvPr id="5" name="Text 3"/>
+          <p:cNvSpPr/>
+          <p:nvPr/>
+        </p:nvSpPr>
+        <p:spPr>
+          <a:xfrm>
+            <a:off x="923544" y="2267712"/>
+            <a:ext cx="3017520" cy="274320"/>
+          </a:xfrm>
+          <a:prstGeom prst="rect">
+            <a:avLst/>
+          </a:prstGeom>
+          <a:noFill/>
+          <a:ln/>
+        </p:spPr>
+        <p:txBody>
+          <a:bodyPr wrap="square" lIns="0" tIns="0" rIns="0" bIns="0" rtlCol="0" anchor="ctr"/>
+          <a:lstStyle/>
+          <a:p>
+            <a:pPr indent="0" marL="0">
+              <a:buNone/>
+            </a:pPr>
+            <a:r>
+              <a:rPr lang="en-US" sz="1200" b="1" dirty="0">
+                <a:solidFill>
+                  <a:srgbClr val="D97757"/>
+                </a:solidFill>
+                <a:latin typeface="Calibri" pitchFamily="34" charset="0"/>
+                <a:ea typeface="Calibri" pitchFamily="34" charset="-122"/>
+                <a:cs typeface="Calibri" pitchFamily="34" charset="-120"/>
+              </a:rPr>
+              <a:t>Subprocess</a:t>
+            </a:r>
+            <a:endParaRPr lang="en-US" sz="1200" dirty="0"/>
+          </a:p>
+        </p:txBody>
+      </p:sp>
+      <p:sp>
+        <p:nvSpPr>
+          <p:cNvPr id="6" name="Text 4"/>
+          <p:cNvSpPr/>
+          <p:nvPr/>
+        </p:nvSpPr>
+        <p:spPr>
+          <a:xfrm>
+            <a:off x="923544" y="2560320"/>
+            <a:ext cx="3063240" cy="1097280"/>
+          </a:xfrm>
+          <a:prstGeom prst="rect">
+            <a:avLst/>
+          </a:prstGeom>
+          <a:noFill/>
+          <a:ln/>
+        </p:spPr>
+        <p:txBody>
+          <a:bodyPr wrap="square" lIns="0" tIns="0" rIns="0" bIns="0" rtlCol="0" anchor="ctr"/>
+          <a:lstStyle/>
+          <a:p>
+            <a:pPr indent="0" marL="0">
+              <a:lnSpc>
+                <a:spcPct val="116000"/>
+              </a:lnSpc>
+              <a:buNone/>
+            </a:pPr>
+            <a:r>
+              <a:rPr lang="en-US" sz="1000" dirty="0">
                 <a:solidFill>
                   <a:srgbClr val="191919"/>
                 </a:solidFill>
@@ -5627,414 +5852,114 @@
                 <a:ea typeface="Calibri" pitchFamily="34" charset="-122"/>
                 <a:cs typeface="Calibri" pitchFamily="34" charset="-120"/>
               </a:rPr>
-              <a:t>Writes the code</a:t>
-            </a:r>
-            <a:endParaRPr lang="en-US" sz="1200" dirty="0"/>
-          </a:p>
-        </p:txBody>
-      </p:sp>
-      <p:sp>
-        <p:nvSpPr>
-          <p:cNvPr id="10" name="Text 8"/>
-          <p:cNvSpPr/>
-          <p:nvPr/>
-        </p:nvSpPr>
-        <p:spPr>
-          <a:xfrm>
-            <a:off x="5532120" y="2542032"/>
-            <a:ext cx="1481328" cy="347472"/>
-          </a:xfrm>
-          <a:prstGeom prst="rect">
-            <a:avLst/>
-          </a:prstGeom>
-          <a:noFill/>
-          <a:ln/>
-        </p:spPr>
-        <p:txBody>
-          <a:bodyPr wrap="square" lIns="0" tIns="0" rIns="0" bIns="0" rtlCol="0" anchor="ctr"/>
-          <a:lstStyle/>
-          <a:p>
-            <a:pPr algn="ctr" indent="0" marL="0">
-              <a:buNone/>
-            </a:pPr>
-            <a:r>
-              <a:rPr lang="en-US" sz="1500" dirty="0">
-                <a:solidFill>
-                  <a:srgbClr val="D97757"/>
-                </a:solidFill>
-                <a:latin typeface="Calibri" pitchFamily="34" charset="0"/>
-                <a:ea typeface="Calibri" pitchFamily="34" charset="-122"/>
-                <a:cs typeface="Calibri" pitchFamily="34" charset="-120"/>
-              </a:rPr>
-              <a:t>●</a:t>
-            </a:r>
-            <a:endParaRPr lang="en-US" sz="1500" dirty="0"/>
-          </a:p>
-        </p:txBody>
-      </p:sp>
-      <p:sp>
-        <p:nvSpPr>
-          <p:cNvPr id="11" name="Text 9"/>
-          <p:cNvSpPr/>
-          <p:nvPr/>
-        </p:nvSpPr>
-        <p:spPr>
-          <a:xfrm>
-            <a:off x="7013448" y="2542032"/>
-            <a:ext cx="1481328" cy="347472"/>
-          </a:xfrm>
-          <a:prstGeom prst="rect">
-            <a:avLst/>
-          </a:prstGeom>
-          <a:noFill/>
-          <a:ln/>
-        </p:spPr>
-        <p:txBody>
-          <a:bodyPr wrap="square" lIns="0" tIns="0" rIns="0" bIns="0" rtlCol="0" anchor="ctr"/>
-          <a:lstStyle/>
-          <a:p>
-            <a:pPr algn="ctr" indent="0" marL="0">
-              <a:buNone/>
-            </a:pPr>
-            <a:r>
-              <a:rPr lang="en-US" sz="1500" dirty="0">
-                <a:solidFill>
-                  <a:srgbClr val="D97757"/>
-                </a:solidFill>
-                <a:latin typeface="Calibri" pitchFamily="34" charset="0"/>
-                <a:ea typeface="Calibri" pitchFamily="34" charset="-122"/>
-                <a:cs typeface="Calibri" pitchFamily="34" charset="-120"/>
-              </a:rPr>
-              <a:t>●</a:t>
-            </a:r>
-            <a:endParaRPr lang="en-US" sz="1500" dirty="0"/>
-          </a:p>
-        </p:txBody>
-      </p:sp>
-      <p:sp>
-        <p:nvSpPr>
-          <p:cNvPr id="12" name="Text 10"/>
-          <p:cNvSpPr/>
-          <p:nvPr/>
-        </p:nvSpPr>
-        <p:spPr>
-          <a:xfrm>
-            <a:off x="8494776" y="2542032"/>
-            <a:ext cx="1481328" cy="347472"/>
-          </a:xfrm>
-          <a:prstGeom prst="rect">
-            <a:avLst/>
-          </a:prstGeom>
-          <a:noFill/>
-          <a:ln/>
-        </p:spPr>
-        <p:txBody>
-          <a:bodyPr wrap="square" lIns="0" tIns="0" rIns="0" bIns="0" rtlCol="0" anchor="ctr"/>
-          <a:lstStyle/>
-          <a:p>
-            <a:pPr algn="ctr" indent="0" marL="0">
-              <a:buNone/>
-            </a:pPr>
-            <a:r>
-              <a:rPr lang="en-US" sz="1500" dirty="0">
-                <a:solidFill>
-                  <a:srgbClr val="AFA89C"/>
-                </a:solidFill>
-                <a:latin typeface="Calibri" pitchFamily="34" charset="0"/>
-                <a:ea typeface="Calibri" pitchFamily="34" charset="-122"/>
-                <a:cs typeface="Calibri" pitchFamily="34" charset="-120"/>
-              </a:rPr>
-              <a:t>○</a:t>
-            </a:r>
-            <a:endParaRPr lang="en-US" sz="1500" dirty="0"/>
-          </a:p>
-        </p:txBody>
-      </p:sp>
-      <p:sp>
-        <p:nvSpPr>
-          <p:cNvPr id="13" name="Text 11"/>
-          <p:cNvSpPr/>
-          <p:nvPr/>
-        </p:nvSpPr>
-        <p:spPr>
-          <a:xfrm>
-            <a:off x="9976104" y="2542032"/>
-            <a:ext cx="1481328" cy="347472"/>
-          </a:xfrm>
-          <a:prstGeom prst="rect">
-            <a:avLst/>
-          </a:prstGeom>
-          <a:noFill/>
-          <a:ln/>
-        </p:spPr>
-        <p:txBody>
-          <a:bodyPr wrap="square" lIns="0" tIns="0" rIns="0" bIns="0" rtlCol="0" anchor="ctr"/>
-          <a:lstStyle/>
-          <a:p>
-            <a:pPr algn="ctr" indent="0" marL="0">
-              <a:buNone/>
-            </a:pPr>
-            <a:r>
-              <a:rPr lang="en-US" sz="1500" dirty="0">
-                <a:solidFill>
-                  <a:srgbClr val="AFA89C"/>
-                </a:solidFill>
-                <a:latin typeface="Calibri" pitchFamily="34" charset="0"/>
-                <a:ea typeface="Calibri" pitchFamily="34" charset="-122"/>
-                <a:cs typeface="Calibri" pitchFamily="34" charset="-120"/>
-              </a:rPr>
-              <a:t>○</a:t>
-            </a:r>
-            <a:endParaRPr lang="en-US" sz="1500" dirty="0"/>
-          </a:p>
-        </p:txBody>
-      </p:sp>
-      <p:sp>
-        <p:nvSpPr>
-          <p:cNvPr id="14" name="Text 12"/>
-          <p:cNvSpPr/>
-          <p:nvPr/>
-        </p:nvSpPr>
-        <p:spPr>
-          <a:xfrm>
-            <a:off x="868680" y="2999232"/>
-            <a:ext cx="4572000" cy="347472"/>
-          </a:xfrm>
-          <a:prstGeom prst="rect">
-            <a:avLst/>
-          </a:prstGeom>
-          <a:noFill/>
-          <a:ln/>
-        </p:spPr>
-        <p:txBody>
-          <a:bodyPr wrap="square" lIns="0" tIns="0" rIns="0" bIns="0" rtlCol="0" anchor="ctr"/>
-          <a:lstStyle/>
-          <a:p>
-            <a:pPr indent="0" marL="0">
-              <a:buNone/>
-            </a:pPr>
-            <a:r>
-              <a:rPr lang="en-US" sz="1200" dirty="0">
-                <a:solidFill>
-                  <a:srgbClr val="191919"/>
-                </a:solidFill>
-                <a:latin typeface="Calibri" pitchFamily="34" charset="0"/>
-                <a:ea typeface="Calibri" pitchFamily="34" charset="-122"/>
-                <a:cs typeface="Calibri" pitchFamily="34" charset="-120"/>
-              </a:rPr>
-              <a:t>Gathers Slack + Jira context first</a:t>
-            </a:r>
-            <a:endParaRPr lang="en-US" sz="1200" dirty="0"/>
-          </a:p>
-        </p:txBody>
-      </p:sp>
-      <p:sp>
-        <p:nvSpPr>
-          <p:cNvPr id="15" name="Text 13"/>
-          <p:cNvSpPr/>
-          <p:nvPr/>
-        </p:nvSpPr>
-        <p:spPr>
-          <a:xfrm>
-            <a:off x="5532120" y="2999232"/>
-            <a:ext cx="1481328" cy="347472"/>
-          </a:xfrm>
-          <a:prstGeom prst="rect">
-            <a:avLst/>
-          </a:prstGeom>
-          <a:noFill/>
-          <a:ln/>
-        </p:spPr>
-        <p:txBody>
-          <a:bodyPr wrap="square" lIns="0" tIns="0" rIns="0" bIns="0" rtlCol="0" anchor="ctr"/>
-          <a:lstStyle/>
-          <a:p>
-            <a:pPr algn="ctr" indent="0" marL="0">
-              <a:buNone/>
-            </a:pPr>
-            <a:r>
-              <a:rPr lang="en-US" sz="1500" dirty="0">
-                <a:solidFill>
-                  <a:srgbClr val="D97757"/>
-                </a:solidFill>
-                <a:latin typeface="Calibri" pitchFamily="34" charset="0"/>
-                <a:ea typeface="Calibri" pitchFamily="34" charset="-122"/>
-                <a:cs typeface="Calibri" pitchFamily="34" charset="-120"/>
-              </a:rPr>
-              <a:t>●</a:t>
-            </a:r>
-            <a:endParaRPr lang="en-US" sz="1500" dirty="0"/>
-          </a:p>
-        </p:txBody>
-      </p:sp>
-      <p:sp>
-        <p:nvSpPr>
-          <p:cNvPr id="16" name="Text 14"/>
-          <p:cNvSpPr/>
-          <p:nvPr/>
-        </p:nvSpPr>
-        <p:spPr>
-          <a:xfrm>
-            <a:off x="7013448" y="2999232"/>
-            <a:ext cx="1481328" cy="347472"/>
-          </a:xfrm>
-          <a:prstGeom prst="rect">
-            <a:avLst/>
-          </a:prstGeom>
-          <a:noFill/>
-          <a:ln/>
-        </p:spPr>
-        <p:txBody>
-          <a:bodyPr wrap="square" lIns="0" tIns="0" rIns="0" bIns="0" rtlCol="0" anchor="ctr"/>
-          <a:lstStyle/>
-          <a:p>
-            <a:pPr algn="ctr" indent="0" marL="0">
-              <a:buNone/>
-            </a:pPr>
-            <a:r>
-              <a:rPr lang="en-US" sz="1500" dirty="0">
-                <a:solidFill>
-                  <a:srgbClr val="D4A27F"/>
-                </a:solidFill>
-                <a:latin typeface="Calibri" pitchFamily="34" charset="0"/>
-                <a:ea typeface="Calibri" pitchFamily="34" charset="-122"/>
-                <a:cs typeface="Calibri" pitchFamily="34" charset="-120"/>
-              </a:rPr>
-              <a:t>◐</a:t>
-            </a:r>
-            <a:endParaRPr lang="en-US" sz="1500" dirty="0"/>
-          </a:p>
-        </p:txBody>
-      </p:sp>
-      <p:sp>
-        <p:nvSpPr>
-          <p:cNvPr id="17" name="Text 15"/>
-          <p:cNvSpPr/>
-          <p:nvPr/>
-        </p:nvSpPr>
-        <p:spPr>
-          <a:xfrm>
-            <a:off x="8494776" y="2999232"/>
-            <a:ext cx="1481328" cy="347472"/>
-          </a:xfrm>
-          <a:prstGeom prst="rect">
-            <a:avLst/>
-          </a:prstGeom>
-          <a:noFill/>
-          <a:ln/>
-        </p:spPr>
-        <p:txBody>
-          <a:bodyPr wrap="square" lIns="0" tIns="0" rIns="0" bIns="0" rtlCol="0" anchor="ctr"/>
-          <a:lstStyle/>
-          <a:p>
-            <a:pPr algn="ctr" indent="0" marL="0">
-              <a:buNone/>
-            </a:pPr>
-            <a:r>
-              <a:rPr lang="en-US" sz="1500" dirty="0">
-                <a:solidFill>
-                  <a:srgbClr val="AFA89C"/>
-                </a:solidFill>
-                <a:latin typeface="Calibri" pitchFamily="34" charset="0"/>
-                <a:ea typeface="Calibri" pitchFamily="34" charset="-122"/>
-                <a:cs typeface="Calibri" pitchFamily="34" charset="-120"/>
-              </a:rPr>
-              <a:t>○</a:t>
-            </a:r>
-            <a:endParaRPr lang="en-US" sz="1500" dirty="0"/>
-          </a:p>
-        </p:txBody>
-      </p:sp>
-      <p:sp>
-        <p:nvSpPr>
-          <p:cNvPr id="18" name="Text 16"/>
-          <p:cNvSpPr/>
-          <p:nvPr/>
-        </p:nvSpPr>
-        <p:spPr>
-          <a:xfrm>
-            <a:off x="9976104" y="2999232"/>
-            <a:ext cx="1481328" cy="347472"/>
-          </a:xfrm>
-          <a:prstGeom prst="rect">
-            <a:avLst/>
-          </a:prstGeom>
-          <a:noFill/>
-          <a:ln/>
-        </p:spPr>
-        <p:txBody>
-          <a:bodyPr wrap="square" lIns="0" tIns="0" rIns="0" bIns="0" rtlCol="0" anchor="ctr"/>
-          <a:lstStyle/>
-          <a:p>
-            <a:pPr algn="ctr" indent="0" marL="0">
-              <a:buNone/>
-            </a:pPr>
-            <a:r>
-              <a:rPr lang="en-US" sz="1500" dirty="0">
-                <a:solidFill>
-                  <a:srgbClr val="AFA89C"/>
-                </a:solidFill>
-                <a:latin typeface="Calibri" pitchFamily="34" charset="0"/>
-                <a:ea typeface="Calibri" pitchFamily="34" charset="-122"/>
-                <a:cs typeface="Calibri" pitchFamily="34" charset="-120"/>
-              </a:rPr>
-              <a:t>○</a:t>
-            </a:r>
-            <a:endParaRPr lang="en-US" sz="1500" dirty="0"/>
-          </a:p>
-        </p:txBody>
-      </p:sp>
-      <p:sp>
-        <p:nvSpPr>
-          <p:cNvPr id="19" name="Shape 17"/>
-          <p:cNvSpPr/>
-          <p:nvPr/>
-        </p:nvSpPr>
-        <p:spPr>
-          <a:xfrm>
-            <a:off x="685800" y="3410712"/>
-            <a:ext cx="10835640" cy="438912"/>
-          </a:xfrm>
-          <a:prstGeom prst="rect">
-            <a:avLst/>
+              <a:t>The documented dev command put the app on an event loop that cannot spawn processes. Authoring returned 500 every time; the same code passed from a script.</a:t>
+            </a:r>
+            <a:endParaRPr lang="en-US" sz="1000" dirty="0"/>
+          </a:p>
+        </p:txBody>
+      </p:sp>
+      <p:sp>
+        <p:nvSpPr>
+          <p:cNvPr id="7" name="Shape 5"/>
+          <p:cNvSpPr/>
+          <p:nvPr/>
+        </p:nvSpPr>
+        <p:spPr>
+          <a:xfrm>
+            <a:off x="4416552" y="2139696"/>
+            <a:ext cx="3520440" cy="1627632"/>
+          </a:xfrm>
+          <a:prstGeom prst="roundRect">
+            <a:avLst>
+              <a:gd name="adj" fmla="val 5056"/>
+            </a:avLst>
           </a:prstGeom>
           <a:solidFill>
             <a:srgbClr val="FAF9F5"/>
           </a:solidFill>
-          <a:ln w="12700">
+          <a:ln w="9525">
             <a:solidFill>
-              <a:srgbClr val="FAF9F5"/>
+              <a:srgbClr val="DFDBD1"/>
             </a:solidFill>
             <a:prstDash val="solid"/>
           </a:ln>
-        </p:spPr>
-      </p:sp>
-      <p:sp>
-        <p:nvSpPr>
-          <p:cNvPr id="20" name="Text 18"/>
-          <p:cNvSpPr/>
-          <p:nvPr/>
-        </p:nvSpPr>
-        <p:spPr>
-          <a:xfrm>
-            <a:off x="868680" y="3456432"/>
-            <a:ext cx="4572000" cy="347472"/>
-          </a:xfrm>
-          <a:prstGeom prst="rect">
-            <a:avLst/>
-          </a:prstGeom>
-          <a:noFill/>
-          <a:ln/>
-        </p:spPr>
-        <p:txBody>
-          <a:bodyPr wrap="square" lIns="0" tIns="0" rIns="0" bIns="0" rtlCol="0" anchor="ctr"/>
-          <a:lstStyle/>
-          <a:p>
-            <a:pPr indent="0" marL="0">
-              <a:buNone/>
-            </a:pPr>
-            <a:r>
-              <a:rPr lang="en-US" sz="1200" dirty="0">
+          <a:effectLst>
+            <a:outerShdw sx="100000" sy="100000" kx="0" ky="0" algn="bl" rotWithShape="0" blurRad="152400" dist="25400" dir="5400000">
+              <a:srgbClr val="8C857A">
+                <a:alpha val="16000"/>
+              </a:srgbClr>
+            </a:outerShdw>
+          </a:effectLst>
+        </p:spPr>
+      </p:sp>
+      <p:sp>
+        <p:nvSpPr>
+          <p:cNvPr id="8" name="Text 6"/>
+          <p:cNvSpPr/>
+          <p:nvPr/>
+        </p:nvSpPr>
+        <p:spPr>
+          <a:xfrm>
+            <a:off x="4654296" y="2267712"/>
+            <a:ext cx="3017520" cy="274320"/>
+          </a:xfrm>
+          <a:prstGeom prst="rect">
+            <a:avLst/>
+          </a:prstGeom>
+          <a:noFill/>
+          <a:ln/>
+        </p:spPr>
+        <p:txBody>
+          <a:bodyPr wrap="square" lIns="0" tIns="0" rIns="0" bIns="0" rtlCol="0" anchor="ctr"/>
+          <a:lstStyle/>
+          <a:p>
+            <a:pPr indent="0" marL="0">
+              <a:buNone/>
+            </a:pPr>
+            <a:r>
+              <a:rPr lang="en-US" sz="1200" b="1" dirty="0">
+                <a:solidFill>
+                  <a:srgbClr val="D97757"/>
+                </a:solidFill>
+                <a:latin typeface="Calibri" pitchFamily="34" charset="0"/>
+                <a:ea typeface="Calibri" pitchFamily="34" charset="-122"/>
+                <a:cs typeface="Calibri" pitchFamily="34" charset="-120"/>
+              </a:rPr>
+              <a:t>Credentials</a:t>
+            </a:r>
+            <a:endParaRPr lang="en-US" sz="1200" dirty="0"/>
+          </a:p>
+        </p:txBody>
+      </p:sp>
+      <p:sp>
+        <p:nvSpPr>
+          <p:cNvPr id="9" name="Text 7"/>
+          <p:cNvSpPr/>
+          <p:nvPr/>
+        </p:nvSpPr>
+        <p:spPr>
+          <a:xfrm>
+            <a:off x="4654296" y="2560320"/>
+            <a:ext cx="3063240" cy="1097280"/>
+          </a:xfrm>
+          <a:prstGeom prst="rect">
+            <a:avLst/>
+          </a:prstGeom>
+          <a:noFill/>
+          <a:ln/>
+        </p:spPr>
+        <p:txBody>
+          <a:bodyPr wrap="square" lIns="0" tIns="0" rIns="0" bIns="0" rtlCol="0" anchor="ctr"/>
+          <a:lstStyle/>
+          <a:p>
+            <a:pPr indent="0" marL="0">
+              <a:lnSpc>
+                <a:spcPct val="116000"/>
+              </a:lnSpc>
+              <a:buNone/>
+            </a:pPr>
+            <a:r>
+              <a:rPr lang="en-US" sz="1000" dirty="0">
                 <a:solidFill>
                   <a:srgbClr val="191919"/>
                 </a:solidFill>
@@ -6042,414 +5967,114 @@
                 <a:ea typeface="Calibri" pitchFamily="34" charset="-122"/>
                 <a:cs typeface="Calibri" pitchFamily="34" charset="-120"/>
               </a:rPr>
-              <a:t>Reviews against the requirement</a:t>
-            </a:r>
-            <a:endParaRPr lang="en-US" sz="1200" dirty="0"/>
-          </a:p>
-        </p:txBody>
-      </p:sp>
-      <p:sp>
-        <p:nvSpPr>
-          <p:cNvPr id="21" name="Text 19"/>
-          <p:cNvSpPr/>
-          <p:nvPr/>
-        </p:nvSpPr>
-        <p:spPr>
-          <a:xfrm>
-            <a:off x="5532120" y="3456432"/>
-            <a:ext cx="1481328" cy="347472"/>
-          </a:xfrm>
-          <a:prstGeom prst="rect">
-            <a:avLst/>
-          </a:prstGeom>
-          <a:noFill/>
-          <a:ln/>
-        </p:spPr>
-        <p:txBody>
-          <a:bodyPr wrap="square" lIns="0" tIns="0" rIns="0" bIns="0" rtlCol="0" anchor="ctr"/>
-          <a:lstStyle/>
-          <a:p>
-            <a:pPr algn="ctr" indent="0" marL="0">
-              <a:buNone/>
-            </a:pPr>
-            <a:r>
-              <a:rPr lang="en-US" sz="1500" dirty="0">
-                <a:solidFill>
-                  <a:srgbClr val="D97757"/>
-                </a:solidFill>
-                <a:latin typeface="Calibri" pitchFamily="34" charset="0"/>
-                <a:ea typeface="Calibri" pitchFamily="34" charset="-122"/>
-                <a:cs typeface="Calibri" pitchFamily="34" charset="-120"/>
-              </a:rPr>
-              <a:t>●</a:t>
-            </a:r>
-            <a:endParaRPr lang="en-US" sz="1500" dirty="0"/>
-          </a:p>
-        </p:txBody>
-      </p:sp>
-      <p:sp>
-        <p:nvSpPr>
-          <p:cNvPr id="22" name="Text 20"/>
-          <p:cNvSpPr/>
-          <p:nvPr/>
-        </p:nvSpPr>
-        <p:spPr>
-          <a:xfrm>
-            <a:off x="7013448" y="3456432"/>
-            <a:ext cx="1481328" cy="347472"/>
-          </a:xfrm>
-          <a:prstGeom prst="rect">
-            <a:avLst/>
-          </a:prstGeom>
-          <a:noFill/>
-          <a:ln/>
-        </p:spPr>
-        <p:txBody>
-          <a:bodyPr wrap="square" lIns="0" tIns="0" rIns="0" bIns="0" rtlCol="0" anchor="ctr"/>
-          <a:lstStyle/>
-          <a:p>
-            <a:pPr algn="ctr" indent="0" marL="0">
-              <a:buNone/>
-            </a:pPr>
-            <a:r>
-              <a:rPr lang="en-US" sz="1500" dirty="0">
-                <a:solidFill>
-                  <a:srgbClr val="AFA89C"/>
-                </a:solidFill>
-                <a:latin typeface="Calibri" pitchFamily="34" charset="0"/>
-                <a:ea typeface="Calibri" pitchFamily="34" charset="-122"/>
-                <a:cs typeface="Calibri" pitchFamily="34" charset="-120"/>
-              </a:rPr>
-              <a:t>○</a:t>
-            </a:r>
-            <a:endParaRPr lang="en-US" sz="1500" dirty="0"/>
-          </a:p>
-        </p:txBody>
-      </p:sp>
-      <p:sp>
-        <p:nvSpPr>
-          <p:cNvPr id="23" name="Text 21"/>
-          <p:cNvSpPr/>
-          <p:nvPr/>
-        </p:nvSpPr>
-        <p:spPr>
-          <a:xfrm>
-            <a:off x="8494776" y="3456432"/>
-            <a:ext cx="1481328" cy="347472"/>
-          </a:xfrm>
-          <a:prstGeom prst="rect">
-            <a:avLst/>
-          </a:prstGeom>
-          <a:noFill/>
-          <a:ln/>
-        </p:spPr>
-        <p:txBody>
-          <a:bodyPr wrap="square" lIns="0" tIns="0" rIns="0" bIns="0" rtlCol="0" anchor="ctr"/>
-          <a:lstStyle/>
-          <a:p>
-            <a:pPr algn="ctr" indent="0" marL="0">
-              <a:buNone/>
-            </a:pPr>
-            <a:r>
-              <a:rPr lang="en-US" sz="1500" dirty="0">
-                <a:solidFill>
-                  <a:srgbClr val="D4A27F"/>
-                </a:solidFill>
-                <a:latin typeface="Calibri" pitchFamily="34" charset="0"/>
-                <a:ea typeface="Calibri" pitchFamily="34" charset="-122"/>
-                <a:cs typeface="Calibri" pitchFamily="34" charset="-120"/>
-              </a:rPr>
-              <a:t>◐</a:t>
-            </a:r>
-            <a:endParaRPr lang="en-US" sz="1500" dirty="0"/>
-          </a:p>
-        </p:txBody>
-      </p:sp>
-      <p:sp>
-        <p:nvSpPr>
-          <p:cNvPr id="24" name="Text 22"/>
-          <p:cNvSpPr/>
-          <p:nvPr/>
-        </p:nvSpPr>
-        <p:spPr>
-          <a:xfrm>
-            <a:off x="9976104" y="3456432"/>
-            <a:ext cx="1481328" cy="347472"/>
-          </a:xfrm>
-          <a:prstGeom prst="rect">
-            <a:avLst/>
-          </a:prstGeom>
-          <a:noFill/>
-          <a:ln/>
-        </p:spPr>
-        <p:txBody>
-          <a:bodyPr wrap="square" lIns="0" tIns="0" rIns="0" bIns="0" rtlCol="0" anchor="ctr"/>
-          <a:lstStyle/>
-          <a:p>
-            <a:pPr algn="ctr" indent="0" marL="0">
-              <a:buNone/>
-            </a:pPr>
-            <a:r>
-              <a:rPr lang="en-US" sz="1500" dirty="0">
-                <a:solidFill>
-                  <a:srgbClr val="AFA89C"/>
-                </a:solidFill>
-                <a:latin typeface="Calibri" pitchFamily="34" charset="0"/>
-                <a:ea typeface="Calibri" pitchFamily="34" charset="-122"/>
-                <a:cs typeface="Calibri" pitchFamily="34" charset="-120"/>
-              </a:rPr>
-              <a:t>○</a:t>
-            </a:r>
-            <a:endParaRPr lang="en-US" sz="1500" dirty="0"/>
-          </a:p>
-        </p:txBody>
-      </p:sp>
-      <p:sp>
-        <p:nvSpPr>
-          <p:cNvPr id="25" name="Text 23"/>
-          <p:cNvSpPr/>
-          <p:nvPr/>
-        </p:nvSpPr>
-        <p:spPr>
-          <a:xfrm>
-            <a:off x="868680" y="3913632"/>
-            <a:ext cx="4572000" cy="347472"/>
-          </a:xfrm>
-          <a:prstGeom prst="rect">
-            <a:avLst/>
-          </a:prstGeom>
-          <a:noFill/>
-          <a:ln/>
-        </p:spPr>
-        <p:txBody>
-          <a:bodyPr wrap="square" lIns="0" tIns="0" rIns="0" bIns="0" rtlCol="0" anchor="ctr"/>
-          <a:lstStyle/>
-          <a:p>
-            <a:pPr indent="0" marL="0">
-              <a:buNone/>
-            </a:pPr>
-            <a:r>
-              <a:rPr lang="en-US" sz="1200" dirty="0">
-                <a:solidFill>
-                  <a:srgbClr val="191919"/>
-                </a:solidFill>
-                <a:latin typeface="Calibri" pitchFamily="34" charset="0"/>
-                <a:ea typeface="Calibri" pitchFamily="34" charset="-122"/>
-                <a:cs typeface="Calibri" pitchFamily="34" charset="-120"/>
-              </a:rPr>
-              <a:t>Tracks the review round trip</a:t>
-            </a:r>
-            <a:endParaRPr lang="en-US" sz="1200" dirty="0"/>
-          </a:p>
-        </p:txBody>
-      </p:sp>
-      <p:sp>
-        <p:nvSpPr>
-          <p:cNvPr id="26" name="Text 24"/>
-          <p:cNvSpPr/>
-          <p:nvPr/>
-        </p:nvSpPr>
-        <p:spPr>
-          <a:xfrm>
-            <a:off x="5532120" y="3913632"/>
-            <a:ext cx="1481328" cy="347472"/>
-          </a:xfrm>
-          <a:prstGeom prst="rect">
-            <a:avLst/>
-          </a:prstGeom>
-          <a:noFill/>
-          <a:ln/>
-        </p:spPr>
-        <p:txBody>
-          <a:bodyPr wrap="square" lIns="0" tIns="0" rIns="0" bIns="0" rtlCol="0" anchor="ctr"/>
-          <a:lstStyle/>
-          <a:p>
-            <a:pPr algn="ctr" indent="0" marL="0">
-              <a:buNone/>
-            </a:pPr>
-            <a:r>
-              <a:rPr lang="en-US" sz="1500" dirty="0">
-                <a:solidFill>
-                  <a:srgbClr val="D97757"/>
-                </a:solidFill>
-                <a:latin typeface="Calibri" pitchFamily="34" charset="0"/>
-                <a:ea typeface="Calibri" pitchFamily="34" charset="-122"/>
-                <a:cs typeface="Calibri" pitchFamily="34" charset="-120"/>
-              </a:rPr>
-              <a:t>●</a:t>
-            </a:r>
-            <a:endParaRPr lang="en-US" sz="1500" dirty="0"/>
-          </a:p>
-        </p:txBody>
-      </p:sp>
-      <p:sp>
-        <p:nvSpPr>
-          <p:cNvPr id="27" name="Text 25"/>
-          <p:cNvSpPr/>
-          <p:nvPr/>
-        </p:nvSpPr>
-        <p:spPr>
-          <a:xfrm>
-            <a:off x="7013448" y="3913632"/>
-            <a:ext cx="1481328" cy="347472"/>
-          </a:xfrm>
-          <a:prstGeom prst="rect">
-            <a:avLst/>
-          </a:prstGeom>
-          <a:noFill/>
-          <a:ln/>
-        </p:spPr>
-        <p:txBody>
-          <a:bodyPr wrap="square" lIns="0" tIns="0" rIns="0" bIns="0" rtlCol="0" anchor="ctr"/>
-          <a:lstStyle/>
-          <a:p>
-            <a:pPr algn="ctr" indent="0" marL="0">
-              <a:buNone/>
-            </a:pPr>
-            <a:r>
-              <a:rPr lang="en-US" sz="1500" dirty="0">
-                <a:solidFill>
-                  <a:srgbClr val="AFA89C"/>
-                </a:solidFill>
-                <a:latin typeface="Calibri" pitchFamily="34" charset="0"/>
-                <a:ea typeface="Calibri" pitchFamily="34" charset="-122"/>
-                <a:cs typeface="Calibri" pitchFamily="34" charset="-120"/>
-              </a:rPr>
-              <a:t>○</a:t>
-            </a:r>
-            <a:endParaRPr lang="en-US" sz="1500" dirty="0"/>
-          </a:p>
-        </p:txBody>
-      </p:sp>
-      <p:sp>
-        <p:nvSpPr>
-          <p:cNvPr id="28" name="Text 26"/>
-          <p:cNvSpPr/>
-          <p:nvPr/>
-        </p:nvSpPr>
-        <p:spPr>
-          <a:xfrm>
-            <a:off x="8494776" y="3913632"/>
-            <a:ext cx="1481328" cy="347472"/>
-          </a:xfrm>
-          <a:prstGeom prst="rect">
-            <a:avLst/>
-          </a:prstGeom>
-          <a:noFill/>
-          <a:ln/>
-        </p:spPr>
-        <p:txBody>
-          <a:bodyPr wrap="square" lIns="0" tIns="0" rIns="0" bIns="0" rtlCol="0" anchor="ctr"/>
-          <a:lstStyle/>
-          <a:p>
-            <a:pPr algn="ctr" indent="0" marL="0">
-              <a:buNone/>
-            </a:pPr>
-            <a:r>
-              <a:rPr lang="en-US" sz="1500" dirty="0">
-                <a:solidFill>
-                  <a:srgbClr val="AFA89C"/>
-                </a:solidFill>
-                <a:latin typeface="Calibri" pitchFamily="34" charset="0"/>
-                <a:ea typeface="Calibri" pitchFamily="34" charset="-122"/>
-                <a:cs typeface="Calibri" pitchFamily="34" charset="-120"/>
-              </a:rPr>
-              <a:t>○</a:t>
-            </a:r>
-            <a:endParaRPr lang="en-US" sz="1500" dirty="0"/>
-          </a:p>
-        </p:txBody>
-      </p:sp>
-      <p:sp>
-        <p:nvSpPr>
-          <p:cNvPr id="29" name="Text 27"/>
-          <p:cNvSpPr/>
-          <p:nvPr/>
-        </p:nvSpPr>
-        <p:spPr>
-          <a:xfrm>
-            <a:off x="9976104" y="3913632"/>
-            <a:ext cx="1481328" cy="347472"/>
-          </a:xfrm>
-          <a:prstGeom prst="rect">
-            <a:avLst/>
-          </a:prstGeom>
-          <a:noFill/>
-          <a:ln/>
-        </p:spPr>
-        <p:txBody>
-          <a:bodyPr wrap="square" lIns="0" tIns="0" rIns="0" bIns="0" rtlCol="0" anchor="ctr"/>
-          <a:lstStyle/>
-          <a:p>
-            <a:pPr algn="ctr" indent="0" marL="0">
-              <a:buNone/>
-            </a:pPr>
-            <a:r>
-              <a:rPr lang="en-US" sz="1500" dirty="0">
-                <a:solidFill>
-                  <a:srgbClr val="AFA89C"/>
-                </a:solidFill>
-                <a:latin typeface="Calibri" pitchFamily="34" charset="0"/>
-                <a:ea typeface="Calibri" pitchFamily="34" charset="-122"/>
-                <a:cs typeface="Calibri" pitchFamily="34" charset="-120"/>
-              </a:rPr>
-              <a:t>○</a:t>
-            </a:r>
-            <a:endParaRPr lang="en-US" sz="1500" dirty="0"/>
-          </a:p>
-        </p:txBody>
-      </p:sp>
-      <p:sp>
-        <p:nvSpPr>
-          <p:cNvPr id="30" name="Shape 28"/>
-          <p:cNvSpPr/>
-          <p:nvPr/>
-        </p:nvSpPr>
-        <p:spPr>
-          <a:xfrm>
-            <a:off x="685800" y="4325112"/>
-            <a:ext cx="10835640" cy="438912"/>
-          </a:xfrm>
-          <a:prstGeom prst="rect">
-            <a:avLst/>
+              <a:t>The driver read the GitHub token under a key nothing writes — and reported it as an authoring failure, spending an attempt on a key name.</a:t>
+            </a:r>
+            <a:endParaRPr lang="en-US" sz="1000" dirty="0"/>
+          </a:p>
+        </p:txBody>
+      </p:sp>
+      <p:sp>
+        <p:nvSpPr>
+          <p:cNvPr id="10" name="Shape 8"/>
+          <p:cNvSpPr/>
+          <p:nvPr/>
+        </p:nvSpPr>
+        <p:spPr>
+          <a:xfrm>
+            <a:off x="8147304" y="2139696"/>
+            <a:ext cx="3520440" cy="1627632"/>
+          </a:xfrm>
+          <a:prstGeom prst="roundRect">
+            <a:avLst>
+              <a:gd name="adj" fmla="val 5056"/>
+            </a:avLst>
           </a:prstGeom>
           <a:solidFill>
             <a:srgbClr val="FAF9F5"/>
           </a:solidFill>
-          <a:ln w="12700">
+          <a:ln w="9525">
             <a:solidFill>
-              <a:srgbClr val="FAF9F5"/>
+              <a:srgbClr val="DFDBD1"/>
             </a:solidFill>
             <a:prstDash val="solid"/>
           </a:ln>
-        </p:spPr>
-      </p:sp>
-      <p:sp>
-        <p:nvSpPr>
-          <p:cNvPr id="31" name="Text 29"/>
-          <p:cNvSpPr/>
-          <p:nvPr/>
-        </p:nvSpPr>
-        <p:spPr>
-          <a:xfrm>
-            <a:off x="868680" y="4370832"/>
-            <a:ext cx="4572000" cy="347472"/>
-          </a:xfrm>
-          <a:prstGeom prst="rect">
-            <a:avLst/>
-          </a:prstGeom>
-          <a:noFill/>
-          <a:ln/>
-        </p:spPr>
-        <p:txBody>
-          <a:bodyPr wrap="square" lIns="0" tIns="0" rIns="0" bIns="0" rtlCol="0" anchor="ctr"/>
-          <a:lstStyle/>
-          <a:p>
-            <a:pPr indent="0" marL="0">
-              <a:buNone/>
-            </a:pPr>
-            <a:r>
-              <a:rPr lang="en-US" sz="1200" dirty="0">
+          <a:effectLst>
+            <a:outerShdw sx="100000" sy="100000" kx="0" ky="0" algn="bl" rotWithShape="0" blurRad="152400" dist="25400" dir="5400000">
+              <a:srgbClr val="8C857A">
+                <a:alpha val="16000"/>
+              </a:srgbClr>
+            </a:outerShdw>
+          </a:effectLst>
+        </p:spPr>
+      </p:sp>
+      <p:sp>
+        <p:nvSpPr>
+          <p:cNvPr id="11" name="Text 9"/>
+          <p:cNvSpPr/>
+          <p:nvPr/>
+        </p:nvSpPr>
+        <p:spPr>
+          <a:xfrm>
+            <a:off x="8385048" y="2267712"/>
+            <a:ext cx="3017520" cy="274320"/>
+          </a:xfrm>
+          <a:prstGeom prst="rect">
+            <a:avLst/>
+          </a:prstGeom>
+          <a:noFill/>
+          <a:ln/>
+        </p:spPr>
+        <p:txBody>
+          <a:bodyPr wrap="square" lIns="0" tIns="0" rIns="0" bIns="0" rtlCol="0" anchor="ctr"/>
+          <a:lstStyle/>
+          <a:p>
+            <a:pPr indent="0" marL="0">
+              <a:buNone/>
+            </a:pPr>
+            <a:r>
+              <a:rPr lang="en-US" sz="1200" b="1" dirty="0">
+                <a:solidFill>
+                  <a:srgbClr val="D97757"/>
+                </a:solidFill>
+                <a:latin typeface="Calibri" pitchFamily="34" charset="0"/>
+                <a:ea typeface="Calibri" pitchFamily="34" charset="-122"/>
+                <a:cs typeface="Calibri" pitchFamily="34" charset="-120"/>
+              </a:rPr>
+              <a:t>Workspace</a:t>
+            </a:r>
+            <a:endParaRPr lang="en-US" sz="1200" dirty="0"/>
+          </a:p>
+        </p:txBody>
+      </p:sp>
+      <p:sp>
+        <p:nvSpPr>
+          <p:cNvPr id="12" name="Text 10"/>
+          <p:cNvSpPr/>
+          <p:nvPr/>
+        </p:nvSpPr>
+        <p:spPr>
+          <a:xfrm>
+            <a:off x="8385048" y="2560320"/>
+            <a:ext cx="3063240" cy="1097280"/>
+          </a:xfrm>
+          <a:prstGeom prst="rect">
+            <a:avLst/>
+          </a:prstGeom>
+          <a:noFill/>
+          <a:ln/>
+        </p:spPr>
+        <p:txBody>
+          <a:bodyPr wrap="square" lIns="0" tIns="0" rIns="0" bIns="0" rtlCol="0" anchor="ctr"/>
+          <a:lstStyle/>
+          <a:p>
+            <a:pPr indent="0" marL="0">
+              <a:lnSpc>
+                <a:spcPct val="116000"/>
+              </a:lnSpc>
+              <a:buNone/>
+            </a:pPr>
+            <a:r>
+              <a:rPr lang="en-US" sz="1000" dirty="0">
                 <a:solidFill>
                   <a:srgbClr val="191919"/>
                 </a:solidFill>
@@ -6457,414 +6082,114 @@
                 <a:ea typeface="Calibri" pitchFamily="34" charset="-122"/>
                 <a:cs typeface="Calibri" pitchFamily="34" charset="-120"/>
               </a:rPr>
-              <a:t>Routes to QA and reads the verdict</a:t>
-            </a:r>
-            <a:endParaRPr lang="en-US" sz="1200" dirty="0"/>
-          </a:p>
-        </p:txBody>
-      </p:sp>
-      <p:sp>
-        <p:nvSpPr>
-          <p:cNvPr id="32" name="Text 30"/>
-          <p:cNvSpPr/>
-          <p:nvPr/>
-        </p:nvSpPr>
-        <p:spPr>
-          <a:xfrm>
-            <a:off x="5532120" y="4370832"/>
-            <a:ext cx="1481328" cy="347472"/>
-          </a:xfrm>
-          <a:prstGeom prst="rect">
-            <a:avLst/>
-          </a:prstGeom>
-          <a:noFill/>
-          <a:ln/>
-        </p:spPr>
-        <p:txBody>
-          <a:bodyPr wrap="square" lIns="0" tIns="0" rIns="0" bIns="0" rtlCol="0" anchor="ctr"/>
-          <a:lstStyle/>
-          <a:p>
-            <a:pPr algn="ctr" indent="0" marL="0">
-              <a:buNone/>
-            </a:pPr>
-            <a:r>
-              <a:rPr lang="en-US" sz="1500" dirty="0">
-                <a:solidFill>
-                  <a:srgbClr val="D97757"/>
-                </a:solidFill>
-                <a:latin typeface="Calibri" pitchFamily="34" charset="0"/>
-                <a:ea typeface="Calibri" pitchFamily="34" charset="-122"/>
-                <a:cs typeface="Calibri" pitchFamily="34" charset="-120"/>
-              </a:rPr>
-              <a:t>●</a:t>
-            </a:r>
-            <a:endParaRPr lang="en-US" sz="1500" dirty="0"/>
-          </a:p>
-        </p:txBody>
-      </p:sp>
-      <p:sp>
-        <p:nvSpPr>
-          <p:cNvPr id="33" name="Text 31"/>
-          <p:cNvSpPr/>
-          <p:nvPr/>
-        </p:nvSpPr>
-        <p:spPr>
-          <a:xfrm>
-            <a:off x="7013448" y="4370832"/>
-            <a:ext cx="1481328" cy="347472"/>
-          </a:xfrm>
-          <a:prstGeom prst="rect">
-            <a:avLst/>
-          </a:prstGeom>
-          <a:noFill/>
-          <a:ln/>
-        </p:spPr>
-        <p:txBody>
-          <a:bodyPr wrap="square" lIns="0" tIns="0" rIns="0" bIns="0" rtlCol="0" anchor="ctr"/>
-          <a:lstStyle/>
-          <a:p>
-            <a:pPr algn="ctr" indent="0" marL="0">
-              <a:buNone/>
-            </a:pPr>
-            <a:r>
-              <a:rPr lang="en-US" sz="1500" dirty="0">
-                <a:solidFill>
-                  <a:srgbClr val="AFA89C"/>
-                </a:solidFill>
-                <a:latin typeface="Calibri" pitchFamily="34" charset="0"/>
-                <a:ea typeface="Calibri" pitchFamily="34" charset="-122"/>
-                <a:cs typeface="Calibri" pitchFamily="34" charset="-120"/>
-              </a:rPr>
-              <a:t>○</a:t>
-            </a:r>
-            <a:endParaRPr lang="en-US" sz="1500" dirty="0"/>
-          </a:p>
-        </p:txBody>
-      </p:sp>
-      <p:sp>
-        <p:nvSpPr>
-          <p:cNvPr id="34" name="Text 32"/>
-          <p:cNvSpPr/>
-          <p:nvPr/>
-        </p:nvSpPr>
-        <p:spPr>
-          <a:xfrm>
-            <a:off x="8494776" y="4370832"/>
-            <a:ext cx="1481328" cy="347472"/>
-          </a:xfrm>
-          <a:prstGeom prst="rect">
-            <a:avLst/>
-          </a:prstGeom>
-          <a:noFill/>
-          <a:ln/>
-        </p:spPr>
-        <p:txBody>
-          <a:bodyPr wrap="square" lIns="0" tIns="0" rIns="0" bIns="0" rtlCol="0" anchor="ctr"/>
-          <a:lstStyle/>
-          <a:p>
-            <a:pPr algn="ctr" indent="0" marL="0">
-              <a:buNone/>
-            </a:pPr>
-            <a:r>
-              <a:rPr lang="en-US" sz="1500" dirty="0">
-                <a:solidFill>
-                  <a:srgbClr val="AFA89C"/>
-                </a:solidFill>
-                <a:latin typeface="Calibri" pitchFamily="34" charset="0"/>
-                <a:ea typeface="Calibri" pitchFamily="34" charset="-122"/>
-                <a:cs typeface="Calibri" pitchFamily="34" charset="-120"/>
-              </a:rPr>
-              <a:t>○</a:t>
-            </a:r>
-            <a:endParaRPr lang="en-US" sz="1500" dirty="0"/>
-          </a:p>
-        </p:txBody>
-      </p:sp>
-      <p:sp>
-        <p:nvSpPr>
-          <p:cNvPr id="35" name="Text 33"/>
-          <p:cNvSpPr/>
-          <p:nvPr/>
-        </p:nvSpPr>
-        <p:spPr>
-          <a:xfrm>
-            <a:off x="9976104" y="4370832"/>
-            <a:ext cx="1481328" cy="347472"/>
-          </a:xfrm>
-          <a:prstGeom prst="rect">
-            <a:avLst/>
-          </a:prstGeom>
-          <a:noFill/>
-          <a:ln/>
-        </p:spPr>
-        <p:txBody>
-          <a:bodyPr wrap="square" lIns="0" tIns="0" rIns="0" bIns="0" rtlCol="0" anchor="ctr"/>
-          <a:lstStyle/>
-          <a:p>
-            <a:pPr algn="ctr" indent="0" marL="0">
-              <a:buNone/>
-            </a:pPr>
-            <a:r>
-              <a:rPr lang="en-US" sz="1500" dirty="0">
-                <a:solidFill>
-                  <a:srgbClr val="AFA89C"/>
-                </a:solidFill>
-                <a:latin typeface="Calibri" pitchFamily="34" charset="0"/>
-                <a:ea typeface="Calibri" pitchFamily="34" charset="-122"/>
-                <a:cs typeface="Calibri" pitchFamily="34" charset="-120"/>
-              </a:rPr>
-              <a:t>○</a:t>
-            </a:r>
-            <a:endParaRPr lang="en-US" sz="1500" dirty="0"/>
-          </a:p>
-        </p:txBody>
-      </p:sp>
-      <p:sp>
-        <p:nvSpPr>
-          <p:cNvPr id="36" name="Text 34"/>
-          <p:cNvSpPr/>
-          <p:nvPr/>
-        </p:nvSpPr>
-        <p:spPr>
-          <a:xfrm>
-            <a:off x="868680" y="4828032"/>
-            <a:ext cx="4572000" cy="347472"/>
-          </a:xfrm>
-          <a:prstGeom prst="rect">
-            <a:avLst/>
-          </a:prstGeom>
-          <a:noFill/>
-          <a:ln/>
-        </p:spPr>
-        <p:txBody>
-          <a:bodyPr wrap="square" lIns="0" tIns="0" rIns="0" bIns="0" rtlCol="0" anchor="ctr"/>
-          <a:lstStyle/>
-          <a:p>
-            <a:pPr indent="0" marL="0">
-              <a:buNone/>
-            </a:pPr>
-            <a:r>
-              <a:rPr lang="en-US" sz="1200" dirty="0">
-                <a:solidFill>
-                  <a:srgbClr val="191919"/>
-                </a:solidFill>
-                <a:latin typeface="Calibri" pitchFamily="34" charset="0"/>
-                <a:ea typeface="Calibri" pitchFamily="34" charset="-122"/>
-                <a:cs typeface="Calibri" pitchFamily="34" charset="-120"/>
-              </a:rPr>
-              <a:t>Moves the card through all 8 stages</a:t>
-            </a:r>
-            <a:endParaRPr lang="en-US" sz="1200" dirty="0"/>
-          </a:p>
-        </p:txBody>
-      </p:sp>
-      <p:sp>
-        <p:nvSpPr>
-          <p:cNvPr id="37" name="Text 35"/>
-          <p:cNvSpPr/>
-          <p:nvPr/>
-        </p:nvSpPr>
-        <p:spPr>
-          <a:xfrm>
-            <a:off x="5532120" y="4828032"/>
-            <a:ext cx="1481328" cy="347472"/>
-          </a:xfrm>
-          <a:prstGeom prst="rect">
-            <a:avLst/>
-          </a:prstGeom>
-          <a:noFill/>
-          <a:ln/>
-        </p:spPr>
-        <p:txBody>
-          <a:bodyPr wrap="square" lIns="0" tIns="0" rIns="0" bIns="0" rtlCol="0" anchor="ctr"/>
-          <a:lstStyle/>
-          <a:p>
-            <a:pPr algn="ctr" indent="0" marL="0">
-              <a:buNone/>
-            </a:pPr>
-            <a:r>
-              <a:rPr lang="en-US" sz="1500" dirty="0">
-                <a:solidFill>
-                  <a:srgbClr val="D97757"/>
-                </a:solidFill>
-                <a:latin typeface="Calibri" pitchFamily="34" charset="0"/>
-                <a:ea typeface="Calibri" pitchFamily="34" charset="-122"/>
-                <a:cs typeface="Calibri" pitchFamily="34" charset="-120"/>
-              </a:rPr>
-              <a:t>●</a:t>
-            </a:r>
-            <a:endParaRPr lang="en-US" sz="1500" dirty="0"/>
-          </a:p>
-        </p:txBody>
-      </p:sp>
-      <p:sp>
-        <p:nvSpPr>
-          <p:cNvPr id="38" name="Text 36"/>
-          <p:cNvSpPr/>
-          <p:nvPr/>
-        </p:nvSpPr>
-        <p:spPr>
-          <a:xfrm>
-            <a:off x="7013448" y="4828032"/>
-            <a:ext cx="1481328" cy="347472"/>
-          </a:xfrm>
-          <a:prstGeom prst="rect">
-            <a:avLst/>
-          </a:prstGeom>
-          <a:noFill/>
-          <a:ln/>
-        </p:spPr>
-        <p:txBody>
-          <a:bodyPr wrap="square" lIns="0" tIns="0" rIns="0" bIns="0" rtlCol="0" anchor="ctr"/>
-          <a:lstStyle/>
-          <a:p>
-            <a:pPr algn="ctr" indent="0" marL="0">
-              <a:buNone/>
-            </a:pPr>
-            <a:r>
-              <a:rPr lang="en-US" sz="1500" dirty="0">
-                <a:solidFill>
-                  <a:srgbClr val="AFA89C"/>
-                </a:solidFill>
-                <a:latin typeface="Calibri" pitchFamily="34" charset="0"/>
-                <a:ea typeface="Calibri" pitchFamily="34" charset="-122"/>
-                <a:cs typeface="Calibri" pitchFamily="34" charset="-120"/>
-              </a:rPr>
-              <a:t>○</a:t>
-            </a:r>
-            <a:endParaRPr lang="en-US" sz="1500" dirty="0"/>
-          </a:p>
-        </p:txBody>
-      </p:sp>
-      <p:sp>
-        <p:nvSpPr>
-          <p:cNvPr id="39" name="Text 37"/>
-          <p:cNvSpPr/>
-          <p:nvPr/>
-        </p:nvSpPr>
-        <p:spPr>
-          <a:xfrm>
-            <a:off x="8494776" y="4828032"/>
-            <a:ext cx="1481328" cy="347472"/>
-          </a:xfrm>
-          <a:prstGeom prst="rect">
-            <a:avLst/>
-          </a:prstGeom>
-          <a:noFill/>
-          <a:ln/>
-        </p:spPr>
-        <p:txBody>
-          <a:bodyPr wrap="square" lIns="0" tIns="0" rIns="0" bIns="0" rtlCol="0" anchor="ctr"/>
-          <a:lstStyle/>
-          <a:p>
-            <a:pPr algn="ctr" indent="0" marL="0">
-              <a:buNone/>
-            </a:pPr>
-            <a:r>
-              <a:rPr lang="en-US" sz="1500" dirty="0">
-                <a:solidFill>
-                  <a:srgbClr val="AFA89C"/>
-                </a:solidFill>
-                <a:latin typeface="Calibri" pitchFamily="34" charset="0"/>
-                <a:ea typeface="Calibri" pitchFamily="34" charset="-122"/>
-                <a:cs typeface="Calibri" pitchFamily="34" charset="-120"/>
-              </a:rPr>
-              <a:t>○</a:t>
-            </a:r>
-            <a:endParaRPr lang="en-US" sz="1500" dirty="0"/>
-          </a:p>
-        </p:txBody>
-      </p:sp>
-      <p:sp>
-        <p:nvSpPr>
-          <p:cNvPr id="40" name="Text 38"/>
-          <p:cNvSpPr/>
-          <p:nvPr/>
-        </p:nvSpPr>
-        <p:spPr>
-          <a:xfrm>
-            <a:off x="9976104" y="4828032"/>
-            <a:ext cx="1481328" cy="347472"/>
-          </a:xfrm>
-          <a:prstGeom prst="rect">
-            <a:avLst/>
-          </a:prstGeom>
-          <a:noFill/>
-          <a:ln/>
-        </p:spPr>
-        <p:txBody>
-          <a:bodyPr wrap="square" lIns="0" tIns="0" rIns="0" bIns="0" rtlCol="0" anchor="ctr"/>
-          <a:lstStyle/>
-          <a:p>
-            <a:pPr algn="ctr" indent="0" marL="0">
-              <a:buNone/>
-            </a:pPr>
-            <a:r>
-              <a:rPr lang="en-US" sz="1500" dirty="0">
-                <a:solidFill>
-                  <a:srgbClr val="D4A27F"/>
-                </a:solidFill>
-                <a:latin typeface="Calibri" pitchFamily="34" charset="0"/>
-                <a:ea typeface="Calibri" pitchFamily="34" charset="-122"/>
-                <a:cs typeface="Calibri" pitchFamily="34" charset="-120"/>
-              </a:rPr>
-              <a:t>◐</a:t>
-            </a:r>
-            <a:endParaRPr lang="en-US" sz="1500" dirty="0"/>
-          </a:p>
-        </p:txBody>
-      </p:sp>
-      <p:sp>
-        <p:nvSpPr>
-          <p:cNvPr id="41" name="Shape 39"/>
-          <p:cNvSpPr/>
-          <p:nvPr/>
-        </p:nvSpPr>
-        <p:spPr>
-          <a:xfrm>
-            <a:off x="685800" y="5239512"/>
-            <a:ext cx="10835640" cy="438912"/>
-          </a:xfrm>
-          <a:prstGeom prst="rect">
-            <a:avLst/>
+              <a:t>A removed worktree left a registration behind, so the next attempt at that path failed permanently.</a:t>
+            </a:r>
+            <a:endParaRPr lang="en-US" sz="1000" dirty="0"/>
+          </a:p>
+        </p:txBody>
+      </p:sp>
+      <p:sp>
+        <p:nvSpPr>
+          <p:cNvPr id="13" name="Shape 11"/>
+          <p:cNvSpPr/>
+          <p:nvPr/>
+        </p:nvSpPr>
+        <p:spPr>
+          <a:xfrm>
+            <a:off x="685800" y="3895344"/>
+            <a:ext cx="3520440" cy="1627632"/>
+          </a:xfrm>
+          <a:prstGeom prst="roundRect">
+            <a:avLst>
+              <a:gd name="adj" fmla="val 5056"/>
+            </a:avLst>
           </a:prstGeom>
           <a:solidFill>
             <a:srgbClr val="FAF9F5"/>
           </a:solidFill>
-          <a:ln w="12700">
+          <a:ln w="9525">
             <a:solidFill>
-              <a:srgbClr val="FAF9F5"/>
+              <a:srgbClr val="DFDBD1"/>
             </a:solidFill>
             <a:prstDash val="solid"/>
           </a:ln>
-        </p:spPr>
-      </p:sp>
-      <p:sp>
-        <p:nvSpPr>
-          <p:cNvPr id="42" name="Text 40"/>
-          <p:cNvSpPr/>
-          <p:nvPr/>
-        </p:nvSpPr>
-        <p:spPr>
-          <a:xfrm>
-            <a:off x="868680" y="5285232"/>
-            <a:ext cx="4572000" cy="347472"/>
-          </a:xfrm>
-          <a:prstGeom prst="rect">
-            <a:avLst/>
-          </a:prstGeom>
-          <a:noFill/>
-          <a:ln/>
-        </p:spPr>
-        <p:txBody>
-          <a:bodyPr wrap="square" lIns="0" tIns="0" rIns="0" bIns="0" rtlCol="0" anchor="ctr"/>
-          <a:lstStyle/>
-          <a:p>
-            <a:pPr indent="0" marL="0">
-              <a:buNone/>
-            </a:pPr>
-            <a:r>
-              <a:rPr lang="en-US" sz="1200" dirty="0">
+          <a:effectLst>
+            <a:outerShdw sx="100000" sy="100000" kx="0" ky="0" algn="bl" rotWithShape="0" blurRad="152400" dist="25400" dir="5400000">
+              <a:srgbClr val="8C857A">
+                <a:alpha val="16000"/>
+              </a:srgbClr>
+            </a:outerShdw>
+          </a:effectLst>
+        </p:spPr>
+      </p:sp>
+      <p:sp>
+        <p:nvSpPr>
+          <p:cNvPr id="14" name="Text 12"/>
+          <p:cNvSpPr/>
+          <p:nvPr/>
+        </p:nvSpPr>
+        <p:spPr>
+          <a:xfrm>
+            <a:off x="923544" y="4023360"/>
+            <a:ext cx="3017520" cy="274320"/>
+          </a:xfrm>
+          <a:prstGeom prst="rect">
+            <a:avLst/>
+          </a:prstGeom>
+          <a:noFill/>
+          <a:ln/>
+        </p:spPr>
+        <p:txBody>
+          <a:bodyPr wrap="square" lIns="0" tIns="0" rIns="0" bIns="0" rtlCol="0" anchor="ctr"/>
+          <a:lstStyle/>
+          <a:p>
+            <a:pPr indent="0" marL="0">
+              <a:buNone/>
+            </a:pPr>
+            <a:r>
+              <a:rPr lang="en-US" sz="1200" b="1" dirty="0">
+                <a:solidFill>
+                  <a:srgbClr val="D97757"/>
+                </a:solidFill>
+                <a:latin typeface="Calibri" pitchFamily="34" charset="0"/>
+                <a:ea typeface="Calibri" pitchFamily="34" charset="-122"/>
+                <a:cs typeface="Calibri" pitchFamily="34" charset="-120"/>
+              </a:rPr>
+              <a:t>False assurance</a:t>
+            </a:r>
+            <a:endParaRPr lang="en-US" sz="1200" dirty="0"/>
+          </a:p>
+        </p:txBody>
+      </p:sp>
+      <p:sp>
+        <p:nvSpPr>
+          <p:cNvPr id="15" name="Text 13"/>
+          <p:cNvSpPr/>
+          <p:nvPr/>
+        </p:nvSpPr>
+        <p:spPr>
+          <a:xfrm>
+            <a:off x="923544" y="4315968"/>
+            <a:ext cx="3063240" cy="1097280"/>
+          </a:xfrm>
+          <a:prstGeom prst="rect">
+            <a:avLst/>
+          </a:prstGeom>
+          <a:noFill/>
+          <a:ln/>
+        </p:spPr>
+        <p:txBody>
+          <a:bodyPr wrap="square" lIns="0" tIns="0" rIns="0" bIns="0" rtlCol="0" anchor="ctr"/>
+          <a:lstStyle/>
+          <a:p>
+            <a:pPr indent="0" marL="0">
+              <a:lnSpc>
+                <a:spcPct val="116000"/>
+              </a:lnSpc>
+              <a:buNone/>
+            </a:pPr>
+            <a:r>
+              <a:rPr lang="en-US" sz="1000" dirty="0">
                 <a:solidFill>
                   <a:srgbClr val="191919"/>
                 </a:solidFill>
@@ -6872,7 +6197,80 @@
                 <a:ea typeface="Calibri" pitchFamily="34" charset="-122"/>
                 <a:cs typeface="Calibri" pitchFamily="34" charset="-120"/>
               </a:rPr>
-              <a:t>Analyses your code locally</a:t>
+              <a:t>The pull request said the test gate passed on repositories that have no test command.</a:t>
+            </a:r>
+            <a:endParaRPr lang="en-US" sz="1000" dirty="0"/>
+          </a:p>
+        </p:txBody>
+      </p:sp>
+      <p:sp>
+        <p:nvSpPr>
+          <p:cNvPr id="16" name="Shape 14"/>
+          <p:cNvSpPr/>
+          <p:nvPr/>
+        </p:nvSpPr>
+        <p:spPr>
+          <a:xfrm>
+            <a:off x="4416552" y="3895344"/>
+            <a:ext cx="3520440" cy="1627632"/>
+          </a:xfrm>
+          <a:prstGeom prst="roundRect">
+            <a:avLst>
+              <a:gd name="adj" fmla="val 5056"/>
+            </a:avLst>
+          </a:prstGeom>
+          <a:solidFill>
+            <a:srgbClr val="FAF9F5"/>
+          </a:solidFill>
+          <a:ln w="9525">
+            <a:solidFill>
+              <a:srgbClr val="DFDBD1"/>
+            </a:solidFill>
+            <a:prstDash val="solid"/>
+          </a:ln>
+          <a:effectLst>
+            <a:outerShdw sx="100000" sy="100000" kx="0" ky="0" algn="bl" rotWithShape="0" blurRad="152400" dist="25400" dir="5400000">
+              <a:srgbClr val="8C857A">
+                <a:alpha val="16000"/>
+              </a:srgbClr>
+            </a:outerShdw>
+          </a:effectLst>
+        </p:spPr>
+      </p:sp>
+      <p:sp>
+        <p:nvSpPr>
+          <p:cNvPr id="17" name="Text 15"/>
+          <p:cNvSpPr/>
+          <p:nvPr/>
+        </p:nvSpPr>
+        <p:spPr>
+          <a:xfrm>
+            <a:off x="4654296" y="4023360"/>
+            <a:ext cx="3017520" cy="274320"/>
+          </a:xfrm>
+          <a:prstGeom prst="rect">
+            <a:avLst/>
+          </a:prstGeom>
+          <a:noFill/>
+          <a:ln/>
+        </p:spPr>
+        <p:txBody>
+          <a:bodyPr wrap="square" lIns="0" tIns="0" rIns="0" bIns="0" rtlCol="0" anchor="ctr"/>
+          <a:lstStyle/>
+          <a:p>
+            <a:pPr indent="0" marL="0">
+              <a:buNone/>
+            </a:pPr>
+            <a:r>
+              <a:rPr lang="en-US" sz="1200" b="1" dirty="0">
+                <a:solidFill>
+                  <a:srgbClr val="D97757"/>
+                </a:solidFill>
+                <a:latin typeface="Calibri" pitchFamily="34" charset="0"/>
+                <a:ea typeface="Calibri" pitchFamily="34" charset="-122"/>
+                <a:cs typeface="Calibri" pitchFamily="34" charset="-120"/>
+              </a:rPr>
+              <a:t>Attribution</a:t>
             </a:r>
             <a:endParaRPr lang="en-US" sz="1200" dirty="0"/>
           </a:p>
@@ -6880,30 +6278,106 @@
       </p:sp>
       <p:sp>
         <p:nvSpPr>
-          <p:cNvPr id="43" name="Text 41"/>
-          <p:cNvSpPr/>
-          <p:nvPr/>
-        </p:nvSpPr>
-        <p:spPr>
-          <a:xfrm>
-            <a:off x="5532120" y="5285232"/>
-            <a:ext cx="1481328" cy="347472"/>
-          </a:xfrm>
-          <a:prstGeom prst="rect">
-            <a:avLst/>
-          </a:prstGeom>
-          <a:noFill/>
-          <a:ln/>
-        </p:spPr>
-        <p:txBody>
-          <a:bodyPr wrap="square" lIns="0" tIns="0" rIns="0" bIns="0" rtlCol="0" anchor="ctr"/>
-          <a:lstStyle/>
-          <a:p>
-            <a:pPr algn="ctr" indent="0" marL="0">
-              <a:buNone/>
-            </a:pPr>
-            <a:r>
-              <a:rPr lang="en-US" sz="1500" dirty="0">
+          <p:cNvPr id="18" name="Text 16"/>
+          <p:cNvSpPr/>
+          <p:nvPr/>
+        </p:nvSpPr>
+        <p:spPr>
+          <a:xfrm>
+            <a:off x="4654296" y="4315968"/>
+            <a:ext cx="3063240" cy="1097280"/>
+          </a:xfrm>
+          <a:prstGeom prst="rect">
+            <a:avLst/>
+          </a:prstGeom>
+          <a:noFill/>
+          <a:ln/>
+        </p:spPr>
+        <p:txBody>
+          <a:bodyPr wrap="square" lIns="0" tIns="0" rIns="0" bIns="0" rtlCol="0" anchor="ctr"/>
+          <a:lstStyle/>
+          <a:p>
+            <a:pPr indent="0" marL="0">
+              <a:lnSpc>
+                <a:spcPct val="116000"/>
+              </a:lnSpc>
+              <a:buNone/>
+            </a:pPr>
+            <a:r>
+              <a:rPr lang="en-US" sz="1000" dirty="0">
+                <a:solidFill>
+                  <a:srgbClr val="191919"/>
+                </a:solidFill>
+                <a:latin typeface="Calibri" pitchFamily="34" charset="0"/>
+                <a:ea typeface="Calibri" pitchFamily="34" charset="-122"/>
+                <a:cs typeface="Calibri" pitchFamily="34" charset="-120"/>
+              </a:rPr>
+              <a:t>A model-written commit carried a human's name — and made the guard against overwriting human work fire on the agent's own commits.</a:t>
+            </a:r>
+            <a:endParaRPr lang="en-US" sz="1000" dirty="0"/>
+          </a:p>
+        </p:txBody>
+      </p:sp>
+      <p:sp>
+        <p:nvSpPr>
+          <p:cNvPr id="19" name="Shape 17"/>
+          <p:cNvSpPr/>
+          <p:nvPr/>
+        </p:nvSpPr>
+        <p:spPr>
+          <a:xfrm>
+            <a:off x="8147304" y="3895344"/>
+            <a:ext cx="3520440" cy="1627632"/>
+          </a:xfrm>
+          <a:prstGeom prst="roundRect">
+            <a:avLst>
+              <a:gd name="adj" fmla="val 5056"/>
+            </a:avLst>
+          </a:prstGeom>
+          <a:solidFill>
+            <a:srgbClr val="FAF9F5"/>
+          </a:solidFill>
+          <a:ln w="9525">
+            <a:solidFill>
+              <a:srgbClr val="DFDBD1"/>
+            </a:solidFill>
+            <a:prstDash val="solid"/>
+          </a:ln>
+          <a:effectLst>
+            <a:outerShdw sx="100000" sy="100000" kx="0" ky="0" algn="bl" rotWithShape="0" blurRad="152400" dist="25400" dir="5400000">
+              <a:srgbClr val="8C857A">
+                <a:alpha val="16000"/>
+              </a:srgbClr>
+            </a:outerShdw>
+          </a:effectLst>
+        </p:spPr>
+      </p:sp>
+      <p:sp>
+        <p:nvSpPr>
+          <p:cNvPr id="20" name="Text 18"/>
+          <p:cNvSpPr/>
+          <p:nvPr/>
+        </p:nvSpPr>
+        <p:spPr>
+          <a:xfrm>
+            <a:off x="8385048" y="4023360"/>
+            <a:ext cx="3017520" cy="274320"/>
+          </a:xfrm>
+          <a:prstGeom prst="rect">
+            <a:avLst/>
+          </a:prstGeom>
+          <a:noFill/>
+          <a:ln/>
+        </p:spPr>
+        <p:txBody>
+          <a:bodyPr wrap="square" lIns="0" tIns="0" rIns="0" bIns="0" rtlCol="0" anchor="ctr"/>
+          <a:lstStyle/>
+          <a:p>
+            <a:pPr indent="0" marL="0">
+              <a:buNone/>
+            </a:pPr>
+            <a:r>
+              <a:rPr lang="en-US" sz="1200" b="1" dirty="0">
                 <a:solidFill>
                   <a:srgbClr val="D97757"/>
                 </a:solidFill>
@@ -6911,163 +6385,49 @@
                 <a:ea typeface="Calibri" pitchFamily="34" charset="-122"/>
                 <a:cs typeface="Calibri" pitchFamily="34" charset="-120"/>
               </a:rPr>
-              <a:t>●</a:t>
-            </a:r>
-            <a:endParaRPr lang="en-US" sz="1500" dirty="0"/>
-          </a:p>
-        </p:txBody>
-      </p:sp>
-      <p:sp>
-        <p:nvSpPr>
-          <p:cNvPr id="44" name="Text 42"/>
-          <p:cNvSpPr/>
-          <p:nvPr/>
-        </p:nvSpPr>
-        <p:spPr>
-          <a:xfrm>
-            <a:off x="7013448" y="5285232"/>
-            <a:ext cx="1481328" cy="347472"/>
-          </a:xfrm>
-          <a:prstGeom prst="rect">
-            <a:avLst/>
-          </a:prstGeom>
-          <a:noFill/>
-          <a:ln/>
-        </p:spPr>
-        <p:txBody>
-          <a:bodyPr wrap="square" lIns="0" tIns="0" rIns="0" bIns="0" rtlCol="0" anchor="ctr"/>
-          <a:lstStyle/>
-          <a:p>
-            <a:pPr algn="ctr" indent="0" marL="0">
-              <a:buNone/>
-            </a:pPr>
-            <a:r>
-              <a:rPr lang="en-US" sz="1500" dirty="0">
-                <a:solidFill>
-                  <a:srgbClr val="AFA89C"/>
-                </a:solidFill>
-                <a:latin typeface="Calibri" pitchFamily="34" charset="0"/>
-                <a:ea typeface="Calibri" pitchFamily="34" charset="-122"/>
-                <a:cs typeface="Calibri" pitchFamily="34" charset="-120"/>
-              </a:rPr>
-              <a:t>○</a:t>
-            </a:r>
-            <a:endParaRPr lang="en-US" sz="1500" dirty="0"/>
-          </a:p>
-        </p:txBody>
-      </p:sp>
-      <p:sp>
-        <p:nvSpPr>
-          <p:cNvPr id="45" name="Text 43"/>
-          <p:cNvSpPr/>
-          <p:nvPr/>
-        </p:nvSpPr>
-        <p:spPr>
-          <a:xfrm>
-            <a:off x="8494776" y="5285232"/>
-            <a:ext cx="1481328" cy="347472"/>
-          </a:xfrm>
-          <a:prstGeom prst="rect">
-            <a:avLst/>
-          </a:prstGeom>
-          <a:noFill/>
-          <a:ln/>
-        </p:spPr>
-        <p:txBody>
-          <a:bodyPr wrap="square" lIns="0" tIns="0" rIns="0" bIns="0" rtlCol="0" anchor="ctr"/>
-          <a:lstStyle/>
-          <a:p>
-            <a:pPr algn="ctr" indent="0" marL="0">
-              <a:buNone/>
-            </a:pPr>
-            <a:r>
-              <a:rPr lang="en-US" sz="1500" dirty="0">
-                <a:solidFill>
-                  <a:srgbClr val="AFA89C"/>
-                </a:solidFill>
-                <a:latin typeface="Calibri" pitchFamily="34" charset="0"/>
-                <a:ea typeface="Calibri" pitchFamily="34" charset="-122"/>
-                <a:cs typeface="Calibri" pitchFamily="34" charset="-120"/>
-              </a:rPr>
-              <a:t>○</a:t>
-            </a:r>
-            <a:endParaRPr lang="en-US" sz="1500" dirty="0"/>
-          </a:p>
-        </p:txBody>
-      </p:sp>
-      <p:sp>
-        <p:nvSpPr>
-          <p:cNvPr id="46" name="Text 44"/>
-          <p:cNvSpPr/>
-          <p:nvPr/>
-        </p:nvSpPr>
-        <p:spPr>
-          <a:xfrm>
-            <a:off x="9976104" y="5285232"/>
-            <a:ext cx="1481328" cy="347472"/>
-          </a:xfrm>
-          <a:prstGeom prst="rect">
-            <a:avLst/>
-          </a:prstGeom>
-          <a:noFill/>
-          <a:ln/>
-        </p:spPr>
-        <p:txBody>
-          <a:bodyPr wrap="square" lIns="0" tIns="0" rIns="0" bIns="0" rtlCol="0" anchor="ctr"/>
-          <a:lstStyle/>
-          <a:p>
-            <a:pPr algn="ctr" indent="0" marL="0">
-              <a:buNone/>
-            </a:pPr>
-            <a:r>
-              <a:rPr lang="en-US" sz="1500" dirty="0">
-                <a:solidFill>
-                  <a:srgbClr val="AFA89C"/>
-                </a:solidFill>
-                <a:latin typeface="Calibri" pitchFamily="34" charset="0"/>
-                <a:ea typeface="Calibri" pitchFamily="34" charset="-122"/>
-                <a:cs typeface="Calibri" pitchFamily="34" charset="-120"/>
-              </a:rPr>
-              <a:t>○</a:t>
-            </a:r>
-            <a:endParaRPr lang="en-US" sz="1500" dirty="0"/>
-          </a:p>
-        </p:txBody>
-      </p:sp>
-      <p:sp>
-        <p:nvSpPr>
-          <p:cNvPr id="47" name="Text 45"/>
-          <p:cNvSpPr/>
-          <p:nvPr/>
-        </p:nvSpPr>
-        <p:spPr>
-          <a:xfrm>
-            <a:off x="5532120" y="5907024"/>
-            <a:ext cx="5925312" cy="274320"/>
-          </a:xfrm>
-          <a:prstGeom prst="rect">
-            <a:avLst/>
-          </a:prstGeom>
-          <a:noFill/>
-          <a:ln/>
-        </p:spPr>
-        <p:txBody>
-          <a:bodyPr wrap="square" lIns="0" tIns="0" rIns="0" bIns="0" rtlCol="0" anchor="ctr"/>
-          <a:lstStyle/>
-          <a:p>
-            <a:pPr algn="ctr" indent="0" marL="0">
+              <a:t>Deferred close</a:t>
+            </a:r>
+            <a:endParaRPr lang="en-US" sz="1200" dirty="0"/>
+          </a:p>
+        </p:txBody>
+      </p:sp>
+      <p:sp>
+        <p:nvSpPr>
+          <p:cNvPr id="21" name="Text 19"/>
+          <p:cNvSpPr/>
+          <p:nvPr/>
+        </p:nvSpPr>
+        <p:spPr>
+          <a:xfrm>
+            <a:off x="8385048" y="4315968"/>
+            <a:ext cx="3063240" cy="1097280"/>
+          </a:xfrm>
+          <a:prstGeom prst="rect">
+            <a:avLst/>
+          </a:prstGeom>
+          <a:noFill/>
+          <a:ln/>
+        </p:spPr>
+        <p:txBody>
+          <a:bodyPr wrap="square" lIns="0" tIns="0" rIns="0" bIns="0" rtlCol="0" anchor="ctr"/>
+          <a:lstStyle/>
+          <a:p>
+            <a:pPr indent="0" marL="0">
+              <a:lnSpc>
+                <a:spcPct val="116000"/>
+              </a:lnSpc>
               <a:buNone/>
             </a:pPr>
             <a:r>
               <a:rPr lang="en-US" sz="1000" dirty="0">
                 <a:solidFill>
-                  <a:srgbClr val="73716C"/>
-                </a:solidFill>
-                <a:latin typeface="Calibri" pitchFamily="34" charset="0"/>
-                <a:ea typeface="Calibri" pitchFamily="34" charset="-122"/>
-                <a:cs typeface="Calibri" pitchFamily="34" charset="-120"/>
-              </a:rPr>
-              <a:t>●  full     ◐  partial     ○  none</a:t>
+                  <a:srgbClr val="191919"/>
+                </a:solidFill>
+                <a:latin typeface="Calibri" pitchFamily="34" charset="0"/>
+                <a:ea typeface="Calibri" pitchFamily="34" charset="-122"/>
+                <a:cs typeface="Calibri" pitchFamily="34" charset="-120"/>
+              </a:rPr>
+              <a:t>The closing keyword let GitHub close the ticket at merge, defeating the QA sign-off setting on exactly the pull requests this pipeline authors.</a:t>
             </a:r>
             <a:endParaRPr lang="en-US" sz="1000" dirty="0"/>
           </a:p>
@@ -7075,14 +6435,14 @@
       </p:sp>
       <p:sp>
         <p:nvSpPr>
-          <p:cNvPr id="48" name="Text 46"/>
-          <p:cNvSpPr/>
-          <p:nvPr/>
-        </p:nvSpPr>
-        <p:spPr>
-          <a:xfrm>
-            <a:off x="685800" y="5852160"/>
-            <a:ext cx="5120640" cy="365760"/>
+          <p:cNvPr id="22" name="Text 20"/>
+          <p:cNvSpPr/>
+          <p:nvPr/>
+        </p:nvSpPr>
+        <p:spPr>
+          <a:xfrm>
+            <a:off x="685800" y="5870448"/>
+            <a:ext cx="10881360" cy="365760"/>
           </a:xfrm>
           <a:prstGeom prst="rect">
             <a:avLst/>
@@ -7106,7 +6466,7 @@
                 <a:ea typeface="Cambria" pitchFamily="34" charset="-122"/>
                 <a:cs typeface="Cambria" pitchFamily="34" charset="-120"/>
               </a:rPr>
-              <a:t>Build the 80%. The author becomes a plug.</a:t>
+              <a:t>All six were fixed, and the run above is the same pipeline afterwards.</a:t>
             </a:r>
             <a:endParaRPr lang="en-US" sz="1700" dirty="0"/>
           </a:p>
@@ -7123,6 +6483,2775 @@
 <file path=ppt/slides/slide13.xml><?xml version="1.0" encoding="utf-8"?>
 <p:sld xmlns:a="http://schemas.openxmlformats.org/drawingml/2006/main" xmlns:r="http://schemas.openxmlformats.org/officeDocument/2006/relationships" xmlns:p="http://schemas.openxmlformats.org/presentationml/2006/main">
   <p:cSld name="Slide 13">
+    <p:bg>
+      <p:bgPr>
+        <a:solidFill>
+          <a:srgbClr val="F0EEE6"/>
+        </a:solidFill>
+      </p:bgPr>
+    </p:bg>
+    <p:spTree>
+      <p:nvGrpSpPr>
+        <p:cNvPr id="1" name=""/>
+        <p:cNvGrpSpPr/>
+        <p:nvPr/>
+      </p:nvGrpSpPr>
+      <p:grpSpPr>
+        <a:xfrm>
+          <a:off x="0" y="0"/>
+          <a:ext cx="0" cy="0"/>
+          <a:chOff x="0" y="0"/>
+          <a:chExt cx="0" cy="0"/>
+        </a:xfrm>
+      </p:grpSpPr>
+      <p:sp>
+        <p:nvSpPr>
+          <p:cNvPr id="2" name="Text 0"/>
+          <p:cNvSpPr/>
+          <p:nvPr/>
+        </p:nvSpPr>
+        <p:spPr>
+          <a:xfrm>
+            <a:off x="685800" y="457200"/>
+            <a:ext cx="10881360" cy="1170432"/>
+          </a:xfrm>
+          <a:prstGeom prst="rect">
+            <a:avLst/>
+          </a:prstGeom>
+          <a:noFill/>
+          <a:ln/>
+        </p:spPr>
+        <p:txBody>
+          <a:bodyPr wrap="square" lIns="0" tIns="0" rIns="0" bIns="0" rtlCol="0" anchor="ctr"/>
+          <a:lstStyle/>
+          <a:p>
+            <a:pPr indent="0" marL="0">
+              <a:buNone/>
+            </a:pPr>
+            <a:r>
+              <a:rPr lang="en-US" sz="3100" b="1" dirty="0">
+                <a:solidFill>
+                  <a:srgbClr val="191919"/>
+                </a:solidFill>
+                <a:latin typeface="Cambria" pitchFamily="34" charset="0"/>
+                <a:ea typeface="Cambria" pitchFamily="34" charset="-122"/>
+                <a:cs typeface="Cambria" pitchFamily="34" charset="-120"/>
+              </a:rPr>
+              <a:t>In autonomous mode, your reviewers become the bottleneck.</a:t>
+            </a:r>
+            <a:endParaRPr lang="en-US" sz="3100" dirty="0"/>
+          </a:p>
+        </p:txBody>
+      </p:sp>
+      <p:sp>
+        <p:nvSpPr>
+          <p:cNvPr id="3" name="Text 1"/>
+          <p:cNvSpPr/>
+          <p:nvPr/>
+        </p:nvSpPr>
+        <p:spPr>
+          <a:xfrm>
+            <a:off x="685800" y="1682496"/>
+            <a:ext cx="10881360" cy="292608"/>
+          </a:xfrm>
+          <a:prstGeom prst="rect">
+            <a:avLst/>
+          </a:prstGeom>
+          <a:noFill/>
+          <a:ln/>
+        </p:spPr>
+        <p:txBody>
+          <a:bodyPr wrap="square" lIns="0" tIns="0" rIns="0" bIns="0" rtlCol="0" anchor="ctr"/>
+          <a:lstStyle/>
+          <a:p>
+            <a:pPr indent="0" marL="0">
+              <a:buNone/>
+            </a:pPr>
+            <a:r>
+              <a:rPr lang="en-US" sz="1450" dirty="0">
+                <a:solidFill>
+                  <a:srgbClr val="73716C"/>
+                </a:solidFill>
+                <a:latin typeface="Calibri" pitchFamily="34" charset="0"/>
+                <a:ea typeface="Calibri" pitchFamily="34" charset="-122"/>
+                <a:cs typeface="Calibri" pitchFamily="34" charset="-120"/>
+              </a:rPr>
+              <a:t>They are the only humans left in the loop — so Locus protects their time.</a:t>
+            </a:r>
+            <a:endParaRPr lang="en-US" sz="1450" dirty="0"/>
+          </a:p>
+        </p:txBody>
+      </p:sp>
+      <p:sp>
+        <p:nvSpPr>
+          <p:cNvPr id="4" name="Shape 2"/>
+          <p:cNvSpPr/>
+          <p:nvPr/>
+        </p:nvSpPr>
+        <p:spPr>
+          <a:xfrm>
+            <a:off x="685800" y="2121408"/>
+            <a:ext cx="5321808" cy="2468880"/>
+          </a:xfrm>
+          <a:prstGeom prst="roundRect">
+            <a:avLst>
+              <a:gd name="adj" fmla="val 3333"/>
+            </a:avLst>
+          </a:prstGeom>
+          <a:solidFill>
+            <a:srgbClr val="FAF9F5"/>
+          </a:solidFill>
+          <a:ln w="9525">
+            <a:solidFill>
+              <a:srgbClr val="DFDBD1"/>
+            </a:solidFill>
+            <a:prstDash val="solid"/>
+          </a:ln>
+          <a:effectLst>
+            <a:outerShdw sx="100000" sy="100000" kx="0" ky="0" algn="bl" rotWithShape="0" blurRad="152400" dist="25400" dir="5400000">
+              <a:srgbClr val="8C857A">
+                <a:alpha val="16000"/>
+              </a:srgbClr>
+            </a:outerShdw>
+          </a:effectLst>
+        </p:spPr>
+      </p:sp>
+      <p:sp>
+        <p:nvSpPr>
+          <p:cNvPr id="5" name="Text 3"/>
+          <p:cNvSpPr/>
+          <p:nvPr/>
+        </p:nvSpPr>
+        <p:spPr>
+          <a:xfrm>
+            <a:off x="987552" y="2359152"/>
+            <a:ext cx="4754880" cy="256032"/>
+          </a:xfrm>
+          <a:prstGeom prst="rect">
+            <a:avLst/>
+          </a:prstGeom>
+          <a:noFill/>
+          <a:ln/>
+        </p:spPr>
+        <p:txBody>
+          <a:bodyPr wrap="square" lIns="0" tIns="0" rIns="0" bIns="0" rtlCol="0" anchor="ctr"/>
+          <a:lstStyle/>
+          <a:p>
+            <a:pPr indent="0" marL="0">
+              <a:buNone/>
+            </a:pPr>
+            <a:r>
+              <a:rPr lang="en-US" sz="1100" dirty="0">
+                <a:solidFill>
+                  <a:srgbClr val="73716C"/>
+                </a:solidFill>
+                <a:latin typeface="Calibri" pitchFamily="34" charset="0"/>
+                <a:ea typeface="Calibri" pitchFamily="34" charset="-122"/>
+                <a:cs typeface="Calibri" pitchFamily="34" charset="-120"/>
+              </a:rPr>
+              <a:t>14:10 — someone messages you</a:t>
+            </a:r>
+            <a:endParaRPr lang="en-US" sz="1100" dirty="0"/>
+          </a:p>
+        </p:txBody>
+      </p:sp>
+      <p:sp>
+        <p:nvSpPr>
+          <p:cNvPr id="6" name="Text 4"/>
+          <p:cNvSpPr/>
+          <p:nvPr/>
+        </p:nvSpPr>
+        <p:spPr>
+          <a:xfrm>
+            <a:off x="987552" y="2651760"/>
+            <a:ext cx="4754880" cy="292608"/>
+          </a:xfrm>
+          <a:prstGeom prst="rect">
+            <a:avLst/>
+          </a:prstGeom>
+          <a:noFill/>
+          <a:ln/>
+        </p:spPr>
+        <p:txBody>
+          <a:bodyPr wrap="square" lIns="0" tIns="0" rIns="0" bIns="0" rtlCol="0" anchor="ctr"/>
+          <a:lstStyle/>
+          <a:p>
+            <a:pPr indent="0" marL="0">
+              <a:buNone/>
+            </a:pPr>
+            <a:r>
+              <a:rPr lang="en-US" sz="1450" b="1" dirty="0">
+                <a:solidFill>
+                  <a:srgbClr val="191919"/>
+                </a:solidFill>
+                <a:latin typeface="Calibri" pitchFamily="34" charset="0"/>
+                <a:ea typeface="Calibri" pitchFamily="34" charset="-122"/>
+                <a:cs typeface="Calibri" pitchFamily="34" charset="-120"/>
+              </a:rPr>
+              <a:t>You are in a meeting until 15:30.</a:t>
+            </a:r>
+            <a:endParaRPr lang="en-US" sz="1450" dirty="0"/>
+          </a:p>
+        </p:txBody>
+      </p:sp>
+      <p:sp>
+        <p:nvSpPr>
+          <p:cNvPr id="7" name="Shape 5"/>
+          <p:cNvSpPr/>
+          <p:nvPr/>
+        </p:nvSpPr>
+        <p:spPr>
+          <a:xfrm>
+            <a:off x="987552" y="3127248"/>
+            <a:ext cx="4709160" cy="914400"/>
+          </a:xfrm>
+          <a:prstGeom prst="roundRect">
+            <a:avLst>
+              <a:gd name="adj" fmla="val 8000"/>
+            </a:avLst>
+          </a:prstGeom>
+          <a:solidFill>
+            <a:srgbClr val="EBDBBC"/>
+          </a:solidFill>
+          <a:ln/>
+        </p:spPr>
+      </p:sp>
+      <p:sp>
+        <p:nvSpPr>
+          <p:cNvPr id="8" name="Text 6"/>
+          <p:cNvSpPr/>
+          <p:nvPr/>
+        </p:nvSpPr>
+        <p:spPr>
+          <a:xfrm>
+            <a:off x="1234440" y="3127248"/>
+            <a:ext cx="4206240" cy="914400"/>
+          </a:xfrm>
+          <a:prstGeom prst="rect">
+            <a:avLst/>
+          </a:prstGeom>
+          <a:noFill/>
+          <a:ln/>
+        </p:spPr>
+        <p:txBody>
+          <a:bodyPr wrap="square" lIns="0" tIns="0" rIns="0" bIns="0" rtlCol="0" anchor="ctr"/>
+          <a:lstStyle/>
+          <a:p>
+            <a:pPr indent="0" marL="0">
+              <a:buNone/>
+            </a:pPr>
+            <a:r>
+              <a:rPr lang="en-US" sz="1450" i="1" dirty="0">
+                <a:solidFill>
+                  <a:srgbClr val="191919"/>
+                </a:solidFill>
+                <a:latin typeface="Calibri" pitchFamily="34" charset="0"/>
+                <a:ea typeface="Calibri" pitchFamily="34" charset="-122"/>
+                <a:cs typeface="Calibri" pitchFamily="34" charset="-120"/>
+              </a:rPr>
+              <a:t>“Nakul is booked until 15:30 IST.”</a:t>
+            </a:r>
+            <a:endParaRPr lang="en-US" sz="1450" dirty="0"/>
+          </a:p>
+        </p:txBody>
+      </p:sp>
+      <p:sp>
+        <p:nvSpPr>
+          <p:cNvPr id="9" name="Text 7"/>
+          <p:cNvSpPr/>
+          <p:nvPr/>
+        </p:nvSpPr>
+        <p:spPr>
+          <a:xfrm>
+            <a:off x="987552" y="4114800"/>
+            <a:ext cx="4709160" cy="411480"/>
+          </a:xfrm>
+          <a:prstGeom prst="rect">
+            <a:avLst/>
+          </a:prstGeom>
+          <a:noFill/>
+          <a:ln/>
+        </p:spPr>
+        <p:txBody>
+          <a:bodyPr wrap="square" lIns="0" tIns="0" rIns="0" bIns="0" rtlCol="0" anchor="ctr"/>
+          <a:lstStyle/>
+          <a:p>
+            <a:pPr indent="0" marL="0">
+              <a:lnSpc>
+                <a:spcPct val="120000"/>
+              </a:lnSpc>
+              <a:buNone/>
+            </a:pPr>
+            <a:r>
+              <a:rPr lang="en-US" sz="1050" dirty="0">
+                <a:solidFill>
+                  <a:srgbClr val="73716C"/>
+                </a:solidFill>
+                <a:latin typeface="Calibri" pitchFamily="34" charset="0"/>
+                <a:ea typeface="Calibri" pitchFamily="34" charset="-122"/>
+                <a:cs typeface="Calibri" pitchFamily="34" charset="-120"/>
+              </a:rPr>
+              <a:t>Status and end time only. There is no field on the type that could carry the meeting's subject.</a:t>
+            </a:r>
+            <a:endParaRPr lang="en-US" sz="1050" dirty="0"/>
+          </a:p>
+        </p:txBody>
+      </p:sp>
+      <p:sp>
+        <p:nvSpPr>
+          <p:cNvPr id="10" name="Shape 8"/>
+          <p:cNvSpPr/>
+          <p:nvPr/>
+        </p:nvSpPr>
+        <p:spPr>
+          <a:xfrm>
+            <a:off x="6199632" y="2121408"/>
+            <a:ext cx="5321808" cy="2468880"/>
+          </a:xfrm>
+          <a:prstGeom prst="roundRect">
+            <a:avLst>
+              <a:gd name="adj" fmla="val 3333"/>
+            </a:avLst>
+          </a:prstGeom>
+          <a:solidFill>
+            <a:srgbClr val="FAF9F5"/>
+          </a:solidFill>
+          <a:ln w="9525">
+            <a:solidFill>
+              <a:srgbClr val="DFDBD1"/>
+            </a:solidFill>
+            <a:prstDash val="solid"/>
+          </a:ln>
+          <a:effectLst>
+            <a:outerShdw sx="100000" sy="100000" kx="0" ky="0" algn="bl" rotWithShape="0" blurRad="152400" dist="25400" dir="5400000">
+              <a:srgbClr val="8C857A">
+                <a:alpha val="16000"/>
+              </a:srgbClr>
+            </a:outerShdw>
+          </a:effectLst>
+        </p:spPr>
+      </p:sp>
+      <p:sp>
+        <p:nvSpPr>
+          <p:cNvPr id="11" name="Text 9"/>
+          <p:cNvSpPr/>
+          <p:nvPr/>
+        </p:nvSpPr>
+        <p:spPr>
+          <a:xfrm>
+            <a:off x="6501384" y="2359152"/>
+            <a:ext cx="4754880" cy="237744"/>
+          </a:xfrm>
+          <a:prstGeom prst="rect">
+            <a:avLst/>
+          </a:prstGeom>
+          <a:noFill/>
+          <a:ln/>
+        </p:spPr>
+        <p:txBody>
+          <a:bodyPr wrap="square" lIns="0" tIns="0" rIns="0" bIns="0" rtlCol="0" anchor="ctr"/>
+          <a:lstStyle/>
+          <a:p>
+            <a:pPr indent="0" marL="0">
+              <a:buNone/>
+            </a:pPr>
+            <a:r>
+              <a:rPr lang="en-US" sz="1050" b="1" spc="240" kern="0" dirty="0">
+                <a:solidFill>
+                  <a:srgbClr val="D97757"/>
+                </a:solidFill>
+                <a:latin typeface="Calibri" pitchFamily="34" charset="0"/>
+                <a:ea typeface="Calibri" pitchFamily="34" charset="-122"/>
+                <a:cs typeface="Calibri" pitchFamily="34" charset="-120"/>
+              </a:rPr>
+              <a:t>IF IT ACTUALLY MATTERS</a:t>
+            </a:r>
+            <a:endParaRPr lang="en-US" sz="1050" dirty="0"/>
+          </a:p>
+        </p:txBody>
+      </p:sp>
+      <p:sp>
+        <p:nvSpPr>
+          <p:cNvPr id="12" name="Text 10"/>
+          <p:cNvSpPr/>
+          <p:nvPr/>
+        </p:nvSpPr>
+        <p:spPr>
+          <a:xfrm>
+            <a:off x="6501384" y="2688336"/>
+            <a:ext cx="4754880" cy="256032"/>
+          </a:xfrm>
+          <a:prstGeom prst="rect">
+            <a:avLst/>
+          </a:prstGeom>
+          <a:noFill/>
+          <a:ln/>
+        </p:spPr>
+        <p:txBody>
+          <a:bodyPr wrap="square" lIns="0" tIns="0" rIns="0" bIns="0" rtlCol="0" anchor="ctr"/>
+          <a:lstStyle/>
+          <a:p>
+            <a:pPr indent="0" marL="0">
+              <a:buNone/>
+            </a:pPr>
+            <a:r>
+              <a:rPr lang="en-US" sz="1150" dirty="0">
+                <a:solidFill>
+                  <a:srgbClr val="191919"/>
+                </a:solidFill>
+                <a:latin typeface="Calibri" pitchFamily="34" charset="0"/>
+                <a:ea typeface="Calibri" pitchFamily="34" charset="-122"/>
+                <a:cs typeface="Calibri" pitchFamily="34" charset="-120"/>
+              </a:rPr>
+              <a:t>Importance is decided before any model is asked:</a:t>
+            </a:r>
+            <a:endParaRPr lang="en-US" sz="1150" dirty="0"/>
+          </a:p>
+        </p:txBody>
+      </p:sp>
+      <p:sp>
+        <p:nvSpPr>
+          <p:cNvPr id="13" name="Text 11"/>
+          <p:cNvSpPr/>
+          <p:nvPr/>
+        </p:nvSpPr>
+        <p:spPr>
+          <a:xfrm>
+            <a:off x="6537960" y="3017520"/>
+            <a:ext cx="4663440" cy="1051560"/>
+          </a:xfrm>
+          <a:prstGeom prst="rect">
+            <a:avLst/>
+          </a:prstGeom>
+          <a:noFill/>
+          <a:ln/>
+        </p:spPr>
+        <p:txBody>
+          <a:bodyPr wrap="square" lIns="0" tIns="0" rIns="0" bIns="0" rtlCol="0" anchor="ctr"/>
+          <a:lstStyle/>
+          <a:p>
+            <a:pPr marL="342900" indent="-342900">
+              <a:spcAft>
+                <a:spcPts val="500"/>
+              </a:spcAft>
+              <a:buSzPct val="100000"/>
+              <a:buChar char="●"/>
+            </a:pPr>
+            <a:r>
+              <a:rPr lang="en-US" sz="1150" dirty="0">
+                <a:solidFill>
+                  <a:srgbClr val="73716C"/>
+                </a:solidFill>
+                <a:latin typeface="Calibri" pitchFamily="34" charset="0"/>
+                <a:ea typeface="Calibri" pitchFamily="34" charset="-122"/>
+                <a:cs typeface="Calibri" pitchFamily="34" charset="-120"/>
+              </a:rPr>
+              <a:t>the sender is a reviewer mid-round</a:t>
+            </a:r>
+            <a:endParaRPr lang="en-US" sz="1150" dirty="0"/>
+          </a:p>
+          <a:p>
+            <a:pPr marL="342900" indent="-342900">
+              <a:spcAft>
+                <a:spcPts val="500"/>
+              </a:spcAft>
+              <a:buSzPct val="100000"/>
+              <a:buChar char="●"/>
+            </a:pPr>
+            <a:r>
+              <a:rPr lang="en-US" sz="1150" dirty="0">
+                <a:solidFill>
+                  <a:srgbClr val="73716C"/>
+                </a:solidFill>
+                <a:latin typeface="Calibri" pitchFamily="34" charset="0"/>
+                <a:ea typeface="Calibri" pitchFamily="34" charset="-122"/>
+                <a:cs typeface="Calibri" pitchFamily="34" charset="-120"/>
+              </a:rPr>
+              <a:t>the message names a ticket already blocked on you</a:t>
+            </a:r>
+            <a:endParaRPr lang="en-US" sz="1150" dirty="0"/>
+          </a:p>
+          <a:p>
+            <a:pPr marL="342900" indent="-342900">
+              <a:spcAft>
+                <a:spcPts val="500"/>
+              </a:spcAft>
+              <a:buSzPct val="100000"/>
+              <a:buChar char="●"/>
+            </a:pPr>
+            <a:r>
+              <a:rPr lang="en-US" sz="1150" dirty="0">
+                <a:solidFill>
+                  <a:srgbClr val="73716C"/>
+                </a:solidFill>
+                <a:latin typeface="Calibri" pitchFamily="34" charset="0"/>
+                <a:ea typeface="Calibri" pitchFamily="34" charset="-122"/>
+                <a:cs typeface="Calibri" pitchFamily="34" charset="-120"/>
+              </a:rPr>
+              <a:t>otherwise — a classifier with no tools bound</a:t>
+            </a:r>
+            <a:endParaRPr lang="en-US" sz="1150" dirty="0"/>
+          </a:p>
+        </p:txBody>
+      </p:sp>
+      <p:sp>
+        <p:nvSpPr>
+          <p:cNvPr id="14" name="Text 12"/>
+          <p:cNvSpPr/>
+          <p:nvPr/>
+        </p:nvSpPr>
+        <p:spPr>
+          <a:xfrm>
+            <a:off x="6501384" y="4114800"/>
+            <a:ext cx="4754880" cy="438912"/>
+          </a:xfrm>
+          <a:prstGeom prst="rect">
+            <a:avLst/>
+          </a:prstGeom>
+          <a:noFill/>
+          <a:ln/>
+        </p:spPr>
+        <p:txBody>
+          <a:bodyPr wrap="square" lIns="0" tIns="0" rIns="0" bIns="0" rtlCol="0" anchor="ctr"/>
+          <a:lstStyle/>
+          <a:p>
+            <a:pPr indent="0" marL="0">
+              <a:lnSpc>
+                <a:spcPct val="120000"/>
+              </a:lnSpc>
+              <a:buNone/>
+            </a:pPr>
+            <a:r>
+              <a:rPr lang="en-US" sz="1150" b="1" dirty="0">
+                <a:solidFill>
+                  <a:srgbClr val="191919"/>
+                </a:solidFill>
+                <a:latin typeface="Calibri" pitchFamily="34" charset="0"/>
+                <a:ea typeface="Calibri" pitchFamily="34" charset="-122"/>
+                <a:cs typeface="Calibri" pitchFamily="34" charset="-120"/>
+              </a:rPr>
+              <a:t>Then it proposes times instead of deflecting, and the reschedule waits in the UI.</a:t>
+            </a:r>
+            <a:endParaRPr lang="en-US" sz="1150" dirty="0"/>
+          </a:p>
+        </p:txBody>
+      </p:sp>
+      <p:sp>
+        <p:nvSpPr>
+          <p:cNvPr id="15" name="Shape 13"/>
+          <p:cNvSpPr/>
+          <p:nvPr/>
+        </p:nvSpPr>
+        <p:spPr>
+          <a:xfrm>
+            <a:off x="685800" y="4892040"/>
+            <a:ext cx="3493008" cy="1005840"/>
+          </a:xfrm>
+          <a:prstGeom prst="roundRect">
+            <a:avLst>
+              <a:gd name="adj" fmla="val 8182"/>
+            </a:avLst>
+          </a:prstGeom>
+          <a:solidFill>
+            <a:srgbClr val="FAF9F5"/>
+          </a:solidFill>
+          <a:ln w="9525">
+            <a:solidFill>
+              <a:srgbClr val="DFDBD1"/>
+            </a:solidFill>
+            <a:prstDash val="solid"/>
+          </a:ln>
+        </p:spPr>
+      </p:sp>
+      <p:sp>
+        <p:nvSpPr>
+          <p:cNvPr id="16" name="Text 14"/>
+          <p:cNvSpPr/>
+          <p:nvPr/>
+        </p:nvSpPr>
+        <p:spPr>
+          <a:xfrm>
+            <a:off x="914400" y="5029200"/>
+            <a:ext cx="3063240" cy="274320"/>
+          </a:xfrm>
+          <a:prstGeom prst="rect">
+            <a:avLst/>
+          </a:prstGeom>
+          <a:noFill/>
+          <a:ln/>
+        </p:spPr>
+        <p:txBody>
+          <a:bodyPr wrap="square" lIns="0" tIns="0" rIns="0" bIns="0" rtlCol="0" anchor="ctr"/>
+          <a:lstStyle/>
+          <a:p>
+            <a:pPr indent="0" marL="0">
+              <a:buNone/>
+            </a:pPr>
+            <a:r>
+              <a:rPr lang="en-US" sz="1150" b="1" dirty="0">
+                <a:solidFill>
+                  <a:srgbClr val="D97757"/>
+                </a:solidFill>
+                <a:latin typeface="Calibri" pitchFamily="34" charset="0"/>
+                <a:ea typeface="Calibri" pitchFamily="34" charset="-122"/>
+                <a:cs typeface="Calibri" pitchFamily="34" charset="-120"/>
+              </a:rPr>
+              <a:t>Off by default</a:t>
+            </a:r>
+            <a:endParaRPr lang="en-US" sz="1150" dirty="0"/>
+          </a:p>
+        </p:txBody>
+      </p:sp>
+      <p:sp>
+        <p:nvSpPr>
+          <p:cNvPr id="17" name="Text 15"/>
+          <p:cNvSpPr/>
+          <p:nvPr/>
+        </p:nvSpPr>
+        <p:spPr>
+          <a:xfrm>
+            <a:off x="914400" y="5303520"/>
+            <a:ext cx="3063240" cy="384048"/>
+          </a:xfrm>
+          <a:prstGeom prst="rect">
+            <a:avLst/>
+          </a:prstGeom>
+          <a:noFill/>
+          <a:ln/>
+        </p:spPr>
+        <p:txBody>
+          <a:bodyPr wrap="square" lIns="0" tIns="0" rIns="0" bIns="0" rtlCol="0" anchor="ctr"/>
+          <a:lstStyle/>
+          <a:p>
+            <a:pPr indent="0" marL="0">
+              <a:lnSpc>
+                <a:spcPct val="115000"/>
+              </a:lnSpc>
+              <a:buNone/>
+            </a:pPr>
+            <a:r>
+              <a:rPr lang="en-US" sz="1050" dirty="0">
+                <a:solidFill>
+                  <a:srgbClr val="73716C"/>
+                </a:solidFill>
+                <a:latin typeface="Calibri" pitchFamily="34" charset="0"/>
+                <a:ea typeface="Calibri" pitchFamily="34" charset="-122"/>
+                <a:cs typeface="Calibri" pitchFamily="34" charset="-120"/>
+              </a:rPr>
+              <a:t>it posts to real people</a:t>
+            </a:r>
+            <a:endParaRPr lang="en-US" sz="1050" dirty="0"/>
+          </a:p>
+        </p:txBody>
+      </p:sp>
+      <p:sp>
+        <p:nvSpPr>
+          <p:cNvPr id="18" name="Shape 16"/>
+          <p:cNvSpPr/>
+          <p:nvPr/>
+        </p:nvSpPr>
+        <p:spPr>
+          <a:xfrm>
+            <a:off x="4407408" y="4892040"/>
+            <a:ext cx="3493008" cy="1005840"/>
+          </a:xfrm>
+          <a:prstGeom prst="roundRect">
+            <a:avLst>
+              <a:gd name="adj" fmla="val 8182"/>
+            </a:avLst>
+          </a:prstGeom>
+          <a:solidFill>
+            <a:srgbClr val="FAF9F5"/>
+          </a:solidFill>
+          <a:ln w="9525">
+            <a:solidFill>
+              <a:srgbClr val="DFDBD1"/>
+            </a:solidFill>
+            <a:prstDash val="solid"/>
+          </a:ln>
+        </p:spPr>
+      </p:sp>
+      <p:sp>
+        <p:nvSpPr>
+          <p:cNvPr id="19" name="Text 17"/>
+          <p:cNvSpPr/>
+          <p:nvPr/>
+        </p:nvSpPr>
+        <p:spPr>
+          <a:xfrm>
+            <a:off x="4636008" y="5029200"/>
+            <a:ext cx="3063240" cy="274320"/>
+          </a:xfrm>
+          <a:prstGeom prst="rect">
+            <a:avLst/>
+          </a:prstGeom>
+          <a:noFill/>
+          <a:ln/>
+        </p:spPr>
+        <p:txBody>
+          <a:bodyPr wrap="square" lIns="0" tIns="0" rIns="0" bIns="0" rtlCol="0" anchor="ctr"/>
+          <a:lstStyle/>
+          <a:p>
+            <a:pPr indent="0" marL="0">
+              <a:buNone/>
+            </a:pPr>
+            <a:r>
+              <a:rPr lang="en-US" sz="1150" b="1" dirty="0">
+                <a:solidFill>
+                  <a:srgbClr val="D97757"/>
+                </a:solidFill>
+                <a:latin typeface="Calibri" pitchFamily="34" charset="0"/>
+                <a:ea typeface="Calibri" pitchFamily="34" charset="-122"/>
+                <a:cs typeface="Calibri" pitchFamily="34" charset="-120"/>
+              </a:rPr>
+              <a:t>1 reply per thread, per day</a:t>
+            </a:r>
+            <a:endParaRPr lang="en-US" sz="1150" dirty="0"/>
+          </a:p>
+        </p:txBody>
+      </p:sp>
+      <p:sp>
+        <p:nvSpPr>
+          <p:cNvPr id="20" name="Text 18"/>
+          <p:cNvSpPr/>
+          <p:nvPr/>
+        </p:nvSpPr>
+        <p:spPr>
+          <a:xfrm>
+            <a:off x="4636008" y="5303520"/>
+            <a:ext cx="3063240" cy="384048"/>
+          </a:xfrm>
+          <a:prstGeom prst="rect">
+            <a:avLst/>
+          </a:prstGeom>
+          <a:noFill/>
+          <a:ln/>
+        </p:spPr>
+        <p:txBody>
+          <a:bodyPr wrap="square" lIns="0" tIns="0" rIns="0" bIns="0" rtlCol="0" anchor="ctr"/>
+          <a:lstStyle/>
+          <a:p>
+            <a:pPr indent="0" marL="0">
+              <a:lnSpc>
+                <a:spcPct val="115000"/>
+              </a:lnSpc>
+              <a:buNone/>
+            </a:pPr>
+            <a:r>
+              <a:rPr lang="en-US" sz="1050" dirty="0">
+                <a:solidFill>
+                  <a:srgbClr val="73716C"/>
+                </a:solidFill>
+                <a:latin typeface="Calibri" pitchFamily="34" charset="0"/>
+                <a:ea typeface="Calibri" pitchFamily="34" charset="-122"/>
+                <a:cs typeface="Calibri" pitchFamily="34" charset="-120"/>
+              </a:rPr>
+              <a:t>a repeating bot gets muted</a:t>
+            </a:r>
+            <a:endParaRPr lang="en-US" sz="1050" dirty="0"/>
+          </a:p>
+        </p:txBody>
+      </p:sp>
+      <p:sp>
+        <p:nvSpPr>
+          <p:cNvPr id="21" name="Shape 19"/>
+          <p:cNvSpPr/>
+          <p:nvPr/>
+        </p:nvSpPr>
+        <p:spPr>
+          <a:xfrm>
+            <a:off x="8129016" y="4892040"/>
+            <a:ext cx="3493008" cy="1005840"/>
+          </a:xfrm>
+          <a:prstGeom prst="roundRect">
+            <a:avLst>
+              <a:gd name="adj" fmla="val 8182"/>
+            </a:avLst>
+          </a:prstGeom>
+          <a:solidFill>
+            <a:srgbClr val="FAF9F5"/>
+          </a:solidFill>
+          <a:ln w="9525">
+            <a:solidFill>
+              <a:srgbClr val="DFDBD1"/>
+            </a:solidFill>
+            <a:prstDash val="solid"/>
+          </a:ln>
+        </p:spPr>
+      </p:sp>
+      <p:sp>
+        <p:nvSpPr>
+          <p:cNvPr id="22" name="Text 20"/>
+          <p:cNvSpPr/>
+          <p:nvPr/>
+        </p:nvSpPr>
+        <p:spPr>
+          <a:xfrm>
+            <a:off x="8357616" y="5029200"/>
+            <a:ext cx="3063240" cy="274320"/>
+          </a:xfrm>
+          <a:prstGeom prst="rect">
+            <a:avLst/>
+          </a:prstGeom>
+          <a:noFill/>
+          <a:ln/>
+        </p:spPr>
+        <p:txBody>
+          <a:bodyPr wrap="square" lIns="0" tIns="0" rIns="0" bIns="0" rtlCol="0" anchor="ctr"/>
+          <a:lstStyle/>
+          <a:p>
+            <a:pPr indent="0" marL="0">
+              <a:buNone/>
+            </a:pPr>
+            <a:r>
+              <a:rPr lang="en-US" sz="1150" b="1" dirty="0">
+                <a:solidFill>
+                  <a:srgbClr val="D97757"/>
+                </a:solidFill>
+                <a:latin typeface="Calibri" pitchFamily="34" charset="0"/>
+                <a:ea typeface="Calibri" pitchFamily="34" charset="-122"/>
+                <a:cs typeface="Calibri" pitchFamily="34" charset="-120"/>
+              </a:rPr>
+              <a:t>An unreadable calendar reads “free”</a:t>
+            </a:r>
+            <a:endParaRPr lang="en-US" sz="1150" dirty="0"/>
+          </a:p>
+        </p:txBody>
+      </p:sp>
+      <p:sp>
+        <p:nvSpPr>
+          <p:cNvPr id="23" name="Text 21"/>
+          <p:cNvSpPr/>
+          <p:nvPr/>
+        </p:nvSpPr>
+        <p:spPr>
+          <a:xfrm>
+            <a:off x="8357616" y="5303520"/>
+            <a:ext cx="3063240" cy="384048"/>
+          </a:xfrm>
+          <a:prstGeom prst="rect">
+            <a:avLst/>
+          </a:prstGeom>
+          <a:noFill/>
+          <a:ln/>
+        </p:spPr>
+        <p:txBody>
+          <a:bodyPr wrap="square" lIns="0" tIns="0" rIns="0" bIns="0" rtlCol="0" anchor="ctr"/>
+          <a:lstStyle/>
+          <a:p>
+            <a:pPr indent="0" marL="0">
+              <a:lnSpc>
+                <a:spcPct val="115000"/>
+              </a:lnSpc>
+              <a:buNone/>
+            </a:pPr>
+            <a:r>
+              <a:rPr lang="en-US" sz="1050" dirty="0">
+                <a:solidFill>
+                  <a:srgbClr val="73716C"/>
+                </a:solidFill>
+                <a:latin typeface="Calibri" pitchFamily="34" charset="0"/>
+                <a:ea typeface="Calibri" pitchFamily="34" charset="-122"/>
+                <a:cs typeface="Calibri" pitchFamily="34" charset="-120"/>
+              </a:rPr>
+              <a:t>never “busy” — that makes you unreachable</a:t>
+            </a:r>
+            <a:endParaRPr lang="en-US" sz="1050" dirty="0"/>
+          </a:p>
+        </p:txBody>
+      </p:sp>
+    </p:spTree>
+  </p:cSld>
+  <p:clrMapOvr>
+    <a:masterClrMapping/>
+  </p:clrMapOvr>
+</p:sld>
+</file>
+
+<file path=ppt/slides/slide14.xml><?xml version="1.0" encoding="utf-8"?>
+<p:sld xmlns:a="http://schemas.openxmlformats.org/drawingml/2006/main" xmlns:r="http://schemas.openxmlformats.org/officeDocument/2006/relationships" xmlns:p="http://schemas.openxmlformats.org/presentationml/2006/main">
+  <p:cSld name="Slide 14">
+    <p:bg>
+      <p:bgPr>
+        <a:solidFill>
+          <a:srgbClr val="F0EEE6"/>
+        </a:solidFill>
+      </p:bgPr>
+    </p:bg>
+    <p:spTree>
+      <p:nvGrpSpPr>
+        <p:cNvPr id="1" name=""/>
+        <p:cNvGrpSpPr/>
+        <p:nvPr/>
+      </p:nvGrpSpPr>
+      <p:grpSpPr>
+        <a:xfrm>
+          <a:off x="0" y="0"/>
+          <a:ext cx="0" cy="0"/>
+          <a:chOff x="0" y="0"/>
+          <a:chExt cx="0" cy="0"/>
+        </a:xfrm>
+      </p:grpSpPr>
+      <p:sp>
+        <p:nvSpPr>
+          <p:cNvPr id="2" name="Text 0"/>
+          <p:cNvSpPr/>
+          <p:nvPr/>
+        </p:nvSpPr>
+        <p:spPr>
+          <a:xfrm>
+            <a:off x="685800" y="457200"/>
+            <a:ext cx="10881360" cy="1170432"/>
+          </a:xfrm>
+          <a:prstGeom prst="rect">
+            <a:avLst/>
+          </a:prstGeom>
+          <a:noFill/>
+          <a:ln/>
+        </p:spPr>
+        <p:txBody>
+          <a:bodyPr wrap="square" lIns="0" tIns="0" rIns="0" bIns="0" rtlCol="0" anchor="ctr"/>
+          <a:lstStyle/>
+          <a:p>
+            <a:pPr indent="0" marL="0">
+              <a:buNone/>
+            </a:pPr>
+            <a:r>
+              <a:rPr lang="en-US" sz="3100" b="1" dirty="0">
+                <a:solidFill>
+                  <a:srgbClr val="191919"/>
+                </a:solidFill>
+                <a:latin typeface="Cambria" pitchFamily="34" charset="0"/>
+                <a:ea typeface="Cambria" pitchFamily="34" charset="-122"/>
+                <a:cs typeface="Cambria" pitchFamily="34" charset="-120"/>
+              </a:rPr>
+              <a:t>Everyone automates writing the diff. Nobody automates the work around it.</a:t>
+            </a:r>
+            <a:endParaRPr lang="en-US" sz="3100" dirty="0"/>
+          </a:p>
+        </p:txBody>
+      </p:sp>
+      <p:sp>
+        <p:nvSpPr>
+          <p:cNvPr id="3" name="Text 1"/>
+          <p:cNvSpPr/>
+          <p:nvPr/>
+        </p:nvSpPr>
+        <p:spPr>
+          <a:xfrm>
+            <a:off x="685800" y="1682496"/>
+            <a:ext cx="10881360" cy="292608"/>
+          </a:xfrm>
+          <a:prstGeom prst="rect">
+            <a:avLst/>
+          </a:prstGeom>
+          <a:noFill/>
+          <a:ln/>
+        </p:spPr>
+        <p:txBody>
+          <a:bodyPr wrap="square" lIns="0" tIns="0" rIns="0" bIns="0" rtlCol="0" anchor="ctr"/>
+          <a:lstStyle/>
+          <a:p>
+            <a:pPr indent="0" marL="0">
+              <a:buNone/>
+            </a:pPr>
+            <a:r>
+              <a:rPr lang="en-US" sz="1450" dirty="0">
+                <a:solidFill>
+                  <a:srgbClr val="73716C"/>
+                </a:solidFill>
+                <a:latin typeface="Calibri" pitchFamily="34" charset="0"/>
+                <a:ea typeface="Calibri" pitchFamily="34" charset="-122"/>
+                <a:cs typeface="Calibri" pitchFamily="34" charset="-120"/>
+              </a:rPr>
+              <a:t>Which is what makes the author swappable in the first place.</a:t>
+            </a:r>
+            <a:endParaRPr lang="en-US" sz="1450" dirty="0"/>
+          </a:p>
+        </p:txBody>
+      </p:sp>
+      <p:sp>
+        <p:nvSpPr>
+          <p:cNvPr id="4" name="Text 2"/>
+          <p:cNvSpPr/>
+          <p:nvPr/>
+        </p:nvSpPr>
+        <p:spPr>
+          <a:xfrm>
+            <a:off x="5532120" y="1810512"/>
+            <a:ext cx="1481328" cy="566928"/>
+          </a:xfrm>
+          <a:prstGeom prst="rect">
+            <a:avLst/>
+          </a:prstGeom>
+          <a:noFill/>
+          <a:ln/>
+        </p:spPr>
+        <p:txBody>
+          <a:bodyPr wrap="square" lIns="0" tIns="0" rIns="0" bIns="0" rtlCol="0" anchor="b"/>
+          <a:lstStyle/>
+          <a:p>
+            <a:pPr algn="ctr" indent="0" marL="0">
+              <a:lnSpc>
+                <a:spcPct val="105000"/>
+              </a:lnSpc>
+              <a:buNone/>
+            </a:pPr>
+            <a:r>
+              <a:rPr lang="en-US" sz="1050" b="1" dirty="0">
+                <a:solidFill>
+                  <a:srgbClr val="D97757"/>
+                </a:solidFill>
+                <a:latin typeface="Calibri" pitchFamily="34" charset="0"/>
+                <a:ea typeface="Calibri" pitchFamily="34" charset="-122"/>
+                <a:cs typeface="Calibri" pitchFamily="34" charset="-120"/>
+              </a:rPr>
+              <a:t>Locus</a:t>
+            </a:r>
+            <a:endParaRPr lang="en-US" sz="1050" dirty="0"/>
+          </a:p>
+        </p:txBody>
+      </p:sp>
+      <p:sp>
+        <p:nvSpPr>
+          <p:cNvPr id="5" name="Text 3"/>
+          <p:cNvSpPr/>
+          <p:nvPr/>
+        </p:nvSpPr>
+        <p:spPr>
+          <a:xfrm>
+            <a:off x="7013448" y="1810512"/>
+            <a:ext cx="1481328" cy="566928"/>
+          </a:xfrm>
+          <a:prstGeom prst="rect">
+            <a:avLst/>
+          </a:prstGeom>
+          <a:noFill/>
+          <a:ln/>
+        </p:spPr>
+        <p:txBody>
+          <a:bodyPr wrap="square" lIns="0" tIns="0" rIns="0" bIns="0" rtlCol="0" anchor="b"/>
+          <a:lstStyle/>
+          <a:p>
+            <a:pPr algn="ctr" indent="0" marL="0">
+              <a:lnSpc>
+                <a:spcPct val="105000"/>
+              </a:lnSpc>
+              <a:buNone/>
+            </a:pPr>
+            <a:r>
+              <a:rPr lang="en-US" sz="1050" dirty="0">
+                <a:solidFill>
+                  <a:srgbClr val="73716C"/>
+                </a:solidFill>
+                <a:latin typeface="Calibri" pitchFamily="34" charset="0"/>
+                <a:ea typeface="Calibri" pitchFamily="34" charset="-122"/>
+                <a:cs typeface="Calibri" pitchFamily="34" charset="-120"/>
+              </a:rPr>
+              <a:t>AI coding</a:t>
+            </a:r>
+            <a:endParaRPr lang="en-US" sz="1050" dirty="0"/>
+          </a:p>
+          <a:p>
+            <a:pPr algn="ctr" indent="0" marL="0">
+              <a:lnSpc>
+                <a:spcPct val="105000"/>
+              </a:lnSpc>
+              <a:buNone/>
+            </a:pPr>
+            <a:r>
+              <a:rPr lang="en-US" sz="1050" dirty="0">
+                <a:solidFill>
+                  <a:srgbClr val="73716C"/>
+                </a:solidFill>
+                <a:latin typeface="Calibri" pitchFamily="34" charset="0"/>
+                <a:ea typeface="Calibri" pitchFamily="34" charset="-122"/>
+                <a:cs typeface="Calibri" pitchFamily="34" charset="-120"/>
+              </a:rPr>
+              <a:t>assistants</a:t>
+            </a:r>
+            <a:endParaRPr lang="en-US" sz="1050" dirty="0"/>
+          </a:p>
+        </p:txBody>
+      </p:sp>
+      <p:sp>
+        <p:nvSpPr>
+          <p:cNvPr id="6" name="Text 4"/>
+          <p:cNvSpPr/>
+          <p:nvPr/>
+        </p:nvSpPr>
+        <p:spPr>
+          <a:xfrm>
+            <a:off x="8494776" y="1810512"/>
+            <a:ext cx="1481328" cy="566928"/>
+          </a:xfrm>
+          <a:prstGeom prst="rect">
+            <a:avLst/>
+          </a:prstGeom>
+          <a:noFill/>
+          <a:ln/>
+        </p:spPr>
+        <p:txBody>
+          <a:bodyPr wrap="square" lIns="0" tIns="0" rIns="0" bIns="0" rtlCol="0" anchor="b"/>
+          <a:lstStyle/>
+          <a:p>
+            <a:pPr algn="ctr" indent="0" marL="0">
+              <a:lnSpc>
+                <a:spcPct val="105000"/>
+              </a:lnSpc>
+              <a:buNone/>
+            </a:pPr>
+            <a:r>
+              <a:rPr lang="en-US" sz="1050" dirty="0">
+                <a:solidFill>
+                  <a:srgbClr val="73716C"/>
+                </a:solidFill>
+                <a:latin typeface="Calibri" pitchFamily="34" charset="0"/>
+                <a:ea typeface="Calibri" pitchFamily="34" charset="-122"/>
+                <a:cs typeface="Calibri" pitchFamily="34" charset="-120"/>
+              </a:rPr>
+              <a:t>CI review</a:t>
+            </a:r>
+            <a:endParaRPr lang="en-US" sz="1050" dirty="0"/>
+          </a:p>
+          <a:p>
+            <a:pPr algn="ctr" indent="0" marL="0">
+              <a:lnSpc>
+                <a:spcPct val="105000"/>
+              </a:lnSpc>
+              <a:buNone/>
+            </a:pPr>
+            <a:r>
+              <a:rPr lang="en-US" sz="1050" dirty="0">
+                <a:solidFill>
+                  <a:srgbClr val="73716C"/>
+                </a:solidFill>
+                <a:latin typeface="Calibri" pitchFamily="34" charset="0"/>
+                <a:ea typeface="Calibri" pitchFamily="34" charset="-122"/>
+                <a:cs typeface="Calibri" pitchFamily="34" charset="-120"/>
+              </a:rPr>
+              <a:t>bots</a:t>
+            </a:r>
+            <a:endParaRPr lang="en-US" sz="1050" dirty="0"/>
+          </a:p>
+        </p:txBody>
+      </p:sp>
+      <p:sp>
+        <p:nvSpPr>
+          <p:cNvPr id="7" name="Text 5"/>
+          <p:cNvSpPr/>
+          <p:nvPr/>
+        </p:nvSpPr>
+        <p:spPr>
+          <a:xfrm>
+            <a:off x="9976104" y="1810512"/>
+            <a:ext cx="1481328" cy="566928"/>
+          </a:xfrm>
+          <a:prstGeom prst="rect">
+            <a:avLst/>
+          </a:prstGeom>
+          <a:noFill/>
+          <a:ln/>
+        </p:spPr>
+        <p:txBody>
+          <a:bodyPr wrap="square" lIns="0" tIns="0" rIns="0" bIns="0" rtlCol="0" anchor="b"/>
+          <a:lstStyle/>
+          <a:p>
+            <a:pPr algn="ctr" indent="0" marL="0">
+              <a:lnSpc>
+                <a:spcPct val="105000"/>
+              </a:lnSpc>
+              <a:buNone/>
+            </a:pPr>
+            <a:r>
+              <a:rPr lang="en-US" sz="1050" dirty="0">
+                <a:solidFill>
+                  <a:srgbClr val="73716C"/>
+                </a:solidFill>
+                <a:latin typeface="Calibri" pitchFamily="34" charset="0"/>
+                <a:ea typeface="Calibri" pitchFamily="34" charset="-122"/>
+                <a:cs typeface="Calibri" pitchFamily="34" charset="-120"/>
+              </a:rPr>
+              <a:t>PM board</a:t>
+            </a:r>
+            <a:endParaRPr lang="en-US" sz="1050" dirty="0"/>
+          </a:p>
+          <a:p>
+            <a:pPr algn="ctr" indent="0" marL="0">
+              <a:lnSpc>
+                <a:spcPct val="105000"/>
+              </a:lnSpc>
+              <a:buNone/>
+            </a:pPr>
+            <a:r>
+              <a:rPr lang="en-US" sz="1050" dirty="0">
+                <a:solidFill>
+                  <a:srgbClr val="73716C"/>
+                </a:solidFill>
+                <a:latin typeface="Calibri" pitchFamily="34" charset="0"/>
+                <a:ea typeface="Calibri" pitchFamily="34" charset="-122"/>
+                <a:cs typeface="Calibri" pitchFamily="34" charset="-120"/>
+              </a:rPr>
+              <a:t>automation</a:t>
+            </a:r>
+            <a:endParaRPr lang="en-US" sz="1050" dirty="0"/>
+          </a:p>
+        </p:txBody>
+      </p:sp>
+      <p:sp>
+        <p:nvSpPr>
+          <p:cNvPr id="8" name="Shape 6"/>
+          <p:cNvSpPr/>
+          <p:nvPr/>
+        </p:nvSpPr>
+        <p:spPr>
+          <a:xfrm>
+            <a:off x="685800" y="2496312"/>
+            <a:ext cx="10835640" cy="438912"/>
+          </a:xfrm>
+          <a:prstGeom prst="rect">
+            <a:avLst/>
+          </a:prstGeom>
+          <a:solidFill>
+            <a:srgbClr val="FAF9F5"/>
+          </a:solidFill>
+          <a:ln w="12700">
+            <a:solidFill>
+              <a:srgbClr val="FAF9F5"/>
+            </a:solidFill>
+            <a:prstDash val="solid"/>
+          </a:ln>
+        </p:spPr>
+      </p:sp>
+      <p:sp>
+        <p:nvSpPr>
+          <p:cNvPr id="9" name="Text 7"/>
+          <p:cNvSpPr/>
+          <p:nvPr/>
+        </p:nvSpPr>
+        <p:spPr>
+          <a:xfrm>
+            <a:off x="868680" y="2542032"/>
+            <a:ext cx="4572000" cy="347472"/>
+          </a:xfrm>
+          <a:prstGeom prst="rect">
+            <a:avLst/>
+          </a:prstGeom>
+          <a:noFill/>
+          <a:ln/>
+        </p:spPr>
+        <p:txBody>
+          <a:bodyPr wrap="square" lIns="0" tIns="0" rIns="0" bIns="0" rtlCol="0" anchor="ctr"/>
+          <a:lstStyle/>
+          <a:p>
+            <a:pPr indent="0" marL="0">
+              <a:buNone/>
+            </a:pPr>
+            <a:r>
+              <a:rPr lang="en-US" sz="1200" dirty="0">
+                <a:solidFill>
+                  <a:srgbClr val="191919"/>
+                </a:solidFill>
+                <a:latin typeface="Calibri" pitchFamily="34" charset="0"/>
+                <a:ea typeface="Calibri" pitchFamily="34" charset="-122"/>
+                <a:cs typeface="Calibri" pitchFamily="34" charset="-120"/>
+              </a:rPr>
+              <a:t>Writes the code</a:t>
+            </a:r>
+            <a:endParaRPr lang="en-US" sz="1200" dirty="0"/>
+          </a:p>
+        </p:txBody>
+      </p:sp>
+      <p:sp>
+        <p:nvSpPr>
+          <p:cNvPr id="10" name="Text 8"/>
+          <p:cNvSpPr/>
+          <p:nvPr/>
+        </p:nvSpPr>
+        <p:spPr>
+          <a:xfrm>
+            <a:off x="5532120" y="2542032"/>
+            <a:ext cx="1481328" cy="347472"/>
+          </a:xfrm>
+          <a:prstGeom prst="rect">
+            <a:avLst/>
+          </a:prstGeom>
+          <a:noFill/>
+          <a:ln/>
+        </p:spPr>
+        <p:txBody>
+          <a:bodyPr wrap="square" lIns="0" tIns="0" rIns="0" bIns="0" rtlCol="0" anchor="ctr"/>
+          <a:lstStyle/>
+          <a:p>
+            <a:pPr algn="ctr" indent="0" marL="0">
+              <a:buNone/>
+            </a:pPr>
+            <a:r>
+              <a:rPr lang="en-US" sz="1500" dirty="0">
+                <a:solidFill>
+                  <a:srgbClr val="D97757"/>
+                </a:solidFill>
+                <a:latin typeface="Calibri" pitchFamily="34" charset="0"/>
+                <a:ea typeface="Calibri" pitchFamily="34" charset="-122"/>
+                <a:cs typeface="Calibri" pitchFamily="34" charset="-120"/>
+              </a:rPr>
+              <a:t>●</a:t>
+            </a:r>
+            <a:endParaRPr lang="en-US" sz="1500" dirty="0"/>
+          </a:p>
+        </p:txBody>
+      </p:sp>
+      <p:sp>
+        <p:nvSpPr>
+          <p:cNvPr id="11" name="Text 9"/>
+          <p:cNvSpPr/>
+          <p:nvPr/>
+        </p:nvSpPr>
+        <p:spPr>
+          <a:xfrm>
+            <a:off x="7013448" y="2542032"/>
+            <a:ext cx="1481328" cy="347472"/>
+          </a:xfrm>
+          <a:prstGeom prst="rect">
+            <a:avLst/>
+          </a:prstGeom>
+          <a:noFill/>
+          <a:ln/>
+        </p:spPr>
+        <p:txBody>
+          <a:bodyPr wrap="square" lIns="0" tIns="0" rIns="0" bIns="0" rtlCol="0" anchor="ctr"/>
+          <a:lstStyle/>
+          <a:p>
+            <a:pPr algn="ctr" indent="0" marL="0">
+              <a:buNone/>
+            </a:pPr>
+            <a:r>
+              <a:rPr lang="en-US" sz="1500" dirty="0">
+                <a:solidFill>
+                  <a:srgbClr val="D97757"/>
+                </a:solidFill>
+                <a:latin typeface="Calibri" pitchFamily="34" charset="0"/>
+                <a:ea typeface="Calibri" pitchFamily="34" charset="-122"/>
+                <a:cs typeface="Calibri" pitchFamily="34" charset="-120"/>
+              </a:rPr>
+              <a:t>●</a:t>
+            </a:r>
+            <a:endParaRPr lang="en-US" sz="1500" dirty="0"/>
+          </a:p>
+        </p:txBody>
+      </p:sp>
+      <p:sp>
+        <p:nvSpPr>
+          <p:cNvPr id="12" name="Text 10"/>
+          <p:cNvSpPr/>
+          <p:nvPr/>
+        </p:nvSpPr>
+        <p:spPr>
+          <a:xfrm>
+            <a:off x="8494776" y="2542032"/>
+            <a:ext cx="1481328" cy="347472"/>
+          </a:xfrm>
+          <a:prstGeom prst="rect">
+            <a:avLst/>
+          </a:prstGeom>
+          <a:noFill/>
+          <a:ln/>
+        </p:spPr>
+        <p:txBody>
+          <a:bodyPr wrap="square" lIns="0" tIns="0" rIns="0" bIns="0" rtlCol="0" anchor="ctr"/>
+          <a:lstStyle/>
+          <a:p>
+            <a:pPr algn="ctr" indent="0" marL="0">
+              <a:buNone/>
+            </a:pPr>
+            <a:r>
+              <a:rPr lang="en-US" sz="1500" dirty="0">
+                <a:solidFill>
+                  <a:srgbClr val="AFA89C"/>
+                </a:solidFill>
+                <a:latin typeface="Calibri" pitchFamily="34" charset="0"/>
+                <a:ea typeface="Calibri" pitchFamily="34" charset="-122"/>
+                <a:cs typeface="Calibri" pitchFamily="34" charset="-120"/>
+              </a:rPr>
+              <a:t>○</a:t>
+            </a:r>
+            <a:endParaRPr lang="en-US" sz="1500" dirty="0"/>
+          </a:p>
+        </p:txBody>
+      </p:sp>
+      <p:sp>
+        <p:nvSpPr>
+          <p:cNvPr id="13" name="Text 11"/>
+          <p:cNvSpPr/>
+          <p:nvPr/>
+        </p:nvSpPr>
+        <p:spPr>
+          <a:xfrm>
+            <a:off x="9976104" y="2542032"/>
+            <a:ext cx="1481328" cy="347472"/>
+          </a:xfrm>
+          <a:prstGeom prst="rect">
+            <a:avLst/>
+          </a:prstGeom>
+          <a:noFill/>
+          <a:ln/>
+        </p:spPr>
+        <p:txBody>
+          <a:bodyPr wrap="square" lIns="0" tIns="0" rIns="0" bIns="0" rtlCol="0" anchor="ctr"/>
+          <a:lstStyle/>
+          <a:p>
+            <a:pPr algn="ctr" indent="0" marL="0">
+              <a:buNone/>
+            </a:pPr>
+            <a:r>
+              <a:rPr lang="en-US" sz="1500" dirty="0">
+                <a:solidFill>
+                  <a:srgbClr val="AFA89C"/>
+                </a:solidFill>
+                <a:latin typeface="Calibri" pitchFamily="34" charset="0"/>
+                <a:ea typeface="Calibri" pitchFamily="34" charset="-122"/>
+                <a:cs typeface="Calibri" pitchFamily="34" charset="-120"/>
+              </a:rPr>
+              <a:t>○</a:t>
+            </a:r>
+            <a:endParaRPr lang="en-US" sz="1500" dirty="0"/>
+          </a:p>
+        </p:txBody>
+      </p:sp>
+      <p:sp>
+        <p:nvSpPr>
+          <p:cNvPr id="14" name="Text 12"/>
+          <p:cNvSpPr/>
+          <p:nvPr/>
+        </p:nvSpPr>
+        <p:spPr>
+          <a:xfrm>
+            <a:off x="868680" y="2999232"/>
+            <a:ext cx="4572000" cy="347472"/>
+          </a:xfrm>
+          <a:prstGeom prst="rect">
+            <a:avLst/>
+          </a:prstGeom>
+          <a:noFill/>
+          <a:ln/>
+        </p:spPr>
+        <p:txBody>
+          <a:bodyPr wrap="square" lIns="0" tIns="0" rIns="0" bIns="0" rtlCol="0" anchor="ctr"/>
+          <a:lstStyle/>
+          <a:p>
+            <a:pPr indent="0" marL="0">
+              <a:buNone/>
+            </a:pPr>
+            <a:r>
+              <a:rPr lang="en-US" sz="1200" dirty="0">
+                <a:solidFill>
+                  <a:srgbClr val="191919"/>
+                </a:solidFill>
+                <a:latin typeface="Calibri" pitchFamily="34" charset="0"/>
+                <a:ea typeface="Calibri" pitchFamily="34" charset="-122"/>
+                <a:cs typeface="Calibri" pitchFamily="34" charset="-120"/>
+              </a:rPr>
+              <a:t>Gathers Slack + Jira context first</a:t>
+            </a:r>
+            <a:endParaRPr lang="en-US" sz="1200" dirty="0"/>
+          </a:p>
+        </p:txBody>
+      </p:sp>
+      <p:sp>
+        <p:nvSpPr>
+          <p:cNvPr id="15" name="Text 13"/>
+          <p:cNvSpPr/>
+          <p:nvPr/>
+        </p:nvSpPr>
+        <p:spPr>
+          <a:xfrm>
+            <a:off x="5532120" y="2999232"/>
+            <a:ext cx="1481328" cy="347472"/>
+          </a:xfrm>
+          <a:prstGeom prst="rect">
+            <a:avLst/>
+          </a:prstGeom>
+          <a:noFill/>
+          <a:ln/>
+        </p:spPr>
+        <p:txBody>
+          <a:bodyPr wrap="square" lIns="0" tIns="0" rIns="0" bIns="0" rtlCol="0" anchor="ctr"/>
+          <a:lstStyle/>
+          <a:p>
+            <a:pPr algn="ctr" indent="0" marL="0">
+              <a:buNone/>
+            </a:pPr>
+            <a:r>
+              <a:rPr lang="en-US" sz="1500" dirty="0">
+                <a:solidFill>
+                  <a:srgbClr val="D97757"/>
+                </a:solidFill>
+                <a:latin typeface="Calibri" pitchFamily="34" charset="0"/>
+                <a:ea typeface="Calibri" pitchFamily="34" charset="-122"/>
+                <a:cs typeface="Calibri" pitchFamily="34" charset="-120"/>
+              </a:rPr>
+              <a:t>●</a:t>
+            </a:r>
+            <a:endParaRPr lang="en-US" sz="1500" dirty="0"/>
+          </a:p>
+        </p:txBody>
+      </p:sp>
+      <p:sp>
+        <p:nvSpPr>
+          <p:cNvPr id="16" name="Text 14"/>
+          <p:cNvSpPr/>
+          <p:nvPr/>
+        </p:nvSpPr>
+        <p:spPr>
+          <a:xfrm>
+            <a:off x="7013448" y="2999232"/>
+            <a:ext cx="1481328" cy="347472"/>
+          </a:xfrm>
+          <a:prstGeom prst="rect">
+            <a:avLst/>
+          </a:prstGeom>
+          <a:noFill/>
+          <a:ln/>
+        </p:spPr>
+        <p:txBody>
+          <a:bodyPr wrap="square" lIns="0" tIns="0" rIns="0" bIns="0" rtlCol="0" anchor="ctr"/>
+          <a:lstStyle/>
+          <a:p>
+            <a:pPr algn="ctr" indent="0" marL="0">
+              <a:buNone/>
+            </a:pPr>
+            <a:r>
+              <a:rPr lang="en-US" sz="1500" dirty="0">
+                <a:solidFill>
+                  <a:srgbClr val="D4A27F"/>
+                </a:solidFill>
+                <a:latin typeface="Calibri" pitchFamily="34" charset="0"/>
+                <a:ea typeface="Calibri" pitchFamily="34" charset="-122"/>
+                <a:cs typeface="Calibri" pitchFamily="34" charset="-120"/>
+              </a:rPr>
+              <a:t>◐</a:t>
+            </a:r>
+            <a:endParaRPr lang="en-US" sz="1500" dirty="0"/>
+          </a:p>
+        </p:txBody>
+      </p:sp>
+      <p:sp>
+        <p:nvSpPr>
+          <p:cNvPr id="17" name="Text 15"/>
+          <p:cNvSpPr/>
+          <p:nvPr/>
+        </p:nvSpPr>
+        <p:spPr>
+          <a:xfrm>
+            <a:off x="8494776" y="2999232"/>
+            <a:ext cx="1481328" cy="347472"/>
+          </a:xfrm>
+          <a:prstGeom prst="rect">
+            <a:avLst/>
+          </a:prstGeom>
+          <a:noFill/>
+          <a:ln/>
+        </p:spPr>
+        <p:txBody>
+          <a:bodyPr wrap="square" lIns="0" tIns="0" rIns="0" bIns="0" rtlCol="0" anchor="ctr"/>
+          <a:lstStyle/>
+          <a:p>
+            <a:pPr algn="ctr" indent="0" marL="0">
+              <a:buNone/>
+            </a:pPr>
+            <a:r>
+              <a:rPr lang="en-US" sz="1500" dirty="0">
+                <a:solidFill>
+                  <a:srgbClr val="AFA89C"/>
+                </a:solidFill>
+                <a:latin typeface="Calibri" pitchFamily="34" charset="0"/>
+                <a:ea typeface="Calibri" pitchFamily="34" charset="-122"/>
+                <a:cs typeface="Calibri" pitchFamily="34" charset="-120"/>
+              </a:rPr>
+              <a:t>○</a:t>
+            </a:r>
+            <a:endParaRPr lang="en-US" sz="1500" dirty="0"/>
+          </a:p>
+        </p:txBody>
+      </p:sp>
+      <p:sp>
+        <p:nvSpPr>
+          <p:cNvPr id="18" name="Text 16"/>
+          <p:cNvSpPr/>
+          <p:nvPr/>
+        </p:nvSpPr>
+        <p:spPr>
+          <a:xfrm>
+            <a:off x="9976104" y="2999232"/>
+            <a:ext cx="1481328" cy="347472"/>
+          </a:xfrm>
+          <a:prstGeom prst="rect">
+            <a:avLst/>
+          </a:prstGeom>
+          <a:noFill/>
+          <a:ln/>
+        </p:spPr>
+        <p:txBody>
+          <a:bodyPr wrap="square" lIns="0" tIns="0" rIns="0" bIns="0" rtlCol="0" anchor="ctr"/>
+          <a:lstStyle/>
+          <a:p>
+            <a:pPr algn="ctr" indent="0" marL="0">
+              <a:buNone/>
+            </a:pPr>
+            <a:r>
+              <a:rPr lang="en-US" sz="1500" dirty="0">
+                <a:solidFill>
+                  <a:srgbClr val="AFA89C"/>
+                </a:solidFill>
+                <a:latin typeface="Calibri" pitchFamily="34" charset="0"/>
+                <a:ea typeface="Calibri" pitchFamily="34" charset="-122"/>
+                <a:cs typeface="Calibri" pitchFamily="34" charset="-120"/>
+              </a:rPr>
+              <a:t>○</a:t>
+            </a:r>
+            <a:endParaRPr lang="en-US" sz="1500" dirty="0"/>
+          </a:p>
+        </p:txBody>
+      </p:sp>
+      <p:sp>
+        <p:nvSpPr>
+          <p:cNvPr id="19" name="Shape 17"/>
+          <p:cNvSpPr/>
+          <p:nvPr/>
+        </p:nvSpPr>
+        <p:spPr>
+          <a:xfrm>
+            <a:off x="685800" y="3410712"/>
+            <a:ext cx="10835640" cy="438912"/>
+          </a:xfrm>
+          <a:prstGeom prst="rect">
+            <a:avLst/>
+          </a:prstGeom>
+          <a:solidFill>
+            <a:srgbClr val="FAF9F5"/>
+          </a:solidFill>
+          <a:ln w="12700">
+            <a:solidFill>
+              <a:srgbClr val="FAF9F5"/>
+            </a:solidFill>
+            <a:prstDash val="solid"/>
+          </a:ln>
+        </p:spPr>
+      </p:sp>
+      <p:sp>
+        <p:nvSpPr>
+          <p:cNvPr id="20" name="Text 18"/>
+          <p:cNvSpPr/>
+          <p:nvPr/>
+        </p:nvSpPr>
+        <p:spPr>
+          <a:xfrm>
+            <a:off x="868680" y="3456432"/>
+            <a:ext cx="4572000" cy="347472"/>
+          </a:xfrm>
+          <a:prstGeom prst="rect">
+            <a:avLst/>
+          </a:prstGeom>
+          <a:noFill/>
+          <a:ln/>
+        </p:spPr>
+        <p:txBody>
+          <a:bodyPr wrap="square" lIns="0" tIns="0" rIns="0" bIns="0" rtlCol="0" anchor="ctr"/>
+          <a:lstStyle/>
+          <a:p>
+            <a:pPr indent="0" marL="0">
+              <a:buNone/>
+            </a:pPr>
+            <a:r>
+              <a:rPr lang="en-US" sz="1200" dirty="0">
+                <a:solidFill>
+                  <a:srgbClr val="191919"/>
+                </a:solidFill>
+                <a:latin typeface="Calibri" pitchFamily="34" charset="0"/>
+                <a:ea typeface="Calibri" pitchFamily="34" charset="-122"/>
+                <a:cs typeface="Calibri" pitchFamily="34" charset="-120"/>
+              </a:rPr>
+              <a:t>Reviews against the requirement</a:t>
+            </a:r>
+            <a:endParaRPr lang="en-US" sz="1200" dirty="0"/>
+          </a:p>
+        </p:txBody>
+      </p:sp>
+      <p:sp>
+        <p:nvSpPr>
+          <p:cNvPr id="21" name="Text 19"/>
+          <p:cNvSpPr/>
+          <p:nvPr/>
+        </p:nvSpPr>
+        <p:spPr>
+          <a:xfrm>
+            <a:off x="5532120" y="3456432"/>
+            <a:ext cx="1481328" cy="347472"/>
+          </a:xfrm>
+          <a:prstGeom prst="rect">
+            <a:avLst/>
+          </a:prstGeom>
+          <a:noFill/>
+          <a:ln/>
+        </p:spPr>
+        <p:txBody>
+          <a:bodyPr wrap="square" lIns="0" tIns="0" rIns="0" bIns="0" rtlCol="0" anchor="ctr"/>
+          <a:lstStyle/>
+          <a:p>
+            <a:pPr algn="ctr" indent="0" marL="0">
+              <a:buNone/>
+            </a:pPr>
+            <a:r>
+              <a:rPr lang="en-US" sz="1500" dirty="0">
+                <a:solidFill>
+                  <a:srgbClr val="D97757"/>
+                </a:solidFill>
+                <a:latin typeface="Calibri" pitchFamily="34" charset="0"/>
+                <a:ea typeface="Calibri" pitchFamily="34" charset="-122"/>
+                <a:cs typeface="Calibri" pitchFamily="34" charset="-120"/>
+              </a:rPr>
+              <a:t>●</a:t>
+            </a:r>
+            <a:endParaRPr lang="en-US" sz="1500" dirty="0"/>
+          </a:p>
+        </p:txBody>
+      </p:sp>
+      <p:sp>
+        <p:nvSpPr>
+          <p:cNvPr id="22" name="Text 20"/>
+          <p:cNvSpPr/>
+          <p:nvPr/>
+        </p:nvSpPr>
+        <p:spPr>
+          <a:xfrm>
+            <a:off x="7013448" y="3456432"/>
+            <a:ext cx="1481328" cy="347472"/>
+          </a:xfrm>
+          <a:prstGeom prst="rect">
+            <a:avLst/>
+          </a:prstGeom>
+          <a:noFill/>
+          <a:ln/>
+        </p:spPr>
+        <p:txBody>
+          <a:bodyPr wrap="square" lIns="0" tIns="0" rIns="0" bIns="0" rtlCol="0" anchor="ctr"/>
+          <a:lstStyle/>
+          <a:p>
+            <a:pPr algn="ctr" indent="0" marL="0">
+              <a:buNone/>
+            </a:pPr>
+            <a:r>
+              <a:rPr lang="en-US" sz="1500" dirty="0">
+                <a:solidFill>
+                  <a:srgbClr val="AFA89C"/>
+                </a:solidFill>
+                <a:latin typeface="Calibri" pitchFamily="34" charset="0"/>
+                <a:ea typeface="Calibri" pitchFamily="34" charset="-122"/>
+                <a:cs typeface="Calibri" pitchFamily="34" charset="-120"/>
+              </a:rPr>
+              <a:t>○</a:t>
+            </a:r>
+            <a:endParaRPr lang="en-US" sz="1500" dirty="0"/>
+          </a:p>
+        </p:txBody>
+      </p:sp>
+      <p:sp>
+        <p:nvSpPr>
+          <p:cNvPr id="23" name="Text 21"/>
+          <p:cNvSpPr/>
+          <p:nvPr/>
+        </p:nvSpPr>
+        <p:spPr>
+          <a:xfrm>
+            <a:off x="8494776" y="3456432"/>
+            <a:ext cx="1481328" cy="347472"/>
+          </a:xfrm>
+          <a:prstGeom prst="rect">
+            <a:avLst/>
+          </a:prstGeom>
+          <a:noFill/>
+          <a:ln/>
+        </p:spPr>
+        <p:txBody>
+          <a:bodyPr wrap="square" lIns="0" tIns="0" rIns="0" bIns="0" rtlCol="0" anchor="ctr"/>
+          <a:lstStyle/>
+          <a:p>
+            <a:pPr algn="ctr" indent="0" marL="0">
+              <a:buNone/>
+            </a:pPr>
+            <a:r>
+              <a:rPr lang="en-US" sz="1500" dirty="0">
+                <a:solidFill>
+                  <a:srgbClr val="D4A27F"/>
+                </a:solidFill>
+                <a:latin typeface="Calibri" pitchFamily="34" charset="0"/>
+                <a:ea typeface="Calibri" pitchFamily="34" charset="-122"/>
+                <a:cs typeface="Calibri" pitchFamily="34" charset="-120"/>
+              </a:rPr>
+              <a:t>◐</a:t>
+            </a:r>
+            <a:endParaRPr lang="en-US" sz="1500" dirty="0"/>
+          </a:p>
+        </p:txBody>
+      </p:sp>
+      <p:sp>
+        <p:nvSpPr>
+          <p:cNvPr id="24" name="Text 22"/>
+          <p:cNvSpPr/>
+          <p:nvPr/>
+        </p:nvSpPr>
+        <p:spPr>
+          <a:xfrm>
+            <a:off x="9976104" y="3456432"/>
+            <a:ext cx="1481328" cy="347472"/>
+          </a:xfrm>
+          <a:prstGeom prst="rect">
+            <a:avLst/>
+          </a:prstGeom>
+          <a:noFill/>
+          <a:ln/>
+        </p:spPr>
+        <p:txBody>
+          <a:bodyPr wrap="square" lIns="0" tIns="0" rIns="0" bIns="0" rtlCol="0" anchor="ctr"/>
+          <a:lstStyle/>
+          <a:p>
+            <a:pPr algn="ctr" indent="0" marL="0">
+              <a:buNone/>
+            </a:pPr>
+            <a:r>
+              <a:rPr lang="en-US" sz="1500" dirty="0">
+                <a:solidFill>
+                  <a:srgbClr val="AFA89C"/>
+                </a:solidFill>
+                <a:latin typeface="Calibri" pitchFamily="34" charset="0"/>
+                <a:ea typeface="Calibri" pitchFamily="34" charset="-122"/>
+                <a:cs typeface="Calibri" pitchFamily="34" charset="-120"/>
+              </a:rPr>
+              <a:t>○</a:t>
+            </a:r>
+            <a:endParaRPr lang="en-US" sz="1500" dirty="0"/>
+          </a:p>
+        </p:txBody>
+      </p:sp>
+      <p:sp>
+        <p:nvSpPr>
+          <p:cNvPr id="25" name="Text 23"/>
+          <p:cNvSpPr/>
+          <p:nvPr/>
+        </p:nvSpPr>
+        <p:spPr>
+          <a:xfrm>
+            <a:off x="868680" y="3913632"/>
+            <a:ext cx="4572000" cy="347472"/>
+          </a:xfrm>
+          <a:prstGeom prst="rect">
+            <a:avLst/>
+          </a:prstGeom>
+          <a:noFill/>
+          <a:ln/>
+        </p:spPr>
+        <p:txBody>
+          <a:bodyPr wrap="square" lIns="0" tIns="0" rIns="0" bIns="0" rtlCol="0" anchor="ctr"/>
+          <a:lstStyle/>
+          <a:p>
+            <a:pPr indent="0" marL="0">
+              <a:buNone/>
+            </a:pPr>
+            <a:r>
+              <a:rPr lang="en-US" sz="1200" dirty="0">
+                <a:solidFill>
+                  <a:srgbClr val="191919"/>
+                </a:solidFill>
+                <a:latin typeface="Calibri" pitchFamily="34" charset="0"/>
+                <a:ea typeface="Calibri" pitchFamily="34" charset="-122"/>
+                <a:cs typeface="Calibri" pitchFamily="34" charset="-120"/>
+              </a:rPr>
+              <a:t>Tracks the review round trip</a:t>
+            </a:r>
+            <a:endParaRPr lang="en-US" sz="1200" dirty="0"/>
+          </a:p>
+        </p:txBody>
+      </p:sp>
+      <p:sp>
+        <p:nvSpPr>
+          <p:cNvPr id="26" name="Text 24"/>
+          <p:cNvSpPr/>
+          <p:nvPr/>
+        </p:nvSpPr>
+        <p:spPr>
+          <a:xfrm>
+            <a:off x="5532120" y="3913632"/>
+            <a:ext cx="1481328" cy="347472"/>
+          </a:xfrm>
+          <a:prstGeom prst="rect">
+            <a:avLst/>
+          </a:prstGeom>
+          <a:noFill/>
+          <a:ln/>
+        </p:spPr>
+        <p:txBody>
+          <a:bodyPr wrap="square" lIns="0" tIns="0" rIns="0" bIns="0" rtlCol="0" anchor="ctr"/>
+          <a:lstStyle/>
+          <a:p>
+            <a:pPr algn="ctr" indent="0" marL="0">
+              <a:buNone/>
+            </a:pPr>
+            <a:r>
+              <a:rPr lang="en-US" sz="1500" dirty="0">
+                <a:solidFill>
+                  <a:srgbClr val="D97757"/>
+                </a:solidFill>
+                <a:latin typeface="Calibri" pitchFamily="34" charset="0"/>
+                <a:ea typeface="Calibri" pitchFamily="34" charset="-122"/>
+                <a:cs typeface="Calibri" pitchFamily="34" charset="-120"/>
+              </a:rPr>
+              <a:t>●</a:t>
+            </a:r>
+            <a:endParaRPr lang="en-US" sz="1500" dirty="0"/>
+          </a:p>
+        </p:txBody>
+      </p:sp>
+      <p:sp>
+        <p:nvSpPr>
+          <p:cNvPr id="27" name="Text 25"/>
+          <p:cNvSpPr/>
+          <p:nvPr/>
+        </p:nvSpPr>
+        <p:spPr>
+          <a:xfrm>
+            <a:off x="7013448" y="3913632"/>
+            <a:ext cx="1481328" cy="347472"/>
+          </a:xfrm>
+          <a:prstGeom prst="rect">
+            <a:avLst/>
+          </a:prstGeom>
+          <a:noFill/>
+          <a:ln/>
+        </p:spPr>
+        <p:txBody>
+          <a:bodyPr wrap="square" lIns="0" tIns="0" rIns="0" bIns="0" rtlCol="0" anchor="ctr"/>
+          <a:lstStyle/>
+          <a:p>
+            <a:pPr algn="ctr" indent="0" marL="0">
+              <a:buNone/>
+            </a:pPr>
+            <a:r>
+              <a:rPr lang="en-US" sz="1500" dirty="0">
+                <a:solidFill>
+                  <a:srgbClr val="AFA89C"/>
+                </a:solidFill>
+                <a:latin typeface="Calibri" pitchFamily="34" charset="0"/>
+                <a:ea typeface="Calibri" pitchFamily="34" charset="-122"/>
+                <a:cs typeface="Calibri" pitchFamily="34" charset="-120"/>
+              </a:rPr>
+              <a:t>○</a:t>
+            </a:r>
+            <a:endParaRPr lang="en-US" sz="1500" dirty="0"/>
+          </a:p>
+        </p:txBody>
+      </p:sp>
+      <p:sp>
+        <p:nvSpPr>
+          <p:cNvPr id="28" name="Text 26"/>
+          <p:cNvSpPr/>
+          <p:nvPr/>
+        </p:nvSpPr>
+        <p:spPr>
+          <a:xfrm>
+            <a:off x="8494776" y="3913632"/>
+            <a:ext cx="1481328" cy="347472"/>
+          </a:xfrm>
+          <a:prstGeom prst="rect">
+            <a:avLst/>
+          </a:prstGeom>
+          <a:noFill/>
+          <a:ln/>
+        </p:spPr>
+        <p:txBody>
+          <a:bodyPr wrap="square" lIns="0" tIns="0" rIns="0" bIns="0" rtlCol="0" anchor="ctr"/>
+          <a:lstStyle/>
+          <a:p>
+            <a:pPr algn="ctr" indent="0" marL="0">
+              <a:buNone/>
+            </a:pPr>
+            <a:r>
+              <a:rPr lang="en-US" sz="1500" dirty="0">
+                <a:solidFill>
+                  <a:srgbClr val="AFA89C"/>
+                </a:solidFill>
+                <a:latin typeface="Calibri" pitchFamily="34" charset="0"/>
+                <a:ea typeface="Calibri" pitchFamily="34" charset="-122"/>
+                <a:cs typeface="Calibri" pitchFamily="34" charset="-120"/>
+              </a:rPr>
+              <a:t>○</a:t>
+            </a:r>
+            <a:endParaRPr lang="en-US" sz="1500" dirty="0"/>
+          </a:p>
+        </p:txBody>
+      </p:sp>
+      <p:sp>
+        <p:nvSpPr>
+          <p:cNvPr id="29" name="Text 27"/>
+          <p:cNvSpPr/>
+          <p:nvPr/>
+        </p:nvSpPr>
+        <p:spPr>
+          <a:xfrm>
+            <a:off x="9976104" y="3913632"/>
+            <a:ext cx="1481328" cy="347472"/>
+          </a:xfrm>
+          <a:prstGeom prst="rect">
+            <a:avLst/>
+          </a:prstGeom>
+          <a:noFill/>
+          <a:ln/>
+        </p:spPr>
+        <p:txBody>
+          <a:bodyPr wrap="square" lIns="0" tIns="0" rIns="0" bIns="0" rtlCol="0" anchor="ctr"/>
+          <a:lstStyle/>
+          <a:p>
+            <a:pPr algn="ctr" indent="0" marL="0">
+              <a:buNone/>
+            </a:pPr>
+            <a:r>
+              <a:rPr lang="en-US" sz="1500" dirty="0">
+                <a:solidFill>
+                  <a:srgbClr val="AFA89C"/>
+                </a:solidFill>
+                <a:latin typeface="Calibri" pitchFamily="34" charset="0"/>
+                <a:ea typeface="Calibri" pitchFamily="34" charset="-122"/>
+                <a:cs typeface="Calibri" pitchFamily="34" charset="-120"/>
+              </a:rPr>
+              <a:t>○</a:t>
+            </a:r>
+            <a:endParaRPr lang="en-US" sz="1500" dirty="0"/>
+          </a:p>
+        </p:txBody>
+      </p:sp>
+      <p:sp>
+        <p:nvSpPr>
+          <p:cNvPr id="30" name="Shape 28"/>
+          <p:cNvSpPr/>
+          <p:nvPr/>
+        </p:nvSpPr>
+        <p:spPr>
+          <a:xfrm>
+            <a:off x="685800" y="4325112"/>
+            <a:ext cx="10835640" cy="438912"/>
+          </a:xfrm>
+          <a:prstGeom prst="rect">
+            <a:avLst/>
+          </a:prstGeom>
+          <a:solidFill>
+            <a:srgbClr val="FAF9F5"/>
+          </a:solidFill>
+          <a:ln w="12700">
+            <a:solidFill>
+              <a:srgbClr val="FAF9F5"/>
+            </a:solidFill>
+            <a:prstDash val="solid"/>
+          </a:ln>
+        </p:spPr>
+      </p:sp>
+      <p:sp>
+        <p:nvSpPr>
+          <p:cNvPr id="31" name="Text 29"/>
+          <p:cNvSpPr/>
+          <p:nvPr/>
+        </p:nvSpPr>
+        <p:spPr>
+          <a:xfrm>
+            <a:off x="868680" y="4370832"/>
+            <a:ext cx="4572000" cy="347472"/>
+          </a:xfrm>
+          <a:prstGeom prst="rect">
+            <a:avLst/>
+          </a:prstGeom>
+          <a:noFill/>
+          <a:ln/>
+        </p:spPr>
+        <p:txBody>
+          <a:bodyPr wrap="square" lIns="0" tIns="0" rIns="0" bIns="0" rtlCol="0" anchor="ctr"/>
+          <a:lstStyle/>
+          <a:p>
+            <a:pPr indent="0" marL="0">
+              <a:buNone/>
+            </a:pPr>
+            <a:r>
+              <a:rPr lang="en-US" sz="1200" dirty="0">
+                <a:solidFill>
+                  <a:srgbClr val="191919"/>
+                </a:solidFill>
+                <a:latin typeface="Calibri" pitchFamily="34" charset="0"/>
+                <a:ea typeface="Calibri" pitchFamily="34" charset="-122"/>
+                <a:cs typeface="Calibri" pitchFamily="34" charset="-120"/>
+              </a:rPr>
+              <a:t>Routes to QA and reads the verdict</a:t>
+            </a:r>
+            <a:endParaRPr lang="en-US" sz="1200" dirty="0"/>
+          </a:p>
+        </p:txBody>
+      </p:sp>
+      <p:sp>
+        <p:nvSpPr>
+          <p:cNvPr id="32" name="Text 30"/>
+          <p:cNvSpPr/>
+          <p:nvPr/>
+        </p:nvSpPr>
+        <p:spPr>
+          <a:xfrm>
+            <a:off x="5532120" y="4370832"/>
+            <a:ext cx="1481328" cy="347472"/>
+          </a:xfrm>
+          <a:prstGeom prst="rect">
+            <a:avLst/>
+          </a:prstGeom>
+          <a:noFill/>
+          <a:ln/>
+        </p:spPr>
+        <p:txBody>
+          <a:bodyPr wrap="square" lIns="0" tIns="0" rIns="0" bIns="0" rtlCol="0" anchor="ctr"/>
+          <a:lstStyle/>
+          <a:p>
+            <a:pPr algn="ctr" indent="0" marL="0">
+              <a:buNone/>
+            </a:pPr>
+            <a:r>
+              <a:rPr lang="en-US" sz="1500" dirty="0">
+                <a:solidFill>
+                  <a:srgbClr val="D97757"/>
+                </a:solidFill>
+                <a:latin typeface="Calibri" pitchFamily="34" charset="0"/>
+                <a:ea typeface="Calibri" pitchFamily="34" charset="-122"/>
+                <a:cs typeface="Calibri" pitchFamily="34" charset="-120"/>
+              </a:rPr>
+              <a:t>●</a:t>
+            </a:r>
+            <a:endParaRPr lang="en-US" sz="1500" dirty="0"/>
+          </a:p>
+        </p:txBody>
+      </p:sp>
+      <p:sp>
+        <p:nvSpPr>
+          <p:cNvPr id="33" name="Text 31"/>
+          <p:cNvSpPr/>
+          <p:nvPr/>
+        </p:nvSpPr>
+        <p:spPr>
+          <a:xfrm>
+            <a:off x="7013448" y="4370832"/>
+            <a:ext cx="1481328" cy="347472"/>
+          </a:xfrm>
+          <a:prstGeom prst="rect">
+            <a:avLst/>
+          </a:prstGeom>
+          <a:noFill/>
+          <a:ln/>
+        </p:spPr>
+        <p:txBody>
+          <a:bodyPr wrap="square" lIns="0" tIns="0" rIns="0" bIns="0" rtlCol="0" anchor="ctr"/>
+          <a:lstStyle/>
+          <a:p>
+            <a:pPr algn="ctr" indent="0" marL="0">
+              <a:buNone/>
+            </a:pPr>
+            <a:r>
+              <a:rPr lang="en-US" sz="1500" dirty="0">
+                <a:solidFill>
+                  <a:srgbClr val="AFA89C"/>
+                </a:solidFill>
+                <a:latin typeface="Calibri" pitchFamily="34" charset="0"/>
+                <a:ea typeface="Calibri" pitchFamily="34" charset="-122"/>
+                <a:cs typeface="Calibri" pitchFamily="34" charset="-120"/>
+              </a:rPr>
+              <a:t>○</a:t>
+            </a:r>
+            <a:endParaRPr lang="en-US" sz="1500" dirty="0"/>
+          </a:p>
+        </p:txBody>
+      </p:sp>
+      <p:sp>
+        <p:nvSpPr>
+          <p:cNvPr id="34" name="Text 32"/>
+          <p:cNvSpPr/>
+          <p:nvPr/>
+        </p:nvSpPr>
+        <p:spPr>
+          <a:xfrm>
+            <a:off x="8494776" y="4370832"/>
+            <a:ext cx="1481328" cy="347472"/>
+          </a:xfrm>
+          <a:prstGeom prst="rect">
+            <a:avLst/>
+          </a:prstGeom>
+          <a:noFill/>
+          <a:ln/>
+        </p:spPr>
+        <p:txBody>
+          <a:bodyPr wrap="square" lIns="0" tIns="0" rIns="0" bIns="0" rtlCol="0" anchor="ctr"/>
+          <a:lstStyle/>
+          <a:p>
+            <a:pPr algn="ctr" indent="0" marL="0">
+              <a:buNone/>
+            </a:pPr>
+            <a:r>
+              <a:rPr lang="en-US" sz="1500" dirty="0">
+                <a:solidFill>
+                  <a:srgbClr val="AFA89C"/>
+                </a:solidFill>
+                <a:latin typeface="Calibri" pitchFamily="34" charset="0"/>
+                <a:ea typeface="Calibri" pitchFamily="34" charset="-122"/>
+                <a:cs typeface="Calibri" pitchFamily="34" charset="-120"/>
+              </a:rPr>
+              <a:t>○</a:t>
+            </a:r>
+            <a:endParaRPr lang="en-US" sz="1500" dirty="0"/>
+          </a:p>
+        </p:txBody>
+      </p:sp>
+      <p:sp>
+        <p:nvSpPr>
+          <p:cNvPr id="35" name="Text 33"/>
+          <p:cNvSpPr/>
+          <p:nvPr/>
+        </p:nvSpPr>
+        <p:spPr>
+          <a:xfrm>
+            <a:off x="9976104" y="4370832"/>
+            <a:ext cx="1481328" cy="347472"/>
+          </a:xfrm>
+          <a:prstGeom prst="rect">
+            <a:avLst/>
+          </a:prstGeom>
+          <a:noFill/>
+          <a:ln/>
+        </p:spPr>
+        <p:txBody>
+          <a:bodyPr wrap="square" lIns="0" tIns="0" rIns="0" bIns="0" rtlCol="0" anchor="ctr"/>
+          <a:lstStyle/>
+          <a:p>
+            <a:pPr algn="ctr" indent="0" marL="0">
+              <a:buNone/>
+            </a:pPr>
+            <a:r>
+              <a:rPr lang="en-US" sz="1500" dirty="0">
+                <a:solidFill>
+                  <a:srgbClr val="AFA89C"/>
+                </a:solidFill>
+                <a:latin typeface="Calibri" pitchFamily="34" charset="0"/>
+                <a:ea typeface="Calibri" pitchFamily="34" charset="-122"/>
+                <a:cs typeface="Calibri" pitchFamily="34" charset="-120"/>
+              </a:rPr>
+              <a:t>○</a:t>
+            </a:r>
+            <a:endParaRPr lang="en-US" sz="1500" dirty="0"/>
+          </a:p>
+        </p:txBody>
+      </p:sp>
+      <p:sp>
+        <p:nvSpPr>
+          <p:cNvPr id="36" name="Text 34"/>
+          <p:cNvSpPr/>
+          <p:nvPr/>
+        </p:nvSpPr>
+        <p:spPr>
+          <a:xfrm>
+            <a:off x="868680" y="4828032"/>
+            <a:ext cx="4572000" cy="347472"/>
+          </a:xfrm>
+          <a:prstGeom prst="rect">
+            <a:avLst/>
+          </a:prstGeom>
+          <a:noFill/>
+          <a:ln/>
+        </p:spPr>
+        <p:txBody>
+          <a:bodyPr wrap="square" lIns="0" tIns="0" rIns="0" bIns="0" rtlCol="0" anchor="ctr"/>
+          <a:lstStyle/>
+          <a:p>
+            <a:pPr indent="0" marL="0">
+              <a:buNone/>
+            </a:pPr>
+            <a:r>
+              <a:rPr lang="en-US" sz="1200" dirty="0">
+                <a:solidFill>
+                  <a:srgbClr val="191919"/>
+                </a:solidFill>
+                <a:latin typeface="Calibri" pitchFamily="34" charset="0"/>
+                <a:ea typeface="Calibri" pitchFamily="34" charset="-122"/>
+                <a:cs typeface="Calibri" pitchFamily="34" charset="-120"/>
+              </a:rPr>
+              <a:t>Moves the card through all 8 stages</a:t>
+            </a:r>
+            <a:endParaRPr lang="en-US" sz="1200" dirty="0"/>
+          </a:p>
+        </p:txBody>
+      </p:sp>
+      <p:sp>
+        <p:nvSpPr>
+          <p:cNvPr id="37" name="Text 35"/>
+          <p:cNvSpPr/>
+          <p:nvPr/>
+        </p:nvSpPr>
+        <p:spPr>
+          <a:xfrm>
+            <a:off x="5532120" y="4828032"/>
+            <a:ext cx="1481328" cy="347472"/>
+          </a:xfrm>
+          <a:prstGeom prst="rect">
+            <a:avLst/>
+          </a:prstGeom>
+          <a:noFill/>
+          <a:ln/>
+        </p:spPr>
+        <p:txBody>
+          <a:bodyPr wrap="square" lIns="0" tIns="0" rIns="0" bIns="0" rtlCol="0" anchor="ctr"/>
+          <a:lstStyle/>
+          <a:p>
+            <a:pPr algn="ctr" indent="0" marL="0">
+              <a:buNone/>
+            </a:pPr>
+            <a:r>
+              <a:rPr lang="en-US" sz="1500" dirty="0">
+                <a:solidFill>
+                  <a:srgbClr val="D97757"/>
+                </a:solidFill>
+                <a:latin typeface="Calibri" pitchFamily="34" charset="0"/>
+                <a:ea typeface="Calibri" pitchFamily="34" charset="-122"/>
+                <a:cs typeface="Calibri" pitchFamily="34" charset="-120"/>
+              </a:rPr>
+              <a:t>●</a:t>
+            </a:r>
+            <a:endParaRPr lang="en-US" sz="1500" dirty="0"/>
+          </a:p>
+        </p:txBody>
+      </p:sp>
+      <p:sp>
+        <p:nvSpPr>
+          <p:cNvPr id="38" name="Text 36"/>
+          <p:cNvSpPr/>
+          <p:nvPr/>
+        </p:nvSpPr>
+        <p:spPr>
+          <a:xfrm>
+            <a:off x="7013448" y="4828032"/>
+            <a:ext cx="1481328" cy="347472"/>
+          </a:xfrm>
+          <a:prstGeom prst="rect">
+            <a:avLst/>
+          </a:prstGeom>
+          <a:noFill/>
+          <a:ln/>
+        </p:spPr>
+        <p:txBody>
+          <a:bodyPr wrap="square" lIns="0" tIns="0" rIns="0" bIns="0" rtlCol="0" anchor="ctr"/>
+          <a:lstStyle/>
+          <a:p>
+            <a:pPr algn="ctr" indent="0" marL="0">
+              <a:buNone/>
+            </a:pPr>
+            <a:r>
+              <a:rPr lang="en-US" sz="1500" dirty="0">
+                <a:solidFill>
+                  <a:srgbClr val="AFA89C"/>
+                </a:solidFill>
+                <a:latin typeface="Calibri" pitchFamily="34" charset="0"/>
+                <a:ea typeface="Calibri" pitchFamily="34" charset="-122"/>
+                <a:cs typeface="Calibri" pitchFamily="34" charset="-120"/>
+              </a:rPr>
+              <a:t>○</a:t>
+            </a:r>
+            <a:endParaRPr lang="en-US" sz="1500" dirty="0"/>
+          </a:p>
+        </p:txBody>
+      </p:sp>
+      <p:sp>
+        <p:nvSpPr>
+          <p:cNvPr id="39" name="Text 37"/>
+          <p:cNvSpPr/>
+          <p:nvPr/>
+        </p:nvSpPr>
+        <p:spPr>
+          <a:xfrm>
+            <a:off x="8494776" y="4828032"/>
+            <a:ext cx="1481328" cy="347472"/>
+          </a:xfrm>
+          <a:prstGeom prst="rect">
+            <a:avLst/>
+          </a:prstGeom>
+          <a:noFill/>
+          <a:ln/>
+        </p:spPr>
+        <p:txBody>
+          <a:bodyPr wrap="square" lIns="0" tIns="0" rIns="0" bIns="0" rtlCol="0" anchor="ctr"/>
+          <a:lstStyle/>
+          <a:p>
+            <a:pPr algn="ctr" indent="0" marL="0">
+              <a:buNone/>
+            </a:pPr>
+            <a:r>
+              <a:rPr lang="en-US" sz="1500" dirty="0">
+                <a:solidFill>
+                  <a:srgbClr val="AFA89C"/>
+                </a:solidFill>
+                <a:latin typeface="Calibri" pitchFamily="34" charset="0"/>
+                <a:ea typeface="Calibri" pitchFamily="34" charset="-122"/>
+                <a:cs typeface="Calibri" pitchFamily="34" charset="-120"/>
+              </a:rPr>
+              <a:t>○</a:t>
+            </a:r>
+            <a:endParaRPr lang="en-US" sz="1500" dirty="0"/>
+          </a:p>
+        </p:txBody>
+      </p:sp>
+      <p:sp>
+        <p:nvSpPr>
+          <p:cNvPr id="40" name="Text 38"/>
+          <p:cNvSpPr/>
+          <p:nvPr/>
+        </p:nvSpPr>
+        <p:spPr>
+          <a:xfrm>
+            <a:off x="9976104" y="4828032"/>
+            <a:ext cx="1481328" cy="347472"/>
+          </a:xfrm>
+          <a:prstGeom prst="rect">
+            <a:avLst/>
+          </a:prstGeom>
+          <a:noFill/>
+          <a:ln/>
+        </p:spPr>
+        <p:txBody>
+          <a:bodyPr wrap="square" lIns="0" tIns="0" rIns="0" bIns="0" rtlCol="0" anchor="ctr"/>
+          <a:lstStyle/>
+          <a:p>
+            <a:pPr algn="ctr" indent="0" marL="0">
+              <a:buNone/>
+            </a:pPr>
+            <a:r>
+              <a:rPr lang="en-US" sz="1500" dirty="0">
+                <a:solidFill>
+                  <a:srgbClr val="D4A27F"/>
+                </a:solidFill>
+                <a:latin typeface="Calibri" pitchFamily="34" charset="0"/>
+                <a:ea typeface="Calibri" pitchFamily="34" charset="-122"/>
+                <a:cs typeface="Calibri" pitchFamily="34" charset="-120"/>
+              </a:rPr>
+              <a:t>◐</a:t>
+            </a:r>
+            <a:endParaRPr lang="en-US" sz="1500" dirty="0"/>
+          </a:p>
+        </p:txBody>
+      </p:sp>
+      <p:sp>
+        <p:nvSpPr>
+          <p:cNvPr id="41" name="Shape 39"/>
+          <p:cNvSpPr/>
+          <p:nvPr/>
+        </p:nvSpPr>
+        <p:spPr>
+          <a:xfrm>
+            <a:off x="685800" y="5239512"/>
+            <a:ext cx="10835640" cy="438912"/>
+          </a:xfrm>
+          <a:prstGeom prst="rect">
+            <a:avLst/>
+          </a:prstGeom>
+          <a:solidFill>
+            <a:srgbClr val="FAF9F5"/>
+          </a:solidFill>
+          <a:ln w="12700">
+            <a:solidFill>
+              <a:srgbClr val="FAF9F5"/>
+            </a:solidFill>
+            <a:prstDash val="solid"/>
+          </a:ln>
+        </p:spPr>
+      </p:sp>
+      <p:sp>
+        <p:nvSpPr>
+          <p:cNvPr id="42" name="Text 40"/>
+          <p:cNvSpPr/>
+          <p:nvPr/>
+        </p:nvSpPr>
+        <p:spPr>
+          <a:xfrm>
+            <a:off x="868680" y="5285232"/>
+            <a:ext cx="4572000" cy="347472"/>
+          </a:xfrm>
+          <a:prstGeom prst="rect">
+            <a:avLst/>
+          </a:prstGeom>
+          <a:noFill/>
+          <a:ln/>
+        </p:spPr>
+        <p:txBody>
+          <a:bodyPr wrap="square" lIns="0" tIns="0" rIns="0" bIns="0" rtlCol="0" anchor="ctr"/>
+          <a:lstStyle/>
+          <a:p>
+            <a:pPr indent="0" marL="0">
+              <a:buNone/>
+            </a:pPr>
+            <a:r>
+              <a:rPr lang="en-US" sz="1200" dirty="0">
+                <a:solidFill>
+                  <a:srgbClr val="191919"/>
+                </a:solidFill>
+                <a:latin typeface="Calibri" pitchFamily="34" charset="0"/>
+                <a:ea typeface="Calibri" pitchFamily="34" charset="-122"/>
+                <a:cs typeface="Calibri" pitchFamily="34" charset="-120"/>
+              </a:rPr>
+              <a:t>Analyses your code locally</a:t>
+            </a:r>
+            <a:endParaRPr lang="en-US" sz="1200" dirty="0"/>
+          </a:p>
+        </p:txBody>
+      </p:sp>
+      <p:sp>
+        <p:nvSpPr>
+          <p:cNvPr id="43" name="Text 41"/>
+          <p:cNvSpPr/>
+          <p:nvPr/>
+        </p:nvSpPr>
+        <p:spPr>
+          <a:xfrm>
+            <a:off x="5532120" y="5285232"/>
+            <a:ext cx="1481328" cy="347472"/>
+          </a:xfrm>
+          <a:prstGeom prst="rect">
+            <a:avLst/>
+          </a:prstGeom>
+          <a:noFill/>
+          <a:ln/>
+        </p:spPr>
+        <p:txBody>
+          <a:bodyPr wrap="square" lIns="0" tIns="0" rIns="0" bIns="0" rtlCol="0" anchor="ctr"/>
+          <a:lstStyle/>
+          <a:p>
+            <a:pPr algn="ctr" indent="0" marL="0">
+              <a:buNone/>
+            </a:pPr>
+            <a:r>
+              <a:rPr lang="en-US" sz="1500" dirty="0">
+                <a:solidFill>
+                  <a:srgbClr val="D97757"/>
+                </a:solidFill>
+                <a:latin typeface="Calibri" pitchFamily="34" charset="0"/>
+                <a:ea typeface="Calibri" pitchFamily="34" charset="-122"/>
+                <a:cs typeface="Calibri" pitchFamily="34" charset="-120"/>
+              </a:rPr>
+              <a:t>●</a:t>
+            </a:r>
+            <a:endParaRPr lang="en-US" sz="1500" dirty="0"/>
+          </a:p>
+        </p:txBody>
+      </p:sp>
+      <p:sp>
+        <p:nvSpPr>
+          <p:cNvPr id="44" name="Text 42"/>
+          <p:cNvSpPr/>
+          <p:nvPr/>
+        </p:nvSpPr>
+        <p:spPr>
+          <a:xfrm>
+            <a:off x="7013448" y="5285232"/>
+            <a:ext cx="1481328" cy="347472"/>
+          </a:xfrm>
+          <a:prstGeom prst="rect">
+            <a:avLst/>
+          </a:prstGeom>
+          <a:noFill/>
+          <a:ln/>
+        </p:spPr>
+        <p:txBody>
+          <a:bodyPr wrap="square" lIns="0" tIns="0" rIns="0" bIns="0" rtlCol="0" anchor="ctr"/>
+          <a:lstStyle/>
+          <a:p>
+            <a:pPr algn="ctr" indent="0" marL="0">
+              <a:buNone/>
+            </a:pPr>
+            <a:r>
+              <a:rPr lang="en-US" sz="1500" dirty="0">
+                <a:solidFill>
+                  <a:srgbClr val="AFA89C"/>
+                </a:solidFill>
+                <a:latin typeface="Calibri" pitchFamily="34" charset="0"/>
+                <a:ea typeface="Calibri" pitchFamily="34" charset="-122"/>
+                <a:cs typeface="Calibri" pitchFamily="34" charset="-120"/>
+              </a:rPr>
+              <a:t>○</a:t>
+            </a:r>
+            <a:endParaRPr lang="en-US" sz="1500" dirty="0"/>
+          </a:p>
+        </p:txBody>
+      </p:sp>
+      <p:sp>
+        <p:nvSpPr>
+          <p:cNvPr id="45" name="Text 43"/>
+          <p:cNvSpPr/>
+          <p:nvPr/>
+        </p:nvSpPr>
+        <p:spPr>
+          <a:xfrm>
+            <a:off x="8494776" y="5285232"/>
+            <a:ext cx="1481328" cy="347472"/>
+          </a:xfrm>
+          <a:prstGeom prst="rect">
+            <a:avLst/>
+          </a:prstGeom>
+          <a:noFill/>
+          <a:ln/>
+        </p:spPr>
+        <p:txBody>
+          <a:bodyPr wrap="square" lIns="0" tIns="0" rIns="0" bIns="0" rtlCol="0" anchor="ctr"/>
+          <a:lstStyle/>
+          <a:p>
+            <a:pPr algn="ctr" indent="0" marL="0">
+              <a:buNone/>
+            </a:pPr>
+            <a:r>
+              <a:rPr lang="en-US" sz="1500" dirty="0">
+                <a:solidFill>
+                  <a:srgbClr val="AFA89C"/>
+                </a:solidFill>
+                <a:latin typeface="Calibri" pitchFamily="34" charset="0"/>
+                <a:ea typeface="Calibri" pitchFamily="34" charset="-122"/>
+                <a:cs typeface="Calibri" pitchFamily="34" charset="-120"/>
+              </a:rPr>
+              <a:t>○</a:t>
+            </a:r>
+            <a:endParaRPr lang="en-US" sz="1500" dirty="0"/>
+          </a:p>
+        </p:txBody>
+      </p:sp>
+      <p:sp>
+        <p:nvSpPr>
+          <p:cNvPr id="46" name="Text 44"/>
+          <p:cNvSpPr/>
+          <p:nvPr/>
+        </p:nvSpPr>
+        <p:spPr>
+          <a:xfrm>
+            <a:off x="9976104" y="5285232"/>
+            <a:ext cx="1481328" cy="347472"/>
+          </a:xfrm>
+          <a:prstGeom prst="rect">
+            <a:avLst/>
+          </a:prstGeom>
+          <a:noFill/>
+          <a:ln/>
+        </p:spPr>
+        <p:txBody>
+          <a:bodyPr wrap="square" lIns="0" tIns="0" rIns="0" bIns="0" rtlCol="0" anchor="ctr"/>
+          <a:lstStyle/>
+          <a:p>
+            <a:pPr algn="ctr" indent="0" marL="0">
+              <a:buNone/>
+            </a:pPr>
+            <a:r>
+              <a:rPr lang="en-US" sz="1500" dirty="0">
+                <a:solidFill>
+                  <a:srgbClr val="AFA89C"/>
+                </a:solidFill>
+                <a:latin typeface="Calibri" pitchFamily="34" charset="0"/>
+                <a:ea typeface="Calibri" pitchFamily="34" charset="-122"/>
+                <a:cs typeface="Calibri" pitchFamily="34" charset="-120"/>
+              </a:rPr>
+              <a:t>○</a:t>
+            </a:r>
+            <a:endParaRPr lang="en-US" sz="1500" dirty="0"/>
+          </a:p>
+        </p:txBody>
+      </p:sp>
+      <p:sp>
+        <p:nvSpPr>
+          <p:cNvPr id="47" name="Text 45"/>
+          <p:cNvSpPr/>
+          <p:nvPr/>
+        </p:nvSpPr>
+        <p:spPr>
+          <a:xfrm>
+            <a:off x="5532120" y="5907024"/>
+            <a:ext cx="5925312" cy="274320"/>
+          </a:xfrm>
+          <a:prstGeom prst="rect">
+            <a:avLst/>
+          </a:prstGeom>
+          <a:noFill/>
+          <a:ln/>
+        </p:spPr>
+        <p:txBody>
+          <a:bodyPr wrap="square" lIns="0" tIns="0" rIns="0" bIns="0" rtlCol="0" anchor="ctr"/>
+          <a:lstStyle/>
+          <a:p>
+            <a:pPr algn="ctr" indent="0" marL="0">
+              <a:buNone/>
+            </a:pPr>
+            <a:r>
+              <a:rPr lang="en-US" sz="1000" dirty="0">
+                <a:solidFill>
+                  <a:srgbClr val="73716C"/>
+                </a:solidFill>
+                <a:latin typeface="Calibri" pitchFamily="34" charset="0"/>
+                <a:ea typeface="Calibri" pitchFamily="34" charset="-122"/>
+                <a:cs typeface="Calibri" pitchFamily="34" charset="-120"/>
+              </a:rPr>
+              <a:t>●  full     ◐  partial     ○  none</a:t>
+            </a:r>
+            <a:endParaRPr lang="en-US" sz="1000" dirty="0"/>
+          </a:p>
+        </p:txBody>
+      </p:sp>
+      <p:sp>
+        <p:nvSpPr>
+          <p:cNvPr id="48" name="Text 46"/>
+          <p:cNvSpPr/>
+          <p:nvPr/>
+        </p:nvSpPr>
+        <p:spPr>
+          <a:xfrm>
+            <a:off x="685800" y="5852160"/>
+            <a:ext cx="5120640" cy="365760"/>
+          </a:xfrm>
+          <a:prstGeom prst="rect">
+            <a:avLst/>
+          </a:prstGeom>
+          <a:noFill/>
+          <a:ln/>
+        </p:spPr>
+        <p:txBody>
+          <a:bodyPr wrap="square" lIns="0" tIns="0" rIns="0" bIns="0" rtlCol="0" anchor="ctr"/>
+          <a:lstStyle/>
+          <a:p>
+            <a:pPr indent="0" marL="0">
+              <a:buNone/>
+            </a:pPr>
+            <a:r>
+              <a:rPr lang="en-US" sz="1700" b="1" dirty="0">
+                <a:solidFill>
+                  <a:srgbClr val="CC785C"/>
+                </a:solidFill>
+                <a:latin typeface="Cambria" pitchFamily="34" charset="0"/>
+                <a:ea typeface="Cambria" pitchFamily="34" charset="-122"/>
+                <a:cs typeface="Cambria" pitchFamily="34" charset="-120"/>
+              </a:rPr>
+              <a:t>Build the 80%. The author becomes a plug.</a:t>
+            </a:r>
+            <a:endParaRPr lang="en-US" sz="1700" dirty="0"/>
+          </a:p>
+        </p:txBody>
+      </p:sp>
+    </p:spTree>
+  </p:cSld>
+  <p:clrMapOvr>
+    <a:masterClrMapping/>
+  </p:clrMapOvr>
+</p:sld>
+</file>
+
+<file path=ppt/slides/slide15.xml><?xml version="1.0" encoding="utf-8"?>
+<p:sld xmlns:a="http://schemas.openxmlformats.org/drawingml/2006/main" xmlns:r="http://schemas.openxmlformats.org/officeDocument/2006/relationships" xmlns:p="http://schemas.openxmlformats.org/presentationml/2006/main">
+  <p:cSld name="Slide 15">
     <p:bg>
       <p:bgPr>
         <a:solidFill>
@@ -7320,7 +9449,7 @@
                 <a:ea typeface="Cambria" pitchFamily="34" charset="-122"/>
                 <a:cs typeface="Cambria" pitchFamily="34" charset="-120"/>
               </a:rPr>
-              <a:t>706</a:t>
+              <a:t>859</a:t>
             </a:r>
             <a:endParaRPr lang="en-US" sz="3000" dirty="0"/>
           </a:p>
@@ -14471,7 +16600,7 @@
                 <a:ea typeface="Cambria" pitchFamily="34" charset="-122"/>
                 <a:cs typeface="Cambria" pitchFamily="34" charset="-120"/>
               </a:rPr>
-              <a:t>706 tests, and every one pins a behaviour we broke at least once.</a:t>
+              <a:t>859 tests, and every one pins a behaviour we broke at least once.</a:t>
             </a:r>
             <a:endParaRPr lang="en-US" sz="3100" dirty="0"/>
           </a:p>
@@ -14592,7 +16721,7 @@
                 <a:ea typeface="Cambria" pitchFamily="34" charset="-122"/>
                 <a:cs typeface="Cambria" pitchFamily="34" charset="-120"/>
               </a:rPr>
-              <a:t>44,685</a:t>
+              <a:t>53,691</a:t>
             </a:r>
             <a:endParaRPr lang="en-US" sz="2100" dirty="0"/>
           </a:p>
@@ -14720,7 +16849,7 @@
                 <a:ea typeface="Cambria" pitchFamily="34" charset="-122"/>
                 <a:cs typeface="Cambria" pitchFamily="34" charset="-120"/>
               </a:rPr>
-              <a:t>49</a:t>
+              <a:t>57</a:t>
             </a:r>
             <a:endParaRPr lang="en-US" sz="2100" dirty="0"/>
           </a:p>
@@ -14976,7 +17105,7 @@
                 <a:ea typeface="Cambria" pitchFamily="34" charset="-122"/>
                 <a:cs typeface="Cambria" pitchFamily="34" charset="-120"/>
               </a:rPr>
-              <a:t>20</a:t>
+              <a:t>21</a:t>
             </a:r>
             <a:endParaRPr lang="en-US" sz="2100" dirty="0"/>
           </a:p>
@@ -15104,7 +17233,7 @@
                 <a:ea typeface="Cambria" pitchFamily="34" charset="-122"/>
                 <a:cs typeface="Cambria" pitchFamily="34" charset="-120"/>
               </a:rPr>
-              <a:t>52</a:t>
+              <a:t>59</a:t>
             </a:r>
             <a:endParaRPr lang="en-US" sz="2100" dirty="0"/>
           </a:p>
